--- a/lessons/L03/L03.pptx
+++ b/lessons/L03/L03.pptx
@@ -22,29 +22,30 @@
     <p:sldId id="270" r:id="rId16"/>
     <p:sldId id="271" r:id="rId17"/>
     <p:sldId id="272" r:id="rId18"/>
+    <p:sldId id="273" r:id="rId19"/>
   </p:sldIdLst>
   <p:notesMasterIdLst>
-    <p:notesMasterId r:id="rId19"/>
+    <p:notesMasterId r:id="rId20"/>
   </p:notesMasterIdLst>
   <p:sldSz cx="18288000" cy="10287000"/>
   <p:notesSz cx="10287000" cy="18288000"/>
   <p:embeddedFontLst>
     <p:embeddedFont>
       <p:font typeface="Be Vietnam Pro"/>
-      <p:regular r:id="rId27"/>
-      <p:bold r:id="rId24"/>
+      <p:regular r:id="rId28"/>
+      <p:bold r:id="rId25"/>
     </p:embeddedFont>
     <p:embeddedFont>
       <p:font typeface="Bricolage Grotesque ExtraBold"/>
-      <p:regular r:id="rId25"/>
+      <p:regular r:id="rId26"/>
     </p:embeddedFont>
     <p:embeddedFont>
       <p:font typeface="Be Vietnam Pro SemiBold"/>
-      <p:regular r:id="rId26"/>
+      <p:regular r:id="rId27"/>
     </p:embeddedFont>
     <p:embeddedFont>
       <p:font typeface="Be Vietnam Pro ExtraBold"/>
-      <p:regular r:id="rId28"/>
+      <p:regular r:id="rId29"/>
     </p:embeddedFont>
   </p:embeddedFontLst>
   <p:defaultTextStyle>
@@ -1283,6 +1284,94 @@
 </p:notes>
 </file>
 
+<file path=ppt/notesSlides/notesSlide18.xml><?xml version="1.0" encoding="utf-8"?>
+<p:notes xmlns:a="http://schemas.openxmlformats.org/drawingml/2006/main" xmlns:r="http://schemas.openxmlformats.org/officeDocument/2006/relationships" xmlns:p="http://schemas.openxmlformats.org/presentationml/2006/main">
+  <p:cSld>
+    <p:spTree>
+      <p:nvGrpSpPr>
+        <p:cNvPr id="1" name=""/>
+        <p:cNvGrpSpPr/>
+        <p:nvPr/>
+      </p:nvGrpSpPr>
+      <p:grpSpPr>
+        <a:xfrm>
+          <a:off x="0" y="0"/>
+          <a:ext cx="0" cy="0"/>
+          <a:chOff x="0" y="0"/>
+          <a:chExt cx="0" cy="0"/>
+        </a:xfrm>
+      </p:grpSpPr>
+      <p:sp>
+        <p:nvSpPr>
+          <p:cNvPr id="2" name="Slide Image Placeholder 1"/>
+          <p:cNvSpPr>
+            <a:spLocks noGrp="1" noRot="1" noChangeAspect="1"/>
+          </p:cNvSpPr>
+          <p:nvPr>
+            <p:ph type="sldImg"/>
+          </p:nvPr>
+        </p:nvSpPr>
+        <p:spPr/>
+      </p:sp>
+      <p:sp>
+        <p:nvSpPr>
+          <p:cNvPr id="3" name="Notes Placeholder 2"/>
+          <p:cNvSpPr>
+            <a:spLocks noGrp="1"/>
+          </p:cNvSpPr>
+          <p:nvPr>
+            <p:ph type="body" idx="1"/>
+          </p:nvPr>
+        </p:nvSpPr>
+        <p:spPr/>
+        <p:txBody>
+          <a:bodyPr/>
+          <a:lstStyle/>
+          <a:p>
+            <a:r>
+              <a:rPr lang="en-US" dirty="0"/>
+              <a:t/>
+            </a:r>
+            <a:endParaRPr lang="en-US" dirty="0"/>
+          </a:p>
+        </p:txBody>
+      </p:sp>
+      <p:sp>
+        <p:nvSpPr>
+          <p:cNvPr id="4" name="Slide Number Placeholder 3"/>
+          <p:cNvSpPr>
+            <a:spLocks noGrp="1"/>
+          </p:cNvSpPr>
+          <p:nvPr>
+            <p:ph type="sldNum" sz="quarter" idx="10"/>
+          </p:nvPr>
+        </p:nvSpPr>
+        <p:spPr/>
+        <p:txBody>
+          <a:bodyPr/>
+          <a:lstStyle/>
+          <a:p>
+            <a:fld id="{F7021451-1387-4CA6-816F-3879F97B5CBC}" type="slidenum">
+              <a:rPr lang="en-US"/>
+              <a:t>18</a:t>
+            </a:fld>
+            <a:endParaRPr lang="en-US"/>
+          </a:p>
+        </p:txBody>
+      </p:sp>
+    </p:spTree>
+    <p:extLst>
+      <p:ext uri="{BB962C8B-B14F-4D97-AF65-F5344CB8AC3E}">
+        <p14:creationId xmlns:p14="http://schemas.microsoft.com/office/powerpoint/2010/main" val="1024086991"/>
+      </p:ext>
+    </p:extLst>
+  </p:cSld>
+  <p:clrMapOvr>
+    <a:masterClrMapping/>
+  </p:clrMapOvr>
+</p:notes>
+</file>
+
 <file path=ppt/notesSlides/notesSlide2.xml><?xml version="1.0" encoding="utf-8"?>
 <p:notes xmlns:a="http://schemas.openxmlformats.org/drawingml/2006/main" xmlns:r="http://schemas.openxmlformats.org/officeDocument/2006/relationships" xmlns:p="http://schemas.openxmlformats.org/presentationml/2006/main">
   <p:cSld>
@@ -4093,7 +4182,7 @@
       </p:sp>
       <p:pic>
         <p:nvPicPr>
-          <p:cNvPr id="62" name="Moda image moda-export-watermark-28f872e6-6d5c-4ccf-a0e1-ddf3e8ab38cd" descr="">    </p:cNvPr>
+          <p:cNvPr id="62" name="Moda image moda-export-watermark-36eb67d9-6ec7-4027-b320-654d832a5b4e" descr="">    </p:cNvPr>
           <p:cNvPicPr>
             <a:picLocks noChangeAspect="1"/>
           </p:cNvPicPr>
@@ -4125,6 +4214,1036 @@
 <file path=ppt/slides/slide10.xml><?xml version="1.0" encoding="utf-8"?>
 <p:sld xmlns:a="http://schemas.openxmlformats.org/drawingml/2006/main" xmlns:r="http://schemas.openxmlformats.org/officeDocument/2006/relationships" xmlns:p="http://schemas.openxmlformats.org/presentationml/2006/main">
   <p:cSld name="Slide 10">
+    <p:bg>
+      <p:bgPr>
+        <a:solidFill>
+          <a:srgbClr val="14161C"/>
+        </a:solidFill>
+      </p:bgPr>
+    </p:bg>
+    <p:spTree>
+      <p:nvGrpSpPr>
+        <p:cNvPr id="1" name=""/>
+        <p:cNvGrpSpPr/>
+        <p:nvPr/>
+      </p:nvGrpSpPr>
+      <p:grpSpPr>
+        <a:xfrm>
+          <a:off x="0" y="0"/>
+          <a:ext cx="0" cy="0"/>
+          <a:chOff x="0" y="0"/>
+          <a:chExt cx="0" cy="0"/>
+        </a:xfrm>
+      </p:grpSpPr>
+      <p:sp>
+        <p:nvSpPr>
+          <p:cNvPr id="2" name="Text 0"/>
+          <p:cNvSpPr/>
+          <p:nvPr/>
+        </p:nvSpPr>
+        <p:spPr>
+          <a:xfrm>
+            <a:off x="914400" y="685800"/>
+            <a:ext cx="16459200" cy="1809750"/>
+          </a:xfrm>
+          <a:prstGeom prst="rect">
+            <a:avLst/>
+          </a:prstGeom>
+          <a:noFill/>
+          <a:ln/>
+        </p:spPr>
+        <p:txBody>
+          <a:bodyPr wrap="square" lIns="0" tIns="43434" rIns="0" bIns="-43434" rtlCol="0" anchor="t"/>
+          <a:lstStyle/>
+          <a:p>
+            <a:pPr algn="l" indent="0" marL="0">
+              <a:lnSpc>
+                <a:spcPts val="6156"/>
+              </a:lnSpc>
+              <a:buNone/>
+            </a:pPr>
+            <a:r>
+              <a:rPr lang="en-US" sz="5700" dirty="0" spc="-16" kern="0">
+                <a:solidFill>
+                  <a:srgbClr val="F3EEE3"/>
+                </a:solidFill>
+                <a:latin typeface="Bricolage Grotesque ExtraBold" pitchFamily="34" charset="0"/>
+                <a:ea typeface="Bricolage Grotesque ExtraBold" pitchFamily="34" charset="-122"/>
+                <a:cs typeface="Bricolage Grotesque ExtraBold" pitchFamily="34" charset="-120"/>
+              </a:rPr>
+              <a:t>Acetylcholine</a:t>
+            </a:r>
+            <a:r>
+              <a:rPr lang="en-US" sz="5700" dirty="0" spc="-65" kern="0">
+                <a:solidFill>
+                  <a:srgbClr val="F3EEE3"/>
+                </a:solidFill>
+                <a:latin typeface="Bricolage Grotesque ExtraBold" pitchFamily="34" charset="0"/>
+                <a:ea typeface="Bricolage Grotesque ExtraBold" pitchFamily="34" charset="-122"/>
+                <a:cs typeface="Bricolage Grotesque ExtraBold" pitchFamily="34" charset="-120"/>
+              </a:rPr>
+              <a:t> và</a:t>
+            </a:r>
+            <a:r>
+              <a:rPr lang="en-US" sz="5700" dirty="0" spc="4" kern="0">
+                <a:solidFill>
+                  <a:srgbClr val="F3EEE3"/>
+                </a:solidFill>
+                <a:latin typeface="Bricolage Grotesque ExtraBold" pitchFamily="34" charset="0"/>
+                <a:ea typeface="Bricolage Grotesque ExtraBold" pitchFamily="34" charset="-122"/>
+                <a:cs typeface="Bricolage Grotesque ExtraBold" pitchFamily="34" charset="-120"/>
+              </a:rPr>
+              <a:t> endorphin</a:t>
+            </a:r>
+            <a:endParaRPr lang="en-US" sz="5700" dirty="0"/>
+          </a:p>
+        </p:txBody>
+      </p:sp>
+      <p:sp>
+        <p:nvSpPr>
+          <p:cNvPr id="3" name="Shape 1"/>
+          <p:cNvSpPr/>
+          <p:nvPr/>
+        </p:nvSpPr>
+        <p:spPr>
+          <a:xfrm>
+            <a:off x="914400" y="2857500"/>
+            <a:ext cx="8058150" cy="5334000"/>
+          </a:xfrm>
+          <a:prstGeom prst="roundRect">
+            <a:avLst>
+              <a:gd name="adj" fmla="val 5000"/>
+            </a:avLst>
+          </a:prstGeom>
+          <a:solidFill>
+            <a:srgbClr val="4A2A24"/>
+          </a:solidFill>
+          <a:ln/>
+        </p:spPr>
+      </p:sp>
+      <p:sp>
+        <p:nvSpPr>
+          <p:cNvPr id="4" name="Shape 2"/>
+          <p:cNvSpPr/>
+          <p:nvPr/>
+        </p:nvSpPr>
+        <p:spPr>
+          <a:xfrm>
+            <a:off x="914400" y="2857500"/>
+            <a:ext cx="133350" cy="5334000"/>
+          </a:xfrm>
+          <a:prstGeom prst="roundRect">
+            <a:avLst>
+              <a:gd name="adj" fmla="val 50000"/>
+            </a:avLst>
+          </a:prstGeom>
+          <a:solidFill>
+            <a:srgbClr val="FF6A4D"/>
+          </a:solidFill>
+          <a:ln/>
+        </p:spPr>
+      </p:sp>
+      <p:sp>
+        <p:nvSpPr>
+          <p:cNvPr id="5" name="Text 3"/>
+          <p:cNvSpPr/>
+          <p:nvPr/>
+        </p:nvSpPr>
+        <p:spPr>
+          <a:xfrm>
+            <a:off x="1371600" y="3200400"/>
+            <a:ext cx="7143750" cy="952500"/>
+          </a:xfrm>
+          <a:prstGeom prst="rect">
+            <a:avLst/>
+          </a:prstGeom>
+          <a:noFill/>
+          <a:ln/>
+        </p:spPr>
+        <p:txBody>
+          <a:bodyPr wrap="square" lIns="0" tIns="0" rIns="0" bIns="0" rtlCol="0" anchor="t"/>
+          <a:lstStyle/>
+          <a:p>
+            <a:pPr algn="l" indent="0" marL="0">
+              <a:buNone/>
+            </a:pPr>
+            <a:r>
+              <a:rPr lang="en-US" sz="4200" dirty="0" spc="-11" kern="0">
+                <a:solidFill>
+                  <a:srgbClr val="FF6A4D"/>
+                </a:solidFill>
+                <a:latin typeface="Bricolage Grotesque ExtraBold" pitchFamily="34" charset="0"/>
+                <a:ea typeface="Bricolage Grotesque ExtraBold" pitchFamily="34" charset="-122"/>
+                <a:cs typeface="Bricolage Grotesque ExtraBold" pitchFamily="34" charset="-120"/>
+              </a:rPr>
+              <a:t>Acetylcholine</a:t>
+            </a:r>
+            <a:endParaRPr lang="en-US" sz="4200" dirty="0"/>
+          </a:p>
+        </p:txBody>
+      </p:sp>
+      <p:sp>
+        <p:nvSpPr>
+          <p:cNvPr id="6" name="Text 4"/>
+          <p:cNvSpPr/>
+          <p:nvPr/>
+        </p:nvSpPr>
+        <p:spPr>
+          <a:xfrm>
+            <a:off x="1371600" y="4286250"/>
+            <a:ext cx="7143750" cy="3143250"/>
+          </a:xfrm>
+          <a:prstGeom prst="rect">
+            <a:avLst/>
+          </a:prstGeom>
+          <a:noFill/>
+          <a:ln/>
+        </p:spPr>
+        <p:txBody>
+          <a:bodyPr wrap="square" lIns="0" tIns="17002" rIns="0" bIns="-17002" rtlCol="0" anchor="t"/>
+          <a:lstStyle/>
+          <a:p>
+            <a:pPr algn="l" indent="0" marL="0">
+              <a:lnSpc>
+                <a:spcPts val="4095"/>
+              </a:lnSpc>
+              <a:buNone/>
+            </a:pPr>
+            <a:r>
+              <a:rPr lang="en-US" sz="3150" dirty="0" spc="3" kern="0">
+                <a:solidFill>
+                  <a:srgbClr val="F3EEE3"/>
+                </a:solidFill>
+                <a:latin typeface="Be Vietnam Pro" pitchFamily="34" charset="0"/>
+                <a:ea typeface="Be Vietnam Pro" pitchFamily="34" charset="-122"/>
+                <a:cs typeface="Be Vietnam Pro" pitchFamily="34" charset="-120"/>
+              </a:rPr>
+              <a:t>lệnh</a:t>
+            </a:r>
+            <a:r>
+              <a:rPr lang="en-US" sz="3150" dirty="0" spc="2" kern="0">
+                <a:solidFill>
+                  <a:srgbClr val="F3EEE3"/>
+                </a:solidFill>
+                <a:latin typeface="Be Vietnam Pro" pitchFamily="34" charset="0"/>
+                <a:ea typeface="Be Vietnam Pro" pitchFamily="34" charset="-122"/>
+                <a:cs typeface="Be Vietnam Pro" pitchFamily="34" charset="-120"/>
+              </a:rPr>
+              <a:t> cử</a:t>
+            </a:r>
+            <a:r>
+              <a:rPr lang="en-US" sz="3150" dirty="0" spc="12" kern="0">
+                <a:solidFill>
+                  <a:srgbClr val="F3EEE3"/>
+                </a:solidFill>
+                <a:latin typeface="Be Vietnam Pro" pitchFamily="34" charset="0"/>
+                <a:ea typeface="Be Vietnam Pro" pitchFamily="34" charset="-122"/>
+                <a:cs typeface="Be Vietnam Pro" pitchFamily="34" charset="-120"/>
+              </a:rPr>
+              <a:t> động,</a:t>
+            </a:r>
+            <a:r>
+              <a:rPr lang="en-US" sz="3150" dirty="0" spc="1" kern="0">
+                <a:solidFill>
+                  <a:srgbClr val="F3EEE3"/>
+                </a:solidFill>
+                <a:latin typeface="Be Vietnam Pro" pitchFamily="34" charset="0"/>
+                <a:ea typeface="Be Vietnam Pro" pitchFamily="34" charset="-122"/>
+                <a:cs typeface="Be Vietnam Pro" pitchFamily="34" charset="-120"/>
+              </a:rPr>
+              <a:t> chú ý,</a:t>
+            </a:r>
+            <a:r>
+              <a:rPr lang="en-US" sz="3150" dirty="0" spc="13" kern="0">
+                <a:solidFill>
+                  <a:srgbClr val="F3EEE3"/>
+                </a:solidFill>
+                <a:latin typeface="Be Vietnam Pro" pitchFamily="34" charset="0"/>
+                <a:ea typeface="Be Vietnam Pro" pitchFamily="34" charset="-122"/>
+                <a:cs typeface="Be Vietnam Pro" pitchFamily="34" charset="-120"/>
+              </a:rPr>
+              <a:t> trí</a:t>
+            </a:r>
+            <a:r>
+              <a:rPr lang="en-US" sz="3150" dirty="0" spc="2" kern="0">
+                <a:solidFill>
+                  <a:srgbClr val="F3EEE3"/>
+                </a:solidFill>
+                <a:latin typeface="Be Vietnam Pro" pitchFamily="34" charset="0"/>
+                <a:ea typeface="Be Vietnam Pro" pitchFamily="34" charset="-122"/>
+                <a:cs typeface="Be Vietnam Pro" pitchFamily="34" charset="-120"/>
+              </a:rPr>
+              <a:t> nhớ</a:t>
+            </a:r>
+            <a:endParaRPr lang="en-US" sz="3150" dirty="0"/>
+          </a:p>
+        </p:txBody>
+      </p:sp>
+      <p:sp>
+        <p:nvSpPr>
+          <p:cNvPr id="7" name="Shape 5"/>
+          <p:cNvSpPr/>
+          <p:nvPr/>
+        </p:nvSpPr>
+        <p:spPr>
+          <a:xfrm>
+            <a:off x="9315450" y="2857500"/>
+            <a:ext cx="8058150" cy="5334000"/>
+          </a:xfrm>
+          <a:prstGeom prst="roundRect">
+            <a:avLst>
+              <a:gd name="adj" fmla="val 5000"/>
+            </a:avLst>
+          </a:prstGeom>
+          <a:solidFill>
+            <a:srgbClr val="262C4A"/>
+          </a:solidFill>
+          <a:ln/>
+        </p:spPr>
+      </p:sp>
+      <p:sp>
+        <p:nvSpPr>
+          <p:cNvPr id="8" name="Shape 6"/>
+          <p:cNvSpPr/>
+          <p:nvPr/>
+        </p:nvSpPr>
+        <p:spPr>
+          <a:xfrm>
+            <a:off x="9315450" y="2857500"/>
+            <a:ext cx="133350" cy="5334000"/>
+          </a:xfrm>
+          <a:prstGeom prst="roundRect">
+            <a:avLst>
+              <a:gd name="adj" fmla="val 50000"/>
+            </a:avLst>
+          </a:prstGeom>
+          <a:solidFill>
+            <a:srgbClr val="7C93FF"/>
+          </a:solidFill>
+          <a:ln/>
+        </p:spPr>
+      </p:sp>
+      <p:sp>
+        <p:nvSpPr>
+          <p:cNvPr id="9" name="Text 7"/>
+          <p:cNvSpPr/>
+          <p:nvPr/>
+        </p:nvSpPr>
+        <p:spPr>
+          <a:xfrm>
+            <a:off x="9772650" y="3200400"/>
+            <a:ext cx="7143750" cy="952500"/>
+          </a:xfrm>
+          <a:prstGeom prst="rect">
+            <a:avLst/>
+          </a:prstGeom>
+          <a:noFill/>
+          <a:ln/>
+        </p:spPr>
+        <p:txBody>
+          <a:bodyPr wrap="square" lIns="0" tIns="0" rIns="0" bIns="0" rtlCol="0" anchor="t"/>
+          <a:lstStyle/>
+          <a:p>
+            <a:pPr algn="l" indent="0" marL="0">
+              <a:buNone/>
+            </a:pPr>
+            <a:r>
+              <a:rPr lang="en-US" sz="4200" dirty="0" spc="-2" kern="0">
+                <a:solidFill>
+                  <a:srgbClr val="7C93FF"/>
+                </a:solidFill>
+                <a:latin typeface="Bricolage Grotesque ExtraBold" pitchFamily="34" charset="0"/>
+                <a:ea typeface="Bricolage Grotesque ExtraBold" pitchFamily="34" charset="-122"/>
+                <a:cs typeface="Bricolage Grotesque ExtraBold" pitchFamily="34" charset="-120"/>
+              </a:rPr>
+              <a:t>Endorphin</a:t>
+            </a:r>
+            <a:endParaRPr lang="en-US" sz="4200" dirty="0"/>
+          </a:p>
+        </p:txBody>
+      </p:sp>
+      <p:sp>
+        <p:nvSpPr>
+          <p:cNvPr id="10" name="Text 8"/>
+          <p:cNvSpPr/>
+          <p:nvPr/>
+        </p:nvSpPr>
+        <p:spPr>
+          <a:xfrm>
+            <a:off x="9772650" y="4286250"/>
+            <a:ext cx="7143750" cy="3143250"/>
+          </a:xfrm>
+          <a:prstGeom prst="rect">
+            <a:avLst/>
+          </a:prstGeom>
+          <a:noFill/>
+          <a:ln/>
+        </p:spPr>
+        <p:txBody>
+          <a:bodyPr wrap="square" lIns="0" tIns="17002" rIns="0" bIns="-17002" rtlCol="0" anchor="t"/>
+          <a:lstStyle/>
+          <a:p>
+            <a:pPr algn="l" indent="0" marL="0">
+              <a:lnSpc>
+                <a:spcPts val="4095"/>
+              </a:lnSpc>
+              <a:buNone/>
+            </a:pPr>
+            <a:r>
+              <a:rPr lang="en-US" sz="3150" dirty="0" spc="2" kern="0">
+                <a:solidFill>
+                  <a:srgbClr val="F3EEE3"/>
+                </a:solidFill>
+                <a:latin typeface="Be Vietnam Pro" pitchFamily="34" charset="0"/>
+                <a:ea typeface="Be Vietnam Pro" pitchFamily="34" charset="-122"/>
+                <a:cs typeface="Be Vietnam Pro" pitchFamily="34" charset="-120"/>
+              </a:rPr>
+              <a:t>liên</a:t>
+            </a:r>
+            <a:r>
+              <a:rPr lang="en-US" sz="3150" dirty="0" spc="0" kern="0">
+                <a:solidFill>
+                  <a:srgbClr val="F3EEE3"/>
+                </a:solidFill>
+                <a:latin typeface="Be Vietnam Pro" pitchFamily="34" charset="0"/>
+                <a:ea typeface="Be Vietnam Pro" pitchFamily="34" charset="-122"/>
+                <a:cs typeface="Be Vietnam Pro" pitchFamily="34" charset="-120"/>
+              </a:rPr>
+              <a:t> quan</a:t>
+            </a:r>
+            <a:r>
+              <a:rPr lang="en-US" sz="3150" dirty="0" spc="18" kern="0">
+                <a:solidFill>
+                  <a:srgbClr val="F3EEE3"/>
+                </a:solidFill>
+                <a:latin typeface="Be Vietnam Pro" pitchFamily="34" charset="0"/>
+                <a:ea typeface="Be Vietnam Pro" pitchFamily="34" charset="-122"/>
+                <a:cs typeface="Be Vietnam Pro" pitchFamily="34" charset="-120"/>
+              </a:rPr>
+              <a:t> đến</a:t>
+            </a:r>
+            <a:r>
+              <a:rPr lang="en-US" sz="3150" dirty="0" spc="-2" kern="0">
+                <a:solidFill>
+                  <a:srgbClr val="F3EEE3"/>
+                </a:solidFill>
+                <a:latin typeface="Be Vietnam Pro" pitchFamily="34" charset="0"/>
+                <a:ea typeface="Be Vietnam Pro" pitchFamily="34" charset="-122"/>
+                <a:cs typeface="Be Vietnam Pro" pitchFamily="34" charset="-120"/>
+              </a:rPr>
+              <a:t> giảm</a:t>
+            </a:r>
+            <a:r>
+              <a:rPr lang="en-US" sz="3150" dirty="0" spc="13" kern="0">
+                <a:solidFill>
+                  <a:srgbClr val="F3EEE3"/>
+                </a:solidFill>
+                <a:latin typeface="Be Vietnam Pro" pitchFamily="34" charset="0"/>
+                <a:ea typeface="Be Vietnam Pro" pitchFamily="34" charset="-122"/>
+                <a:cs typeface="Be Vietnam Pro" pitchFamily="34" charset="-120"/>
+              </a:rPr>
+              <a:t> đau</a:t>
+            </a:r>
+            <a:endParaRPr lang="en-US" sz="3150" dirty="0"/>
+          </a:p>
+        </p:txBody>
+      </p:sp>
+      <p:sp>
+        <p:nvSpPr>
+          <p:cNvPr id="11" name="Text 9"/>
+          <p:cNvSpPr/>
+          <p:nvPr/>
+        </p:nvSpPr>
+        <p:spPr>
+          <a:xfrm>
+            <a:off x="914400" y="8991600"/>
+            <a:ext cx="16459200" cy="342900"/>
+          </a:xfrm>
+          <a:prstGeom prst="rect">
+            <a:avLst/>
+          </a:prstGeom>
+          <a:noFill/>
+          <a:ln/>
+        </p:spPr>
+        <p:txBody>
+          <a:bodyPr wrap="square" lIns="0" tIns="0" rIns="0" bIns="0" rtlCol="0" anchor="ctr"/>
+          <a:lstStyle/>
+          <a:p>
+            <a:pPr algn="l" indent="0" marL="0">
+              <a:buNone/>
+            </a:pPr>
+            <a:r>
+              <a:rPr lang="en-US" sz="1800" dirty="0" spc="-2" kern="0">
+                <a:solidFill>
+                  <a:srgbClr val="9AA0B5"/>
+                </a:solidFill>
+                <a:latin typeface="Be Vietnam Pro" pitchFamily="34" charset="0"/>
+                <a:ea typeface="Be Vietnam Pro" pitchFamily="34" charset="-122"/>
+                <a:cs typeface="Be Vietnam Pro" pitchFamily="34" charset="-120"/>
+              </a:rPr>
+              <a:t>Nguồn:</a:t>
+            </a:r>
+            <a:r>
+              <a:rPr lang="en-US" sz="1800" dirty="0" spc="3" kern="0">
+                <a:solidFill>
+                  <a:srgbClr val="9AA0B5"/>
+                </a:solidFill>
+                <a:latin typeface="Be Vietnam Pro" pitchFamily="34" charset="0"/>
+                <a:ea typeface="Be Vietnam Pro" pitchFamily="34" charset="-122"/>
+                <a:cs typeface="Be Vietnam Pro" pitchFamily="34" charset="-120"/>
+              </a:rPr>
+              <a:t> [S1]</a:t>
+            </a:r>
+            <a:r>
+              <a:rPr lang="en-US" sz="1800" dirty="0" spc="1" kern="0">
+                <a:solidFill>
+                  <a:srgbClr val="9AA0B5"/>
+                </a:solidFill>
+                <a:latin typeface="Be Vietnam Pro" pitchFamily="34" charset="0"/>
+                <a:ea typeface="Be Vietnam Pro" pitchFamily="34" charset="-122"/>
+                <a:cs typeface="Be Vietnam Pro" pitchFamily="34" charset="-120"/>
+              </a:rPr>
+              <a:t> [S2]</a:t>
+            </a:r>
+            <a:endParaRPr lang="en-US" sz="1800" dirty="0"/>
+          </a:p>
+        </p:txBody>
+      </p:sp>
+      <p:sp>
+        <p:nvSpPr>
+          <p:cNvPr id="12" name="Shape 10"/>
+          <p:cNvSpPr/>
+          <p:nvPr/>
+        </p:nvSpPr>
+        <p:spPr>
+          <a:xfrm>
+            <a:off x="942975" y="9563100"/>
+            <a:ext cx="114300" cy="114300"/>
+          </a:xfrm>
+          <a:prstGeom prst="ellipse">
+            <a:avLst/>
+          </a:prstGeom>
+          <a:solidFill>
+            <a:srgbClr val="F3EEE3">
+              <a:alpha val="28000"/>
+            </a:srgbClr>
+          </a:solidFill>
+          <a:ln/>
+        </p:spPr>
+      </p:sp>
+      <p:sp>
+        <p:nvSpPr>
+          <p:cNvPr id="13" name="Shape 11"/>
+          <p:cNvSpPr/>
+          <p:nvPr/>
+        </p:nvSpPr>
+        <p:spPr>
+          <a:xfrm>
+            <a:off x="1171575" y="9563100"/>
+            <a:ext cx="114300" cy="114300"/>
+          </a:xfrm>
+          <a:prstGeom prst="ellipse">
+            <a:avLst/>
+          </a:prstGeom>
+          <a:solidFill>
+            <a:srgbClr val="F3EEE3">
+              <a:alpha val="28000"/>
+            </a:srgbClr>
+          </a:solidFill>
+          <a:ln/>
+        </p:spPr>
+      </p:sp>
+      <p:sp>
+        <p:nvSpPr>
+          <p:cNvPr id="14" name="Shape 12"/>
+          <p:cNvSpPr/>
+          <p:nvPr/>
+        </p:nvSpPr>
+        <p:spPr>
+          <a:xfrm>
+            <a:off x="1400175" y="9563100"/>
+            <a:ext cx="114300" cy="114300"/>
+          </a:xfrm>
+          <a:prstGeom prst="ellipse">
+            <a:avLst/>
+          </a:prstGeom>
+          <a:solidFill>
+            <a:srgbClr val="F3EEE3">
+              <a:alpha val="28000"/>
+            </a:srgbClr>
+          </a:solidFill>
+          <a:ln/>
+        </p:spPr>
+      </p:sp>
+      <p:sp>
+        <p:nvSpPr>
+          <p:cNvPr id="15" name="Shape 13"/>
+          <p:cNvSpPr/>
+          <p:nvPr/>
+        </p:nvSpPr>
+        <p:spPr>
+          <a:xfrm>
+            <a:off x="1628775" y="9563100"/>
+            <a:ext cx="114300" cy="114300"/>
+          </a:xfrm>
+          <a:prstGeom prst="ellipse">
+            <a:avLst/>
+          </a:prstGeom>
+          <a:solidFill>
+            <a:srgbClr val="F3EEE3">
+              <a:alpha val="28000"/>
+            </a:srgbClr>
+          </a:solidFill>
+          <a:ln/>
+        </p:spPr>
+      </p:sp>
+      <p:sp>
+        <p:nvSpPr>
+          <p:cNvPr id="16" name="Shape 14"/>
+          <p:cNvSpPr/>
+          <p:nvPr/>
+        </p:nvSpPr>
+        <p:spPr>
+          <a:xfrm>
+            <a:off x="1857375" y="9563100"/>
+            <a:ext cx="114300" cy="114300"/>
+          </a:xfrm>
+          <a:prstGeom prst="ellipse">
+            <a:avLst/>
+          </a:prstGeom>
+          <a:solidFill>
+            <a:srgbClr val="F3EEE3">
+              <a:alpha val="28000"/>
+            </a:srgbClr>
+          </a:solidFill>
+          <a:ln/>
+        </p:spPr>
+      </p:sp>
+      <p:sp>
+        <p:nvSpPr>
+          <p:cNvPr id="17" name="Shape 15"/>
+          <p:cNvSpPr/>
+          <p:nvPr/>
+        </p:nvSpPr>
+        <p:spPr>
+          <a:xfrm>
+            <a:off x="2085975" y="9563100"/>
+            <a:ext cx="114300" cy="114300"/>
+          </a:xfrm>
+          <a:prstGeom prst="ellipse">
+            <a:avLst/>
+          </a:prstGeom>
+          <a:solidFill>
+            <a:srgbClr val="F3EEE3">
+              <a:alpha val="28000"/>
+            </a:srgbClr>
+          </a:solidFill>
+          <a:ln/>
+        </p:spPr>
+      </p:sp>
+      <p:sp>
+        <p:nvSpPr>
+          <p:cNvPr id="18" name="Shape 16"/>
+          <p:cNvSpPr/>
+          <p:nvPr/>
+        </p:nvSpPr>
+        <p:spPr>
+          <a:xfrm>
+            <a:off x="2314575" y="9563100"/>
+            <a:ext cx="114300" cy="114300"/>
+          </a:xfrm>
+          <a:prstGeom prst="ellipse">
+            <a:avLst/>
+          </a:prstGeom>
+          <a:solidFill>
+            <a:srgbClr val="F3EEE3">
+              <a:alpha val="28000"/>
+            </a:srgbClr>
+          </a:solidFill>
+          <a:ln/>
+        </p:spPr>
+      </p:sp>
+      <p:sp>
+        <p:nvSpPr>
+          <p:cNvPr id="19" name="Shape 17"/>
+          <p:cNvSpPr/>
+          <p:nvPr/>
+        </p:nvSpPr>
+        <p:spPr>
+          <a:xfrm>
+            <a:off x="2543175" y="9563100"/>
+            <a:ext cx="114300" cy="114300"/>
+          </a:xfrm>
+          <a:prstGeom prst="ellipse">
+            <a:avLst/>
+          </a:prstGeom>
+          <a:solidFill>
+            <a:srgbClr val="F3EEE3">
+              <a:alpha val="28000"/>
+            </a:srgbClr>
+          </a:solidFill>
+          <a:ln/>
+        </p:spPr>
+      </p:sp>
+      <p:sp>
+        <p:nvSpPr>
+          <p:cNvPr id="20" name="Shape 18"/>
+          <p:cNvSpPr/>
+          <p:nvPr/>
+        </p:nvSpPr>
+        <p:spPr>
+          <a:xfrm>
+            <a:off x="2771775" y="9563100"/>
+            <a:ext cx="114300" cy="114300"/>
+          </a:xfrm>
+          <a:prstGeom prst="ellipse">
+            <a:avLst/>
+          </a:prstGeom>
+          <a:solidFill>
+            <a:srgbClr val="F3EEE3">
+              <a:alpha val="28000"/>
+            </a:srgbClr>
+          </a:solidFill>
+          <a:ln/>
+        </p:spPr>
+      </p:sp>
+      <p:sp>
+        <p:nvSpPr>
+          <p:cNvPr id="21" name="Shape 19"/>
+          <p:cNvSpPr/>
+          <p:nvPr/>
+        </p:nvSpPr>
+        <p:spPr>
+          <a:xfrm>
+            <a:off x="2981325" y="9544050"/>
+            <a:ext cx="152400" cy="152400"/>
+          </a:xfrm>
+          <a:prstGeom prst="ellipse">
+            <a:avLst/>
+          </a:prstGeom>
+          <a:solidFill>
+            <a:srgbClr val="FF6A4D"/>
+          </a:solidFill>
+          <a:ln/>
+        </p:spPr>
+      </p:sp>
+      <p:sp>
+        <p:nvSpPr>
+          <p:cNvPr id="22" name="Shape 20"/>
+          <p:cNvSpPr/>
+          <p:nvPr/>
+        </p:nvSpPr>
+        <p:spPr>
+          <a:xfrm>
+            <a:off x="3228975" y="9563100"/>
+            <a:ext cx="114300" cy="114300"/>
+          </a:xfrm>
+          <a:prstGeom prst="ellipse">
+            <a:avLst/>
+          </a:prstGeom>
+          <a:solidFill>
+            <a:srgbClr val="F3EEE3">
+              <a:alpha val="28000"/>
+            </a:srgbClr>
+          </a:solidFill>
+          <a:ln/>
+        </p:spPr>
+      </p:sp>
+      <p:sp>
+        <p:nvSpPr>
+          <p:cNvPr id="23" name="Shape 21"/>
+          <p:cNvSpPr/>
+          <p:nvPr/>
+        </p:nvSpPr>
+        <p:spPr>
+          <a:xfrm>
+            <a:off x="3457575" y="9563100"/>
+            <a:ext cx="114300" cy="114300"/>
+          </a:xfrm>
+          <a:prstGeom prst="ellipse">
+            <a:avLst/>
+          </a:prstGeom>
+          <a:solidFill>
+            <a:srgbClr val="F3EEE3">
+              <a:alpha val="28000"/>
+            </a:srgbClr>
+          </a:solidFill>
+          <a:ln/>
+        </p:spPr>
+      </p:sp>
+      <p:sp>
+        <p:nvSpPr>
+          <p:cNvPr id="24" name="Shape 22"/>
+          <p:cNvSpPr/>
+          <p:nvPr/>
+        </p:nvSpPr>
+        <p:spPr>
+          <a:xfrm>
+            <a:off x="3686175" y="9563100"/>
+            <a:ext cx="114300" cy="114300"/>
+          </a:xfrm>
+          <a:prstGeom prst="ellipse">
+            <a:avLst/>
+          </a:prstGeom>
+          <a:solidFill>
+            <a:srgbClr val="F3EEE3">
+              <a:alpha val="28000"/>
+            </a:srgbClr>
+          </a:solidFill>
+          <a:ln/>
+        </p:spPr>
+      </p:sp>
+      <p:sp>
+        <p:nvSpPr>
+          <p:cNvPr id="25" name="Shape 23"/>
+          <p:cNvSpPr/>
+          <p:nvPr/>
+        </p:nvSpPr>
+        <p:spPr>
+          <a:xfrm>
+            <a:off x="3914775" y="9563100"/>
+            <a:ext cx="114300" cy="114300"/>
+          </a:xfrm>
+          <a:prstGeom prst="ellipse">
+            <a:avLst/>
+          </a:prstGeom>
+          <a:solidFill>
+            <a:srgbClr val="F3EEE3">
+              <a:alpha val="28000"/>
+            </a:srgbClr>
+          </a:solidFill>
+          <a:ln/>
+        </p:spPr>
+      </p:sp>
+      <p:sp>
+        <p:nvSpPr>
+          <p:cNvPr id="26" name="Shape 24"/>
+          <p:cNvSpPr/>
+          <p:nvPr/>
+        </p:nvSpPr>
+        <p:spPr>
+          <a:xfrm>
+            <a:off x="4143375" y="9563100"/>
+            <a:ext cx="114300" cy="114300"/>
+          </a:xfrm>
+          <a:prstGeom prst="ellipse">
+            <a:avLst/>
+          </a:prstGeom>
+          <a:solidFill>
+            <a:srgbClr val="F3EEE3">
+              <a:alpha val="28000"/>
+            </a:srgbClr>
+          </a:solidFill>
+          <a:ln/>
+        </p:spPr>
+      </p:sp>
+      <p:sp>
+        <p:nvSpPr>
+          <p:cNvPr id="27" name="Shape 25"/>
+          <p:cNvSpPr/>
+          <p:nvPr/>
+        </p:nvSpPr>
+        <p:spPr>
+          <a:xfrm>
+            <a:off x="4371975" y="9563100"/>
+            <a:ext cx="114300" cy="114300"/>
+          </a:xfrm>
+          <a:prstGeom prst="ellipse">
+            <a:avLst/>
+          </a:prstGeom>
+          <a:solidFill>
+            <a:srgbClr val="F3EEE3">
+              <a:alpha val="28000"/>
+            </a:srgbClr>
+          </a:solidFill>
+          <a:ln/>
+        </p:spPr>
+      </p:sp>
+      <p:sp>
+        <p:nvSpPr>
+          <p:cNvPr id="28" name="Shape 26"/>
+          <p:cNvSpPr/>
+          <p:nvPr/>
+        </p:nvSpPr>
+        <p:spPr>
+          <a:xfrm>
+            <a:off x="4600575" y="9563100"/>
+            <a:ext cx="114300" cy="114300"/>
+          </a:xfrm>
+          <a:prstGeom prst="ellipse">
+            <a:avLst/>
+          </a:prstGeom>
+          <a:solidFill>
+            <a:srgbClr val="F3EEE3">
+              <a:alpha val="28000"/>
+            </a:srgbClr>
+          </a:solidFill>
+          <a:ln/>
+        </p:spPr>
+      </p:sp>
+      <p:sp>
+        <p:nvSpPr>
+          <p:cNvPr id="29" name="Shape 27"/>
+          <p:cNvSpPr/>
+          <p:nvPr/>
+        </p:nvSpPr>
+        <p:spPr>
+          <a:xfrm>
+            <a:off x="4829175" y="9563100"/>
+            <a:ext cx="114300" cy="114300"/>
+          </a:xfrm>
+          <a:prstGeom prst="ellipse">
+            <a:avLst/>
+          </a:prstGeom>
+          <a:solidFill>
+            <a:srgbClr val="F3EEE3">
+              <a:alpha val="28000"/>
+            </a:srgbClr>
+          </a:solidFill>
+          <a:ln/>
+        </p:spPr>
+      </p:sp>
+      <p:sp>
+        <p:nvSpPr>
+          <p:cNvPr id="30" name="Text 28"/>
+          <p:cNvSpPr/>
+          <p:nvPr/>
+        </p:nvSpPr>
+        <p:spPr>
+          <a:xfrm>
+            <a:off x="5257800" y="9467850"/>
+            <a:ext cx="6667500" cy="304800"/>
+          </a:xfrm>
+          <a:prstGeom prst="rect">
+            <a:avLst/>
+          </a:prstGeom>
+          <a:noFill/>
+          <a:ln/>
+        </p:spPr>
+        <p:txBody>
+          <a:bodyPr wrap="square" lIns="0" tIns="0" rIns="0" bIns="0" rtlCol="0" anchor="ctr"/>
+          <a:lstStyle/>
+          <a:p>
+            <a:pPr algn="l" indent="0" marL="0">
+              <a:buNone/>
+            </a:pPr>
+            <a:r>
+              <a:rPr lang="en-US" sz="1800" dirty="0" spc="-6" kern="0">
+                <a:solidFill>
+                  <a:srgbClr val="9AA0B5"/>
+                </a:solidFill>
+                <a:latin typeface="Be Vietnam Pro" pitchFamily="34" charset="0"/>
+                <a:ea typeface="Be Vietnam Pro" pitchFamily="34" charset="-122"/>
+                <a:cs typeface="Be Vietnam Pro" pitchFamily="34" charset="-120"/>
+              </a:rPr>
+              <a:t>Multiple-report</a:t>
+            </a:r>
+            <a:r>
+              <a:rPr lang="en-US" sz="1800" dirty="0" spc="-1" kern="0">
+                <a:solidFill>
+                  <a:srgbClr val="9AA0B5"/>
+                </a:solidFill>
+                <a:latin typeface="Be Vietnam Pro" pitchFamily="34" charset="0"/>
+                <a:ea typeface="Be Vietnam Pro" pitchFamily="34" charset="-122"/>
+                <a:cs typeface="Be Vietnam Pro" pitchFamily="34" charset="-120"/>
+              </a:rPr>
+              <a:t> ·</a:t>
+            </a:r>
+            <a:r>
+              <a:rPr lang="en-US" sz="1800" dirty="0" spc="-31" kern="0">
+                <a:solidFill>
+                  <a:srgbClr val="9AA0B5"/>
+                </a:solidFill>
+                <a:latin typeface="Be Vietnam Pro" pitchFamily="34" charset="0"/>
+                <a:ea typeface="Be Vietnam Pro" pitchFamily="34" charset="-122"/>
+                <a:cs typeface="Be Vietnam Pro" pitchFamily="34" charset="-120"/>
+              </a:rPr>
+              <a:t> L03</a:t>
+            </a:r>
+            <a:r>
+              <a:rPr lang="en-US" sz="1800" dirty="0" spc="0" kern="0">
+                <a:solidFill>
+                  <a:srgbClr val="9AA0B5"/>
+                </a:solidFill>
+                <a:latin typeface="Be Vietnam Pro" pitchFamily="34" charset="0"/>
+                <a:ea typeface="Be Vietnam Pro" pitchFamily="34" charset="-122"/>
+                <a:cs typeface="Be Vietnam Pro" pitchFamily="34" charset="-120"/>
+              </a:rPr>
+              <a:t> ·</a:t>
+            </a:r>
+            <a:r>
+              <a:rPr lang="en-US" sz="1800" dirty="0" spc="4" kern="0">
+                <a:solidFill>
+                  <a:srgbClr val="9AA0B5"/>
+                </a:solidFill>
+                <a:latin typeface="Be Vietnam Pro" pitchFamily="34" charset="0"/>
+                <a:ea typeface="Be Vietnam Pro" pitchFamily="34" charset="-122"/>
+                <a:cs typeface="Be Vietnam Pro" pitchFamily="34" charset="-120"/>
+              </a:rPr>
+              <a:t> 10/18</a:t>
+            </a:r>
+            <a:endParaRPr lang="en-US" sz="1800" dirty="0"/>
+          </a:p>
+        </p:txBody>
+      </p:sp>
+      <p:sp>
+        <p:nvSpPr>
+          <p:cNvPr id="31" name="Shape 29"/>
+          <p:cNvSpPr/>
+          <p:nvPr/>
+        </p:nvSpPr>
+        <p:spPr>
+          <a:xfrm>
+            <a:off x="15983712" y="9076331"/>
+            <a:ext cx="1645920" cy="552301"/>
+          </a:xfrm>
+          <a:prstGeom prst="roundRect">
+            <a:avLst>
+              <a:gd name="adj" fmla="val 28000"/>
+            </a:avLst>
+          </a:prstGeom>
+          <a:solidFill>
+            <a:srgbClr val="FFFFFF">
+              <a:alpha val="82000"/>
+            </a:srgbClr>
+          </a:solidFill>
+          <a:ln/>
+        </p:spPr>
+      </p:sp>
+      <p:pic>
+        <p:nvPicPr>
+          <p:cNvPr id="32" name="Moda image moda-export-watermark-05494c94-090b-4942-8ede-e3cd5ab10d6f" descr="">    </p:cNvPr>
+          <p:cNvPicPr>
+            <a:picLocks noChangeAspect="1"/>
+          </p:cNvPicPr>
+          <p:nvPr/>
+        </p:nvPicPr>
+        <p:blipFill>
+          <a:blip r:embed="rId1"/>
+          <a:srcRect l="0" r="0" t="0" b="0"/>
+          <a:stretch/>
+        </p:blipFill>
+        <p:spPr>
+          <a:xfrm>
+            <a:off x="16109781" y="9202400"/>
+            <a:ext cx="1393783" cy="300164"/>
+          </a:xfrm>
+          <a:prstGeom prst="rect">
+            <a:avLst/>
+          </a:prstGeom>
+        </p:spPr>
+      </p:pic>
+    </p:spTree>
+  </p:cSld>
+  <p:clrMapOvr>
+    <a:masterClrMapping/>
+  </p:clrMapOvr>
+</p:sld>
+</file>
+
+<file path=ppt/slides/slide11.xml><?xml version="1.0" encoding="utf-8"?>
+<p:sld xmlns:a="http://schemas.openxmlformats.org/drawingml/2006/main" xmlns:r="http://schemas.openxmlformats.org/officeDocument/2006/relationships" xmlns:p="http://schemas.openxmlformats.org/presentationml/2006/main">
+  <p:cSld name="Slide 11">
     <p:bg>
       <p:bgPr>
         <a:solidFill>
@@ -4997,7 +6116,29 @@
         </p:nvSpPr>
         <p:spPr>
           <a:xfrm>
-            <a:off x="2981325" y="9544050"/>
+            <a:off x="3000375" y="9563100"/>
+            <a:ext cx="114300" cy="114300"/>
+          </a:xfrm>
+          <a:prstGeom prst="ellipse">
+            <a:avLst/>
+          </a:prstGeom>
+          <a:solidFill>
+            <a:srgbClr val="14161C">
+              <a:alpha val="28000"/>
+            </a:srgbClr>
+          </a:solidFill>
+          <a:ln/>
+        </p:spPr>
+      </p:sp>
+      <p:sp>
+        <p:nvSpPr>
+          <p:cNvPr id="23" name="Shape 21"/>
+          <p:cNvSpPr/>
+          <p:nvPr/>
+        </p:nvSpPr>
+        <p:spPr>
+          <a:xfrm>
+            <a:off x="3209925" y="9544050"/>
             <a:ext cx="152400" cy="152400"/>
           </a:xfrm>
           <a:prstGeom prst="ellipse">
@@ -5011,13 +6152,13 @@
       </p:sp>
       <p:sp>
         <p:nvSpPr>
-          <p:cNvPr id="23" name="Shape 21"/>
-          <p:cNvSpPr/>
-          <p:nvPr/>
-        </p:nvSpPr>
-        <p:spPr>
-          <a:xfrm>
-            <a:off x="3228975" y="9563100"/>
+          <p:cNvPr id="24" name="Shape 22"/>
+          <p:cNvSpPr/>
+          <p:nvPr/>
+        </p:nvSpPr>
+        <p:spPr>
+          <a:xfrm>
+            <a:off x="3457575" y="9563100"/>
             <a:ext cx="114300" cy="114300"/>
           </a:xfrm>
           <a:prstGeom prst="ellipse">
@@ -5033,13 +6174,13 @@
       </p:sp>
       <p:sp>
         <p:nvSpPr>
-          <p:cNvPr id="24" name="Shape 22"/>
-          <p:cNvSpPr/>
-          <p:nvPr/>
-        </p:nvSpPr>
-        <p:spPr>
-          <a:xfrm>
-            <a:off x="3457575" y="9563100"/>
+          <p:cNvPr id="25" name="Shape 23"/>
+          <p:cNvSpPr/>
+          <p:nvPr/>
+        </p:nvSpPr>
+        <p:spPr>
+          <a:xfrm>
+            <a:off x="3686175" y="9563100"/>
             <a:ext cx="114300" cy="114300"/>
           </a:xfrm>
           <a:prstGeom prst="ellipse">
@@ -5055,13 +6196,13 @@
       </p:sp>
       <p:sp>
         <p:nvSpPr>
-          <p:cNvPr id="25" name="Shape 23"/>
-          <p:cNvSpPr/>
-          <p:nvPr/>
-        </p:nvSpPr>
-        <p:spPr>
-          <a:xfrm>
-            <a:off x="3686175" y="9563100"/>
+          <p:cNvPr id="26" name="Shape 24"/>
+          <p:cNvSpPr/>
+          <p:nvPr/>
+        </p:nvSpPr>
+        <p:spPr>
+          <a:xfrm>
+            <a:off x="3914775" y="9563100"/>
             <a:ext cx="114300" cy="114300"/>
           </a:xfrm>
           <a:prstGeom prst="ellipse">
@@ -5077,13 +6218,13 @@
       </p:sp>
       <p:sp>
         <p:nvSpPr>
-          <p:cNvPr id="26" name="Shape 24"/>
-          <p:cNvSpPr/>
-          <p:nvPr/>
-        </p:nvSpPr>
-        <p:spPr>
-          <a:xfrm>
-            <a:off x="3914775" y="9563100"/>
+          <p:cNvPr id="27" name="Shape 25"/>
+          <p:cNvSpPr/>
+          <p:nvPr/>
+        </p:nvSpPr>
+        <p:spPr>
+          <a:xfrm>
+            <a:off x="4143375" y="9563100"/>
             <a:ext cx="114300" cy="114300"/>
           </a:xfrm>
           <a:prstGeom prst="ellipse">
@@ -5099,13 +6240,13 @@
       </p:sp>
       <p:sp>
         <p:nvSpPr>
-          <p:cNvPr id="27" name="Shape 25"/>
-          <p:cNvSpPr/>
-          <p:nvPr/>
-        </p:nvSpPr>
-        <p:spPr>
-          <a:xfrm>
-            <a:off x="4143375" y="9563100"/>
+          <p:cNvPr id="28" name="Shape 26"/>
+          <p:cNvSpPr/>
+          <p:nvPr/>
+        </p:nvSpPr>
+        <p:spPr>
+          <a:xfrm>
+            <a:off x="4371975" y="9563100"/>
             <a:ext cx="114300" cy="114300"/>
           </a:xfrm>
           <a:prstGeom prst="ellipse">
@@ -5121,13 +6262,13 @@
       </p:sp>
       <p:sp>
         <p:nvSpPr>
-          <p:cNvPr id="28" name="Shape 26"/>
-          <p:cNvSpPr/>
-          <p:nvPr/>
-        </p:nvSpPr>
-        <p:spPr>
-          <a:xfrm>
-            <a:off x="4371975" y="9563100"/>
+          <p:cNvPr id="29" name="Shape 27"/>
+          <p:cNvSpPr/>
+          <p:nvPr/>
+        </p:nvSpPr>
+        <p:spPr>
+          <a:xfrm>
+            <a:off x="4600575" y="9563100"/>
             <a:ext cx="114300" cy="114300"/>
           </a:xfrm>
           <a:prstGeom prst="ellipse">
@@ -5143,13 +6284,13 @@
       </p:sp>
       <p:sp>
         <p:nvSpPr>
-          <p:cNvPr id="29" name="Shape 27"/>
-          <p:cNvSpPr/>
-          <p:nvPr/>
-        </p:nvSpPr>
-        <p:spPr>
-          <a:xfrm>
-            <a:off x="4600575" y="9563100"/>
+          <p:cNvPr id="30" name="Shape 28"/>
+          <p:cNvSpPr/>
+          <p:nvPr/>
+        </p:nvSpPr>
+        <p:spPr>
+          <a:xfrm>
+            <a:off x="4829175" y="9563100"/>
             <a:ext cx="114300" cy="114300"/>
           </a:xfrm>
           <a:prstGeom prst="ellipse">
@@ -5165,13 +6306,13 @@
       </p:sp>
       <p:sp>
         <p:nvSpPr>
-          <p:cNvPr id="30" name="Text 28"/>
-          <p:cNvSpPr/>
-          <p:nvPr/>
-        </p:nvSpPr>
-        <p:spPr>
-          <a:xfrm>
-            <a:off x="5029200" y="9467850"/>
+          <p:cNvPr id="31" name="Text 29"/>
+          <p:cNvSpPr/>
+          <p:nvPr/>
+        </p:nvSpPr>
+        <p:spPr>
+          <a:xfrm>
+            <a:off x="5257800" y="9467850"/>
             <a:ext cx="6667500" cy="304800"/>
           </a:xfrm>
           <a:prstGeom prst="rect">
@@ -5232,7 +6373,7 @@
               <a:t> ·</a:t>
             </a:r>
             <a:r>
-              <a:rPr lang="en-US" sz="1800" dirty="0" spc="3" kern="0">
+              <a:rPr lang="en-US" sz="1800" dirty="0" spc="5" kern="0">
                 <a:solidFill>
                   <a:srgbClr val="6B6A66"/>
                 </a:solidFill>
@@ -5240,7 +6381,7 @@
                 <a:ea typeface="Be Vietnam Pro" pitchFamily="34" charset="-122"/>
                 <a:cs typeface="Be Vietnam Pro" pitchFamily="34" charset="-120"/>
               </a:rPr>
-              <a:t> 10/17</a:t>
+              <a:t> 11/18</a:t>
             </a:r>
             <a:endParaRPr lang="en-US" sz="1800" dirty="0"/>
           </a:p>
@@ -5248,7 +6389,7 @@
       </p:sp>
       <p:sp>
         <p:nvSpPr>
-          <p:cNvPr id="31" name="Shape 29"/>
+          <p:cNvPr id="32" name="Shape 30"/>
           <p:cNvSpPr/>
           <p:nvPr/>
         </p:nvSpPr>
@@ -5272,7 +6413,7 @@
       </p:sp>
       <p:pic>
         <p:nvPicPr>
-          <p:cNvPr id="32" name="Moda image moda-export-watermark-1210d1e6-99a8-470b-8da7-8eecfe76842c" descr="">    </p:cNvPr>
+          <p:cNvPr id="33" name="Moda image moda-export-watermark-468ff08b-9967-4b44-8135-341f64e37f22" descr="">    </p:cNvPr>
           <p:cNvPicPr>
             <a:picLocks noChangeAspect="1"/>
           </p:cNvPicPr>
@@ -5301,9 +6442,9 @@
 </p:sld>
 </file>
 
-<file path=ppt/slides/slide11.xml><?xml version="1.0" encoding="utf-8"?>
+<file path=ppt/slides/slide12.xml><?xml version="1.0" encoding="utf-8"?>
 <p:sld xmlns:a="http://schemas.openxmlformats.org/drawingml/2006/main" xmlns:r="http://schemas.openxmlformats.org/officeDocument/2006/relationships" xmlns:p="http://schemas.openxmlformats.org/presentationml/2006/main">
-  <p:cSld name="Slide 11">
+  <p:cSld name="Slide 12">
     <p:bg>
       <p:bgPr>
         <a:solidFill>
@@ -5786,7 +6927,29 @@
         </p:nvSpPr>
         <p:spPr>
           <a:xfrm>
-            <a:off x="3209925" y="9544050"/>
+            <a:off x="3228975" y="9563100"/>
+            <a:ext cx="114300" cy="114300"/>
+          </a:xfrm>
+          <a:prstGeom prst="ellipse">
+            <a:avLst/>
+          </a:prstGeom>
+          <a:solidFill>
+            <a:srgbClr val="F3EEE3">
+              <a:alpha val="28000"/>
+            </a:srgbClr>
+          </a:solidFill>
+          <a:ln/>
+        </p:spPr>
+      </p:sp>
+      <p:sp>
+        <p:nvSpPr>
+          <p:cNvPr id="16" name="Shape 14"/>
+          <p:cNvSpPr/>
+          <p:nvPr/>
+        </p:nvSpPr>
+        <p:spPr>
+          <a:xfrm>
+            <a:off x="3438525" y="9544050"/>
             <a:ext cx="152400" cy="152400"/>
           </a:xfrm>
           <a:prstGeom prst="ellipse">
@@ -5800,13 +6963,13 @@
       </p:sp>
       <p:sp>
         <p:nvSpPr>
-          <p:cNvPr id="16" name="Shape 14"/>
-          <p:cNvSpPr/>
-          <p:nvPr/>
-        </p:nvSpPr>
-        <p:spPr>
-          <a:xfrm>
-            <a:off x="3457575" y="9563100"/>
+          <p:cNvPr id="17" name="Shape 15"/>
+          <p:cNvSpPr/>
+          <p:nvPr/>
+        </p:nvSpPr>
+        <p:spPr>
+          <a:xfrm>
+            <a:off x="3686175" y="9563100"/>
             <a:ext cx="114300" cy="114300"/>
           </a:xfrm>
           <a:prstGeom prst="ellipse">
@@ -5822,13 +6985,13 @@
       </p:sp>
       <p:sp>
         <p:nvSpPr>
-          <p:cNvPr id="17" name="Shape 15"/>
-          <p:cNvSpPr/>
-          <p:nvPr/>
-        </p:nvSpPr>
-        <p:spPr>
-          <a:xfrm>
-            <a:off x="3686175" y="9563100"/>
+          <p:cNvPr id="18" name="Shape 16"/>
+          <p:cNvSpPr/>
+          <p:nvPr/>
+        </p:nvSpPr>
+        <p:spPr>
+          <a:xfrm>
+            <a:off x="3914775" y="9563100"/>
             <a:ext cx="114300" cy="114300"/>
           </a:xfrm>
           <a:prstGeom prst="ellipse">
@@ -5844,13 +7007,13 @@
       </p:sp>
       <p:sp>
         <p:nvSpPr>
-          <p:cNvPr id="18" name="Shape 16"/>
-          <p:cNvSpPr/>
-          <p:nvPr/>
-        </p:nvSpPr>
-        <p:spPr>
-          <a:xfrm>
-            <a:off x="3914775" y="9563100"/>
+          <p:cNvPr id="19" name="Shape 17"/>
+          <p:cNvSpPr/>
+          <p:nvPr/>
+        </p:nvSpPr>
+        <p:spPr>
+          <a:xfrm>
+            <a:off x="4143375" y="9563100"/>
             <a:ext cx="114300" cy="114300"/>
           </a:xfrm>
           <a:prstGeom prst="ellipse">
@@ -5866,13 +7029,13 @@
       </p:sp>
       <p:sp>
         <p:nvSpPr>
-          <p:cNvPr id="19" name="Shape 17"/>
-          <p:cNvSpPr/>
-          <p:nvPr/>
-        </p:nvSpPr>
-        <p:spPr>
-          <a:xfrm>
-            <a:off x="4143375" y="9563100"/>
+          <p:cNvPr id="20" name="Shape 18"/>
+          <p:cNvSpPr/>
+          <p:nvPr/>
+        </p:nvSpPr>
+        <p:spPr>
+          <a:xfrm>
+            <a:off x="4371975" y="9563100"/>
             <a:ext cx="114300" cy="114300"/>
           </a:xfrm>
           <a:prstGeom prst="ellipse">
@@ -5888,13 +7051,13 @@
       </p:sp>
       <p:sp>
         <p:nvSpPr>
-          <p:cNvPr id="20" name="Shape 18"/>
-          <p:cNvSpPr/>
-          <p:nvPr/>
-        </p:nvSpPr>
-        <p:spPr>
-          <a:xfrm>
-            <a:off x="4371975" y="9563100"/>
+          <p:cNvPr id="21" name="Shape 19"/>
+          <p:cNvSpPr/>
+          <p:nvPr/>
+        </p:nvSpPr>
+        <p:spPr>
+          <a:xfrm>
+            <a:off x="4600575" y="9563100"/>
             <a:ext cx="114300" cy="114300"/>
           </a:xfrm>
           <a:prstGeom prst="ellipse">
@@ -5910,13 +7073,13 @@
       </p:sp>
       <p:sp>
         <p:nvSpPr>
-          <p:cNvPr id="21" name="Shape 19"/>
-          <p:cNvSpPr/>
-          <p:nvPr/>
-        </p:nvSpPr>
-        <p:spPr>
-          <a:xfrm>
-            <a:off x="4600575" y="9563100"/>
+          <p:cNvPr id="22" name="Shape 20"/>
+          <p:cNvSpPr/>
+          <p:nvPr/>
+        </p:nvSpPr>
+        <p:spPr>
+          <a:xfrm>
+            <a:off x="4829175" y="9563100"/>
             <a:ext cx="114300" cy="114300"/>
           </a:xfrm>
           <a:prstGeom prst="ellipse">
@@ -5932,13 +7095,13 @@
       </p:sp>
       <p:sp>
         <p:nvSpPr>
-          <p:cNvPr id="22" name="Text 20"/>
-          <p:cNvSpPr/>
-          <p:nvPr/>
-        </p:nvSpPr>
-        <p:spPr>
-          <a:xfrm>
-            <a:off x="5029200" y="9467850"/>
+          <p:cNvPr id="23" name="Text 21"/>
+          <p:cNvSpPr/>
+          <p:nvPr/>
+        </p:nvSpPr>
+        <p:spPr>
+          <a:xfrm>
+            <a:off x="5257800" y="9467850"/>
             <a:ext cx="6667500" cy="304800"/>
           </a:xfrm>
           <a:prstGeom prst="rect">
@@ -6007,7 +7170,7 @@
                 <a:ea typeface="Be Vietnam Pro" pitchFamily="34" charset="-122"/>
                 <a:cs typeface="Be Vietnam Pro" pitchFamily="34" charset="-120"/>
               </a:rPr>
-              <a:t> 11/17</a:t>
+              <a:t> 12/18</a:t>
             </a:r>
             <a:endParaRPr lang="en-US" sz="1800" dirty="0"/>
           </a:p>
@@ -6015,7 +7178,7 @@
       </p:sp>
       <p:sp>
         <p:nvSpPr>
-          <p:cNvPr id="23" name="Shape 21"/>
+          <p:cNvPr id="24" name="Shape 22"/>
           <p:cNvSpPr/>
           <p:nvPr/>
         </p:nvSpPr>
@@ -6039,7 +7202,7 @@
       </p:sp>
       <p:pic>
         <p:nvPicPr>
-          <p:cNvPr id="24" name="Moda image moda-export-watermark-233c9108-2f24-42bb-90ec-cafa3e22ecc5" descr="">    </p:cNvPr>
+          <p:cNvPr id="25" name="Moda image moda-export-watermark-888cf0be-d91f-4a4d-a330-5135ab66c075" descr="">    </p:cNvPr>
           <p:cNvPicPr>
             <a:picLocks noChangeAspect="1"/>
           </p:cNvPicPr>
@@ -6068,9 +7231,9 @@
 </p:sld>
 </file>
 
-<file path=ppt/slides/slide12.xml><?xml version="1.0" encoding="utf-8"?>
+<file path=ppt/slides/slide13.xml><?xml version="1.0" encoding="utf-8"?>
 <p:sld xmlns:a="http://schemas.openxmlformats.org/drawingml/2006/main" xmlns:r="http://schemas.openxmlformats.org/officeDocument/2006/relationships" xmlns:p="http://schemas.openxmlformats.org/presentationml/2006/main">
-  <p:cSld name="Slide 12">
+  <p:cSld name="Slide 13">
     <p:bg>
       <p:bgPr>
         <a:solidFill>
@@ -6760,7 +7923,29 @@
         </p:nvSpPr>
         <p:spPr>
           <a:xfrm>
-            <a:off x="3438525" y="9544050"/>
+            <a:off x="3457575" y="9563100"/>
+            <a:ext cx="114300" cy="114300"/>
+          </a:xfrm>
+          <a:prstGeom prst="ellipse">
+            <a:avLst/>
+          </a:prstGeom>
+          <a:solidFill>
+            <a:srgbClr val="14161C">
+              <a:alpha val="28000"/>
+            </a:srgbClr>
+          </a:solidFill>
+          <a:ln/>
+        </p:spPr>
+      </p:sp>
+      <p:sp>
+        <p:nvSpPr>
+          <p:cNvPr id="19" name="Shape 17"/>
+          <p:cNvSpPr/>
+          <p:nvPr/>
+        </p:nvSpPr>
+        <p:spPr>
+          <a:xfrm>
+            <a:off x="3667125" y="9544050"/>
             <a:ext cx="152400" cy="152400"/>
           </a:xfrm>
           <a:prstGeom prst="ellipse">
@@ -6774,13 +7959,13 @@
       </p:sp>
       <p:sp>
         <p:nvSpPr>
-          <p:cNvPr id="19" name="Shape 17"/>
-          <p:cNvSpPr/>
-          <p:nvPr/>
-        </p:nvSpPr>
-        <p:spPr>
-          <a:xfrm>
-            <a:off x="3686175" y="9563100"/>
+          <p:cNvPr id="20" name="Shape 18"/>
+          <p:cNvSpPr/>
+          <p:nvPr/>
+        </p:nvSpPr>
+        <p:spPr>
+          <a:xfrm>
+            <a:off x="3914775" y="9563100"/>
             <a:ext cx="114300" cy="114300"/>
           </a:xfrm>
           <a:prstGeom prst="ellipse">
@@ -6796,13 +7981,13 @@
       </p:sp>
       <p:sp>
         <p:nvSpPr>
-          <p:cNvPr id="20" name="Shape 18"/>
-          <p:cNvSpPr/>
-          <p:nvPr/>
-        </p:nvSpPr>
-        <p:spPr>
-          <a:xfrm>
-            <a:off x="3914775" y="9563100"/>
+          <p:cNvPr id="21" name="Shape 19"/>
+          <p:cNvSpPr/>
+          <p:nvPr/>
+        </p:nvSpPr>
+        <p:spPr>
+          <a:xfrm>
+            <a:off x="4143375" y="9563100"/>
             <a:ext cx="114300" cy="114300"/>
           </a:xfrm>
           <a:prstGeom prst="ellipse">
@@ -6818,13 +8003,13 @@
       </p:sp>
       <p:sp>
         <p:nvSpPr>
-          <p:cNvPr id="21" name="Shape 19"/>
-          <p:cNvSpPr/>
-          <p:nvPr/>
-        </p:nvSpPr>
-        <p:spPr>
-          <a:xfrm>
-            <a:off x="4143375" y="9563100"/>
+          <p:cNvPr id="22" name="Shape 20"/>
+          <p:cNvSpPr/>
+          <p:nvPr/>
+        </p:nvSpPr>
+        <p:spPr>
+          <a:xfrm>
+            <a:off x="4371975" y="9563100"/>
             <a:ext cx="114300" cy="114300"/>
           </a:xfrm>
           <a:prstGeom prst="ellipse">
@@ -6840,13 +8025,13 @@
       </p:sp>
       <p:sp>
         <p:nvSpPr>
-          <p:cNvPr id="22" name="Shape 20"/>
-          <p:cNvSpPr/>
-          <p:nvPr/>
-        </p:nvSpPr>
-        <p:spPr>
-          <a:xfrm>
-            <a:off x="4371975" y="9563100"/>
+          <p:cNvPr id="23" name="Shape 21"/>
+          <p:cNvSpPr/>
+          <p:nvPr/>
+        </p:nvSpPr>
+        <p:spPr>
+          <a:xfrm>
+            <a:off x="4600575" y="9563100"/>
             <a:ext cx="114300" cy="114300"/>
           </a:xfrm>
           <a:prstGeom prst="ellipse">
@@ -6862,13 +8047,13 @@
       </p:sp>
       <p:sp>
         <p:nvSpPr>
-          <p:cNvPr id="23" name="Shape 21"/>
-          <p:cNvSpPr/>
-          <p:nvPr/>
-        </p:nvSpPr>
-        <p:spPr>
-          <a:xfrm>
-            <a:off x="4600575" y="9563100"/>
+          <p:cNvPr id="24" name="Shape 22"/>
+          <p:cNvSpPr/>
+          <p:nvPr/>
+        </p:nvSpPr>
+        <p:spPr>
+          <a:xfrm>
+            <a:off x="4829175" y="9563100"/>
             <a:ext cx="114300" cy="114300"/>
           </a:xfrm>
           <a:prstGeom prst="ellipse">
@@ -6884,13 +8069,13 @@
       </p:sp>
       <p:sp>
         <p:nvSpPr>
-          <p:cNvPr id="24" name="Text 22"/>
-          <p:cNvSpPr/>
-          <p:nvPr/>
-        </p:nvSpPr>
-        <p:spPr>
-          <a:xfrm>
-            <a:off x="5029200" y="9467850"/>
+          <p:cNvPr id="25" name="Text 23"/>
+          <p:cNvSpPr/>
+          <p:nvPr/>
+        </p:nvSpPr>
+        <p:spPr>
+          <a:xfrm>
+            <a:off x="5257800" y="9467850"/>
             <a:ext cx="6667500" cy="304800"/>
           </a:xfrm>
           <a:prstGeom prst="rect">
@@ -6959,7 +8144,7 @@
                 <a:ea typeface="Be Vietnam Pro" pitchFamily="34" charset="-122"/>
                 <a:cs typeface="Be Vietnam Pro" pitchFamily="34" charset="-120"/>
               </a:rPr>
-              <a:t> 12/17</a:t>
+              <a:t> 13/18</a:t>
             </a:r>
             <a:endParaRPr lang="en-US" sz="1800" dirty="0"/>
           </a:p>
@@ -6967,7 +8152,7 @@
       </p:sp>
       <p:sp>
         <p:nvSpPr>
-          <p:cNvPr id="25" name="Shape 23"/>
+          <p:cNvPr id="26" name="Shape 24"/>
           <p:cNvSpPr/>
           <p:nvPr/>
         </p:nvSpPr>
@@ -6991,7 +8176,7 @@
       </p:sp>
       <p:pic>
         <p:nvPicPr>
-          <p:cNvPr id="26" name="Moda image moda-export-watermark-59151ba7-5696-4acd-8322-6ff840e0bfbf" descr="">    </p:cNvPr>
+          <p:cNvPr id="27" name="Moda image moda-export-watermark-0169ee71-f39c-403d-826b-8eaf26b94fef" descr="">    </p:cNvPr>
           <p:cNvPicPr>
             <a:picLocks noChangeAspect="1"/>
           </p:cNvPicPr>
@@ -7020,9 +8205,9 @@
 </p:sld>
 </file>
 
-<file path=ppt/slides/slide13.xml><?xml version="1.0" encoding="utf-8"?>
+<file path=ppt/slides/slide14.xml><?xml version="1.0" encoding="utf-8"?>
 <p:sld xmlns:a="http://schemas.openxmlformats.org/drawingml/2006/main" xmlns:r="http://schemas.openxmlformats.org/officeDocument/2006/relationships" xmlns:p="http://schemas.openxmlformats.org/presentationml/2006/main">
-  <p:cSld name="Slide 13">
+  <p:cSld name="Slide 14">
     <p:bg>
       <p:bgPr>
         <a:solidFill>
@@ -7994,7 +9179,29 @@
         </p:nvSpPr>
         <p:spPr>
           <a:xfrm>
-            <a:off x="3667125" y="9544050"/>
+            <a:off x="3686175" y="9563100"/>
+            <a:ext cx="114300" cy="114300"/>
+          </a:xfrm>
+          <a:prstGeom prst="ellipse">
+            <a:avLst/>
+          </a:prstGeom>
+          <a:solidFill>
+            <a:srgbClr val="F3EEE3">
+              <a:alpha val="28000"/>
+            </a:srgbClr>
+          </a:solidFill>
+          <a:ln/>
+        </p:spPr>
+      </p:sp>
+      <p:sp>
+        <p:nvSpPr>
+          <p:cNvPr id="27" name="Shape 25"/>
+          <p:cNvSpPr/>
+          <p:nvPr/>
+        </p:nvSpPr>
+        <p:spPr>
+          <a:xfrm>
+            <a:off x="3895725" y="9544050"/>
             <a:ext cx="152400" cy="152400"/>
           </a:xfrm>
           <a:prstGeom prst="ellipse">
@@ -8008,13 +9215,13 @@
       </p:sp>
       <p:sp>
         <p:nvSpPr>
-          <p:cNvPr id="27" name="Shape 25"/>
-          <p:cNvSpPr/>
-          <p:nvPr/>
-        </p:nvSpPr>
-        <p:spPr>
-          <a:xfrm>
-            <a:off x="3914775" y="9563100"/>
+          <p:cNvPr id="28" name="Shape 26"/>
+          <p:cNvSpPr/>
+          <p:nvPr/>
+        </p:nvSpPr>
+        <p:spPr>
+          <a:xfrm>
+            <a:off x="4143375" y="9563100"/>
             <a:ext cx="114300" cy="114300"/>
           </a:xfrm>
           <a:prstGeom prst="ellipse">
@@ -8030,13 +9237,13 @@
       </p:sp>
       <p:sp>
         <p:nvSpPr>
-          <p:cNvPr id="28" name="Shape 26"/>
-          <p:cNvSpPr/>
-          <p:nvPr/>
-        </p:nvSpPr>
-        <p:spPr>
-          <a:xfrm>
-            <a:off x="4143375" y="9563100"/>
+          <p:cNvPr id="29" name="Shape 27"/>
+          <p:cNvSpPr/>
+          <p:nvPr/>
+        </p:nvSpPr>
+        <p:spPr>
+          <a:xfrm>
+            <a:off x="4371975" y="9563100"/>
             <a:ext cx="114300" cy="114300"/>
           </a:xfrm>
           <a:prstGeom prst="ellipse">
@@ -8052,13 +9259,13 @@
       </p:sp>
       <p:sp>
         <p:nvSpPr>
-          <p:cNvPr id="29" name="Shape 27"/>
-          <p:cNvSpPr/>
-          <p:nvPr/>
-        </p:nvSpPr>
-        <p:spPr>
-          <a:xfrm>
-            <a:off x="4371975" y="9563100"/>
+          <p:cNvPr id="30" name="Shape 28"/>
+          <p:cNvSpPr/>
+          <p:nvPr/>
+        </p:nvSpPr>
+        <p:spPr>
+          <a:xfrm>
+            <a:off x="4600575" y="9563100"/>
             <a:ext cx="114300" cy="114300"/>
           </a:xfrm>
           <a:prstGeom prst="ellipse">
@@ -8074,13 +9281,13 @@
       </p:sp>
       <p:sp>
         <p:nvSpPr>
-          <p:cNvPr id="30" name="Shape 28"/>
-          <p:cNvSpPr/>
-          <p:nvPr/>
-        </p:nvSpPr>
-        <p:spPr>
-          <a:xfrm>
-            <a:off x="4600575" y="9563100"/>
+          <p:cNvPr id="31" name="Shape 29"/>
+          <p:cNvSpPr/>
+          <p:nvPr/>
+        </p:nvSpPr>
+        <p:spPr>
+          <a:xfrm>
+            <a:off x="4829175" y="9563100"/>
             <a:ext cx="114300" cy="114300"/>
           </a:xfrm>
           <a:prstGeom prst="ellipse">
@@ -8096,13 +9303,13 @@
       </p:sp>
       <p:sp>
         <p:nvSpPr>
-          <p:cNvPr id="31" name="Text 29"/>
-          <p:cNvSpPr/>
-          <p:nvPr/>
-        </p:nvSpPr>
-        <p:spPr>
-          <a:xfrm>
-            <a:off x="5029200" y="9467850"/>
+          <p:cNvPr id="32" name="Text 30"/>
+          <p:cNvSpPr/>
+          <p:nvPr/>
+        </p:nvSpPr>
+        <p:spPr>
+          <a:xfrm>
+            <a:off x="5257800" y="9467850"/>
             <a:ext cx="6667500" cy="304800"/>
           </a:xfrm>
           <a:prstGeom prst="rect">
@@ -8163,7 +9370,7 @@
               <a:t> ·</a:t>
             </a:r>
             <a:r>
-              <a:rPr lang="en-US" sz="1800" dirty="0" spc="-1" kern="0">
+              <a:rPr lang="en-US" sz="1800" dirty="0" spc="4" kern="0">
                 <a:solidFill>
                   <a:srgbClr val="9AA0B5"/>
                 </a:solidFill>
@@ -8171,7 +9378,7 @@
                 <a:ea typeface="Be Vietnam Pro" pitchFamily="34" charset="-122"/>
                 <a:cs typeface="Be Vietnam Pro" pitchFamily="34" charset="-120"/>
               </a:rPr>
-              <a:t> 13/17</a:t>
+              <a:t> 14/18</a:t>
             </a:r>
             <a:endParaRPr lang="en-US" sz="1800" dirty="0"/>
           </a:p>
@@ -8179,7 +9386,7 @@
       </p:sp>
       <p:sp>
         <p:nvSpPr>
-          <p:cNvPr id="32" name="Shape 30"/>
+          <p:cNvPr id="33" name="Shape 31"/>
           <p:cNvSpPr/>
           <p:nvPr/>
         </p:nvSpPr>
@@ -8203,7 +9410,7 @@
       </p:sp>
       <p:pic>
         <p:nvPicPr>
-          <p:cNvPr id="33" name="Moda image moda-export-watermark-78b3a82e-ae82-41c7-80c9-8dcc48b01f60" descr="">    </p:cNvPr>
+          <p:cNvPr id="34" name="Moda image moda-export-watermark-d0b0e66b-ed7d-44ca-a55d-c4ece0a2295d" descr="">    </p:cNvPr>
           <p:cNvPicPr>
             <a:picLocks noChangeAspect="1"/>
           </p:cNvPicPr>
@@ -8232,9 +9439,9 @@
 </p:sld>
 </file>
 
-<file path=ppt/slides/slide14.xml><?xml version="1.0" encoding="utf-8"?>
+<file path=ppt/slides/slide15.xml><?xml version="1.0" encoding="utf-8"?>
 <p:sld xmlns:a="http://schemas.openxmlformats.org/drawingml/2006/main" xmlns:r="http://schemas.openxmlformats.org/officeDocument/2006/relationships" xmlns:p="http://schemas.openxmlformats.org/presentationml/2006/main">
-  <p:cSld name="Slide 14">
+  <p:cSld name="Slide 15">
     <p:bg>
       <p:bgPr>
         <a:solidFill>
@@ -8794,7 +10001,29 @@
         </p:nvSpPr>
         <p:spPr>
           <a:xfrm>
-            <a:off x="3895725" y="9544050"/>
+            <a:off x="3914775" y="9563100"/>
+            <a:ext cx="114300" cy="114300"/>
+          </a:xfrm>
+          <a:prstGeom prst="ellipse">
+            <a:avLst/>
+          </a:prstGeom>
+          <a:solidFill>
+            <a:srgbClr val="14161C">
+              <a:alpha val="28000"/>
+            </a:srgbClr>
+          </a:solidFill>
+          <a:ln/>
+        </p:spPr>
+      </p:sp>
+      <p:sp>
+        <p:nvSpPr>
+          <p:cNvPr id="19" name="Shape 17"/>
+          <p:cNvSpPr/>
+          <p:nvPr/>
+        </p:nvSpPr>
+        <p:spPr>
+          <a:xfrm>
+            <a:off x="4124325" y="9544050"/>
             <a:ext cx="152400" cy="152400"/>
           </a:xfrm>
           <a:prstGeom prst="ellipse">
@@ -8808,13 +10037,13 @@
       </p:sp>
       <p:sp>
         <p:nvSpPr>
-          <p:cNvPr id="19" name="Shape 17"/>
-          <p:cNvSpPr/>
-          <p:nvPr/>
-        </p:nvSpPr>
-        <p:spPr>
-          <a:xfrm>
-            <a:off x="4143375" y="9563100"/>
+          <p:cNvPr id="20" name="Shape 18"/>
+          <p:cNvSpPr/>
+          <p:nvPr/>
+        </p:nvSpPr>
+        <p:spPr>
+          <a:xfrm>
+            <a:off x="4371975" y="9563100"/>
             <a:ext cx="114300" cy="114300"/>
           </a:xfrm>
           <a:prstGeom prst="ellipse">
@@ -8830,13 +10059,13 @@
       </p:sp>
       <p:sp>
         <p:nvSpPr>
-          <p:cNvPr id="20" name="Shape 18"/>
-          <p:cNvSpPr/>
-          <p:nvPr/>
-        </p:nvSpPr>
-        <p:spPr>
-          <a:xfrm>
-            <a:off x="4371975" y="9563100"/>
+          <p:cNvPr id="21" name="Shape 19"/>
+          <p:cNvSpPr/>
+          <p:nvPr/>
+        </p:nvSpPr>
+        <p:spPr>
+          <a:xfrm>
+            <a:off x="4600575" y="9563100"/>
             <a:ext cx="114300" cy="114300"/>
           </a:xfrm>
           <a:prstGeom prst="ellipse">
@@ -8852,13 +10081,13 @@
       </p:sp>
       <p:sp>
         <p:nvSpPr>
-          <p:cNvPr id="21" name="Shape 19"/>
-          <p:cNvSpPr/>
-          <p:nvPr/>
-        </p:nvSpPr>
-        <p:spPr>
-          <a:xfrm>
-            <a:off x="4600575" y="9563100"/>
+          <p:cNvPr id="22" name="Shape 20"/>
+          <p:cNvSpPr/>
+          <p:nvPr/>
+        </p:nvSpPr>
+        <p:spPr>
+          <a:xfrm>
+            <a:off x="4829175" y="9563100"/>
             <a:ext cx="114300" cy="114300"/>
           </a:xfrm>
           <a:prstGeom prst="ellipse">
@@ -8874,13 +10103,13 @@
       </p:sp>
       <p:sp>
         <p:nvSpPr>
-          <p:cNvPr id="22" name="Text 20"/>
-          <p:cNvSpPr/>
-          <p:nvPr/>
-        </p:nvSpPr>
-        <p:spPr>
-          <a:xfrm>
-            <a:off x="5029200" y="9467850"/>
+          <p:cNvPr id="23" name="Text 21"/>
+          <p:cNvSpPr/>
+          <p:nvPr/>
+        </p:nvSpPr>
+        <p:spPr>
+          <a:xfrm>
+            <a:off x="5257800" y="9467850"/>
             <a:ext cx="6667500" cy="304800"/>
           </a:xfrm>
           <a:prstGeom prst="rect">
@@ -8941,7 +10170,7 @@
               <a:t> ·</a:t>
             </a:r>
             <a:r>
-              <a:rPr lang="en-US" sz="1800" dirty="0" spc="3" kern="0">
+              <a:rPr lang="en-US" sz="1800" dirty="0" spc="4" kern="0">
                 <a:solidFill>
                   <a:srgbClr val="6B6A66"/>
                 </a:solidFill>
@@ -8949,7 +10178,7 @@
                 <a:ea typeface="Be Vietnam Pro" pitchFamily="34" charset="-122"/>
                 <a:cs typeface="Be Vietnam Pro" pitchFamily="34" charset="-120"/>
               </a:rPr>
-              <a:t> 14/17</a:t>
+              <a:t> 15/18</a:t>
             </a:r>
             <a:endParaRPr lang="en-US" sz="1800" dirty="0"/>
           </a:p>
@@ -8957,7 +10186,7 @@
       </p:sp>
       <p:sp>
         <p:nvSpPr>
-          <p:cNvPr id="23" name="Shape 21"/>
+          <p:cNvPr id="24" name="Shape 22"/>
           <p:cNvSpPr/>
           <p:nvPr/>
         </p:nvSpPr>
@@ -8981,7 +10210,7 @@
       </p:sp>
       <p:pic>
         <p:nvPicPr>
-          <p:cNvPr id="24" name="Moda image moda-export-watermark-7a926d27-b360-488a-9dc2-96e54fe0bf65" descr="">    </p:cNvPr>
+          <p:cNvPr id="25" name="Moda image moda-export-watermark-35609454-67eb-4cb1-a9cb-458d5831b063" descr="">    </p:cNvPr>
           <p:cNvPicPr>
             <a:picLocks noChangeAspect="1"/>
           </p:cNvPicPr>
@@ -9010,9 +10239,9 @@
 </p:sld>
 </file>
 
-<file path=ppt/slides/slide15.xml><?xml version="1.0" encoding="utf-8"?>
+<file path=ppt/slides/slide16.xml><?xml version="1.0" encoding="utf-8"?>
 <p:sld xmlns:a="http://schemas.openxmlformats.org/drawingml/2006/main" xmlns:r="http://schemas.openxmlformats.org/officeDocument/2006/relationships" xmlns:p="http://schemas.openxmlformats.org/presentationml/2006/main">
-  <p:cSld name="Slide 15">
+  <p:cSld name="Slide 16">
     <p:bg>
       <p:bgPr>
         <a:solidFill>
@@ -9107,7 +10336,7 @@
         <p:spPr>
           <a:xfrm>
             <a:off x="914400" y="2381250"/>
-            <a:ext cx="1619250" cy="1181100"/>
+            <a:ext cx="1619250" cy="1285875"/>
           </a:xfrm>
           <a:prstGeom prst="rect">
             <a:avLst/>
@@ -9123,7 +10352,7 @@
               <a:buNone/>
             </a:pPr>
             <a:r>
-              <a:rPr lang="en-US" sz="7745" dirty="0" spc="1" kern="0">
+              <a:rPr lang="en-US" sz="8250" dirty="0" spc="-5" kern="0">
                 <a:solidFill>
                   <a:srgbClr val="FF6A4D"/>
                 </a:solidFill>
@@ -9133,7 +10362,7 @@
               </a:rPr>
               <a:t>1</a:t>
             </a:r>
-            <a:endParaRPr lang="en-US" sz="7745" dirty="0"/>
+            <a:endParaRPr lang="en-US" sz="8250" dirty="0"/>
           </a:p>
         </p:txBody>
       </p:sp>
@@ -9273,7 +10502,7 @@
         <p:spPr>
           <a:xfrm>
             <a:off x="914400" y="3676650"/>
-            <a:ext cx="1619250" cy="1181100"/>
+            <a:ext cx="1619250" cy="1285875"/>
           </a:xfrm>
           <a:prstGeom prst="rect">
             <a:avLst/>
@@ -9289,7 +10518,7 @@
               <a:buNone/>
             </a:pPr>
             <a:r>
-              <a:rPr lang="en-US" sz="7745" dirty="0" spc="5" kern="0">
+              <a:rPr lang="en-US" sz="8250" dirty="0" spc="-4" kern="0">
                 <a:solidFill>
                   <a:srgbClr val="7C93FF"/>
                 </a:solidFill>
@@ -9299,7 +10528,7 @@
               </a:rPr>
               <a:t>2</a:t>
             </a:r>
-            <a:endParaRPr lang="en-US" sz="7745" dirty="0"/>
+            <a:endParaRPr lang="en-US" sz="8250" dirty="0"/>
           </a:p>
         </p:txBody>
       </p:sp>
@@ -9417,7 +10646,7 @@
         <p:spPr>
           <a:xfrm>
             <a:off x="914400" y="4972050"/>
-            <a:ext cx="1619250" cy="1181100"/>
+            <a:ext cx="1619250" cy="1285875"/>
           </a:xfrm>
           <a:prstGeom prst="rect">
             <a:avLst/>
@@ -9433,7 +10662,7 @@
               <a:buNone/>
             </a:pPr>
             <a:r>
-              <a:rPr lang="en-US" sz="7745" dirty="0" spc="1" kern="0">
+              <a:rPr lang="en-US" sz="8250" dirty="0" spc="-1" kern="0">
                 <a:solidFill>
                   <a:srgbClr val="FFB454"/>
                 </a:solidFill>
@@ -9443,7 +10672,7 @@
               </a:rPr>
               <a:t>3</a:t>
             </a:r>
-            <a:endParaRPr lang="en-US" sz="7745" dirty="0"/>
+            <a:endParaRPr lang="en-US" sz="8250" dirty="0"/>
           </a:p>
         </p:txBody>
       </p:sp>
@@ -9594,7 +10823,7 @@
         <p:spPr>
           <a:xfrm>
             <a:off x="914400" y="6267450"/>
-            <a:ext cx="1619250" cy="1181100"/>
+            <a:ext cx="1619250" cy="1285875"/>
           </a:xfrm>
           <a:prstGeom prst="rect">
             <a:avLst/>
@@ -9610,7 +10839,7 @@
               <a:buNone/>
             </a:pPr>
             <a:r>
-              <a:rPr lang="en-US" sz="7745" dirty="0" spc="1" kern="0">
+              <a:rPr lang="en-US" sz="8250" dirty="0" spc="-5" kern="0">
                 <a:solidFill>
                   <a:srgbClr val="3DD6A0"/>
                 </a:solidFill>
@@ -9620,7 +10849,7 @@
               </a:rPr>
               <a:t>4</a:t>
             </a:r>
-            <a:endParaRPr lang="en-US" sz="7745" dirty="0"/>
+            <a:endParaRPr lang="en-US" sz="8250" dirty="0"/>
           </a:p>
         </p:txBody>
       </p:sp>
@@ -9782,7 +11011,7 @@
         <p:spPr>
           <a:xfrm>
             <a:off x="914400" y="7562850"/>
-            <a:ext cx="1619250" cy="1181100"/>
+            <a:ext cx="1619250" cy="1285875"/>
           </a:xfrm>
           <a:prstGeom prst="rect">
             <a:avLst/>
@@ -9798,7 +11027,7 @@
               <a:buNone/>
             </a:pPr>
             <a:r>
-              <a:rPr lang="en-US" sz="7745" dirty="0" spc="1" kern="0">
+              <a:rPr lang="en-US" sz="8250" dirty="0" spc="-1" kern="0">
                 <a:solidFill>
                   <a:srgbClr val="FF6A4D"/>
                 </a:solidFill>
@@ -9808,7 +11037,7 @@
               </a:rPr>
               <a:t>5</a:t>
             </a:r>
-            <a:endParaRPr lang="en-US" sz="7745" dirty="0"/>
+            <a:endParaRPr lang="en-US" sz="8250" dirty="0"/>
           </a:p>
         </p:txBody>
       </p:sp>
@@ -10349,7 +11578,29 @@
         </p:nvSpPr>
         <p:spPr>
           <a:xfrm>
-            <a:off x="4124325" y="9544050"/>
+            <a:off x="4143375" y="9563100"/>
+            <a:ext cx="114300" cy="114300"/>
+          </a:xfrm>
+          <a:prstGeom prst="ellipse">
+            <a:avLst/>
+          </a:prstGeom>
+          <a:solidFill>
+            <a:srgbClr val="F3EEE3">
+              <a:alpha val="28000"/>
+            </a:srgbClr>
+          </a:solidFill>
+          <a:ln/>
+        </p:spPr>
+      </p:sp>
+      <p:sp>
+        <p:nvSpPr>
+          <p:cNvPr id="34" name="Shape 32"/>
+          <p:cNvSpPr/>
+          <p:nvPr/>
+        </p:nvSpPr>
+        <p:spPr>
+          <a:xfrm>
+            <a:off x="4352925" y="9544050"/>
             <a:ext cx="152400" cy="152400"/>
           </a:xfrm>
           <a:prstGeom prst="ellipse">
@@ -10363,13 +11614,13 @@
       </p:sp>
       <p:sp>
         <p:nvSpPr>
-          <p:cNvPr id="34" name="Shape 32"/>
-          <p:cNvSpPr/>
-          <p:nvPr/>
-        </p:nvSpPr>
-        <p:spPr>
-          <a:xfrm>
-            <a:off x="4371975" y="9563100"/>
+          <p:cNvPr id="35" name="Shape 33"/>
+          <p:cNvSpPr/>
+          <p:nvPr/>
+        </p:nvSpPr>
+        <p:spPr>
+          <a:xfrm>
+            <a:off x="4600575" y="9563100"/>
             <a:ext cx="114300" cy="114300"/>
           </a:xfrm>
           <a:prstGeom prst="ellipse">
@@ -10385,13 +11636,13 @@
       </p:sp>
       <p:sp>
         <p:nvSpPr>
-          <p:cNvPr id="35" name="Shape 33"/>
-          <p:cNvSpPr/>
-          <p:nvPr/>
-        </p:nvSpPr>
-        <p:spPr>
-          <a:xfrm>
-            <a:off x="4600575" y="9563100"/>
+          <p:cNvPr id="36" name="Shape 34"/>
+          <p:cNvSpPr/>
+          <p:nvPr/>
+        </p:nvSpPr>
+        <p:spPr>
+          <a:xfrm>
+            <a:off x="4829175" y="9563100"/>
             <a:ext cx="114300" cy="114300"/>
           </a:xfrm>
           <a:prstGeom prst="ellipse">
@@ -10407,13 +11658,13 @@
       </p:sp>
       <p:sp>
         <p:nvSpPr>
-          <p:cNvPr id="36" name="Text 34"/>
-          <p:cNvSpPr/>
-          <p:nvPr/>
-        </p:nvSpPr>
-        <p:spPr>
-          <a:xfrm>
-            <a:off x="5029200" y="9467850"/>
+          <p:cNvPr id="37" name="Text 35"/>
+          <p:cNvSpPr/>
+          <p:nvPr/>
+        </p:nvSpPr>
+        <p:spPr>
+          <a:xfrm>
+            <a:off x="5257800" y="9467850"/>
             <a:ext cx="6667500" cy="304800"/>
           </a:xfrm>
           <a:prstGeom prst="rect">
@@ -10474,7 +11725,7 @@
               <a:t> ·</a:t>
             </a:r>
             <a:r>
-              <a:rPr lang="en-US" sz="1800" dirty="0" spc="2" kern="0">
+              <a:rPr lang="en-US" sz="1800" dirty="0" spc="3" kern="0">
                 <a:solidFill>
                   <a:srgbClr val="9AA0B5"/>
                 </a:solidFill>
@@ -10482,7 +11733,7 @@
                 <a:ea typeface="Be Vietnam Pro" pitchFamily="34" charset="-122"/>
                 <a:cs typeface="Be Vietnam Pro" pitchFamily="34" charset="-120"/>
               </a:rPr>
-              <a:t> 15/17</a:t>
+              <a:t> 16/18</a:t>
             </a:r>
             <a:endParaRPr lang="en-US" sz="1800" dirty="0"/>
           </a:p>
@@ -10490,7 +11741,7 @@
       </p:sp>
       <p:sp>
         <p:nvSpPr>
-          <p:cNvPr id="37" name="Shape 35"/>
+          <p:cNvPr id="38" name="Shape 36"/>
           <p:cNvSpPr/>
           <p:nvPr/>
         </p:nvSpPr>
@@ -10514,7 +11765,7 @@
       </p:sp>
       <p:pic>
         <p:nvPicPr>
-          <p:cNvPr id="38" name="Moda image moda-export-watermark-f87cf93f-a79b-4c96-ad8c-650376e252e8" descr="">    </p:cNvPr>
+          <p:cNvPr id="39" name="Moda image moda-export-watermark-89a54203-f00c-4018-a20a-47d00674b6bb" descr="">    </p:cNvPr>
           <p:cNvPicPr>
             <a:picLocks noChangeAspect="1"/>
           </p:cNvPicPr>
@@ -10543,9 +11794,9 @@
 </p:sld>
 </file>
 
-<file path=ppt/slides/slide16.xml><?xml version="1.0" encoding="utf-8"?>
+<file path=ppt/slides/slide17.xml><?xml version="1.0" encoding="utf-8"?>
 <p:sld xmlns:a="http://schemas.openxmlformats.org/drawingml/2006/main" xmlns:r="http://schemas.openxmlformats.org/officeDocument/2006/relationships" xmlns:p="http://schemas.openxmlformats.org/presentationml/2006/main">
-  <p:cSld name="Slide 16">
+  <p:cSld name="Slide 17">
     <p:bg>
       <p:bgPr>
         <a:solidFill>
@@ -11592,7 +12843,29 @@
         </p:nvSpPr>
         <p:spPr>
           <a:xfrm>
-            <a:off x="4352925" y="9544050"/>
+            <a:off x="4371975" y="9563100"/>
+            <a:ext cx="114300" cy="114300"/>
+          </a:xfrm>
+          <a:prstGeom prst="ellipse">
+            <a:avLst/>
+          </a:prstGeom>
+          <a:solidFill>
+            <a:srgbClr val="14161C">
+              <a:alpha val="28000"/>
+            </a:srgbClr>
+          </a:solidFill>
+          <a:ln/>
+        </p:spPr>
+      </p:sp>
+      <p:sp>
+        <p:nvSpPr>
+          <p:cNvPr id="32" name="Shape 30"/>
+          <p:cNvSpPr/>
+          <p:nvPr/>
+        </p:nvSpPr>
+        <p:spPr>
+          <a:xfrm>
+            <a:off x="4581525" y="9544050"/>
             <a:ext cx="152400" cy="152400"/>
           </a:xfrm>
           <a:prstGeom prst="ellipse">
@@ -11606,13 +12879,13 @@
       </p:sp>
       <p:sp>
         <p:nvSpPr>
-          <p:cNvPr id="32" name="Shape 30"/>
-          <p:cNvSpPr/>
-          <p:nvPr/>
-        </p:nvSpPr>
-        <p:spPr>
-          <a:xfrm>
-            <a:off x="4600575" y="9563100"/>
+          <p:cNvPr id="33" name="Shape 31"/>
+          <p:cNvSpPr/>
+          <p:nvPr/>
+        </p:nvSpPr>
+        <p:spPr>
+          <a:xfrm>
+            <a:off x="4829175" y="9563100"/>
             <a:ext cx="114300" cy="114300"/>
           </a:xfrm>
           <a:prstGeom prst="ellipse">
@@ -11628,13 +12901,13 @@
       </p:sp>
       <p:sp>
         <p:nvSpPr>
-          <p:cNvPr id="33" name="Text 31"/>
-          <p:cNvSpPr/>
-          <p:nvPr/>
-        </p:nvSpPr>
-        <p:spPr>
-          <a:xfrm>
-            <a:off x="5029200" y="9467850"/>
+          <p:cNvPr id="34" name="Text 32"/>
+          <p:cNvSpPr/>
+          <p:nvPr/>
+        </p:nvSpPr>
+        <p:spPr>
+          <a:xfrm>
+            <a:off x="5257800" y="9467850"/>
             <a:ext cx="6667500" cy="304800"/>
           </a:xfrm>
           <a:prstGeom prst="rect">
@@ -11695,7 +12968,7 @@
               <a:t> ·</a:t>
             </a:r>
             <a:r>
-              <a:rPr lang="en-US" sz="1800" dirty="0" spc="2" kern="0">
+              <a:rPr lang="en-US" sz="1800" dirty="0" spc="-9" kern="0">
                 <a:solidFill>
                   <a:srgbClr val="6B6A66"/>
                 </a:solidFill>
@@ -11703,7 +12976,7 @@
                 <a:ea typeface="Be Vietnam Pro" pitchFamily="34" charset="-122"/>
                 <a:cs typeface="Be Vietnam Pro" pitchFamily="34" charset="-120"/>
               </a:rPr>
-              <a:t> 16/17</a:t>
+              <a:t> 17/18</a:t>
             </a:r>
             <a:endParaRPr lang="en-US" sz="1800" dirty="0"/>
           </a:p>
@@ -11711,7 +12984,7 @@
       </p:sp>
       <p:sp>
         <p:nvSpPr>
-          <p:cNvPr id="34" name="Shape 32"/>
+          <p:cNvPr id="35" name="Shape 33"/>
           <p:cNvSpPr/>
           <p:nvPr/>
         </p:nvSpPr>
@@ -11735,7 +13008,7 @@
       </p:sp>
       <p:pic>
         <p:nvPicPr>
-          <p:cNvPr id="35" name="Moda image moda-export-watermark-15681622-914e-44d5-8b25-56d8ddb42c85" descr="">    </p:cNvPr>
+          <p:cNvPr id="36" name="Moda image moda-export-watermark-e7d5fb51-8090-4121-9c8c-21996271a8ae" descr="">    </p:cNvPr>
           <p:cNvPicPr>
             <a:picLocks noChangeAspect="1"/>
           </p:cNvPicPr>
@@ -11764,9 +13037,9 @@
 </p:sld>
 </file>
 
-<file path=ppt/slides/slide17.xml><?xml version="1.0" encoding="utf-8"?>
+<file path=ppt/slides/slide18.xml><?xml version="1.0" encoding="utf-8"?>
 <p:sld xmlns:a="http://schemas.openxmlformats.org/drawingml/2006/main" xmlns:r="http://schemas.openxmlformats.org/officeDocument/2006/relationships" xmlns:p="http://schemas.openxmlformats.org/presentationml/2006/main">
-  <p:cSld name="Slide 17">
+  <p:cSld name="Slide 18">
     <p:bg>
       <p:bgPr>
         <a:solidFill>
@@ -11861,11 +13134,11 @@
         <p:spPr>
           <a:xfrm>
             <a:off x="914400" y="2762250"/>
-            <a:ext cx="16459200" cy="1333500"/>
+            <a:ext cx="16459200" cy="1085850"/>
           </a:xfrm>
           <a:prstGeom prst="roundRect">
             <a:avLst>
-              <a:gd name="adj" fmla="val 14286"/>
+              <a:gd name="adj" fmla="val 17544"/>
             </a:avLst>
           </a:prstGeom>
           <a:solidFill>
@@ -11888,7 +13161,7 @@
         <p:spPr>
           <a:xfrm>
             <a:off x="914400" y="2762250"/>
-            <a:ext cx="133350" cy="1333500"/>
+            <a:ext cx="133350" cy="1085850"/>
           </a:xfrm>
           <a:prstGeom prst="roundRect">
             <a:avLst>
@@ -11910,7 +13183,7 @@
         <p:spPr>
           <a:xfrm>
             <a:off x="1295400" y="2762250"/>
-            <a:ext cx="15621000" cy="1333500"/>
+            <a:ext cx="15621000" cy="1085850"/>
           </a:xfrm>
           <a:prstGeom prst="rect">
             <a:avLst/>
@@ -12014,12 +13287,12 @@
         </p:nvSpPr>
         <p:spPr>
           <a:xfrm>
-            <a:off x="914400" y="4229100"/>
-            <a:ext cx="16459200" cy="1333500"/>
+            <a:off x="914400" y="3981450"/>
+            <a:ext cx="16459200" cy="1085850"/>
           </a:xfrm>
           <a:prstGeom prst="roundRect">
             <a:avLst>
-              <a:gd name="adj" fmla="val 14286"/>
+              <a:gd name="adj" fmla="val 17544"/>
             </a:avLst>
           </a:prstGeom>
           <a:solidFill>
@@ -12041,8 +13314,8 @@
         </p:nvSpPr>
         <p:spPr>
           <a:xfrm>
-            <a:off x="914400" y="4229100"/>
-            <a:ext cx="133350" cy="1333500"/>
+            <a:off x="914400" y="3981450"/>
+            <a:ext cx="133350" cy="1085850"/>
           </a:xfrm>
           <a:prstGeom prst="roundRect">
             <a:avLst>
@@ -12063,8 +13336,8 @@
         </p:nvSpPr>
         <p:spPr>
           <a:xfrm>
-            <a:off x="1295400" y="4229100"/>
-            <a:ext cx="15621000" cy="1333500"/>
+            <a:off x="1295400" y="3981450"/>
+            <a:ext cx="15621000" cy="1085850"/>
           </a:xfrm>
           <a:prstGeom prst="rect">
             <a:avLst/>
@@ -12157,12 +13430,12 @@
         </p:nvSpPr>
         <p:spPr>
           <a:xfrm>
-            <a:off x="914400" y="5695950"/>
-            <a:ext cx="16459200" cy="1333500"/>
+            <a:off x="914400" y="5200650"/>
+            <a:ext cx="16459200" cy="1085850"/>
           </a:xfrm>
           <a:prstGeom prst="roundRect">
             <a:avLst>
-              <a:gd name="adj" fmla="val 14286"/>
+              <a:gd name="adj" fmla="val 17544"/>
             </a:avLst>
           </a:prstGeom>
           <a:solidFill>
@@ -12184,8 +13457,8 @@
         </p:nvSpPr>
         <p:spPr>
           <a:xfrm>
-            <a:off x="914400" y="5695950"/>
-            <a:ext cx="133350" cy="1333500"/>
+            <a:off x="914400" y="5200650"/>
+            <a:ext cx="133350" cy="1085850"/>
           </a:xfrm>
           <a:prstGeom prst="roundRect">
             <a:avLst>
@@ -12206,8 +13479,8 @@
         </p:nvSpPr>
         <p:spPr>
           <a:xfrm>
-            <a:off x="1295400" y="5695950"/>
-            <a:ext cx="15621000" cy="1333500"/>
+            <a:off x="1295400" y="5200650"/>
+            <a:ext cx="15621000" cy="1085850"/>
           </a:xfrm>
           <a:prstGeom prst="rect">
             <a:avLst/>
@@ -12311,12 +13584,12 @@
         </p:nvSpPr>
         <p:spPr>
           <a:xfrm>
-            <a:off x="914400" y="7162800"/>
-            <a:ext cx="16459200" cy="1333500"/>
+            <a:off x="914400" y="6419850"/>
+            <a:ext cx="16459200" cy="1085850"/>
           </a:xfrm>
           <a:prstGeom prst="roundRect">
             <a:avLst>
-              <a:gd name="adj" fmla="val 14286"/>
+              <a:gd name="adj" fmla="val 17544"/>
             </a:avLst>
           </a:prstGeom>
           <a:solidFill>
@@ -12338,8 +13611,8 @@
         </p:nvSpPr>
         <p:spPr>
           <a:xfrm>
-            <a:off x="914400" y="7162800"/>
-            <a:ext cx="133350" cy="1333500"/>
+            <a:off x="914400" y="6419850"/>
+            <a:ext cx="133350" cy="1085850"/>
           </a:xfrm>
           <a:prstGeom prst="roundRect">
             <a:avLst>
@@ -12360,8 +13633,8 @@
         </p:nvSpPr>
         <p:spPr>
           <a:xfrm>
-            <a:off x="1295400" y="7162800"/>
-            <a:ext cx="15621000" cy="1333500"/>
+            <a:off x="1295400" y="6419850"/>
+            <a:ext cx="15621000" cy="1085850"/>
           </a:xfrm>
           <a:prstGeom prst="rect">
             <a:avLst/>
@@ -12476,18 +13749,23 @@
         </p:nvSpPr>
         <p:spPr>
           <a:xfrm>
-            <a:off x="942975" y="9563100"/>
-            <a:ext cx="114300" cy="114300"/>
-          </a:xfrm>
-          <a:prstGeom prst="ellipse">
-            <a:avLst/>
-          </a:prstGeom>
-          <a:solidFill>
-            <a:srgbClr val="F3EEE3">
-              <a:alpha val="28000"/>
-            </a:srgbClr>
-          </a:solidFill>
-          <a:ln/>
+            <a:off x="914400" y="7639050"/>
+            <a:ext cx="16459200" cy="1085850"/>
+          </a:xfrm>
+          <a:prstGeom prst="roundRect">
+            <a:avLst>
+              <a:gd name="adj" fmla="val 17544"/>
+            </a:avLst>
+          </a:prstGeom>
+          <a:solidFill>
+            <a:srgbClr val="1E212B"/>
+          </a:solidFill>
+          <a:ln w="19050">
+            <a:solidFill>
+              <a:srgbClr val="2C3040"/>
+            </a:solidFill>
+            <a:prstDash val="solid"/>
+          </a:ln>
         </p:spPr>
       </p:sp>
       <p:sp>
@@ -12498,341 +13776,13 @@
         </p:nvSpPr>
         <p:spPr>
           <a:xfrm>
-            <a:off x="1171575" y="9563100"/>
-            <a:ext cx="114300" cy="114300"/>
-          </a:xfrm>
-          <a:prstGeom prst="ellipse">
-            <a:avLst/>
-          </a:prstGeom>
-          <a:solidFill>
-            <a:srgbClr val="F3EEE3">
-              <a:alpha val="28000"/>
-            </a:srgbClr>
-          </a:solidFill>
-          <a:ln/>
-        </p:spPr>
-      </p:sp>
-      <p:sp>
-        <p:nvSpPr>
-          <p:cNvPr id="17" name="Shape 15"/>
-          <p:cNvSpPr/>
-          <p:nvPr/>
-        </p:nvSpPr>
-        <p:spPr>
-          <a:xfrm>
-            <a:off x="1400175" y="9563100"/>
-            <a:ext cx="114300" cy="114300"/>
-          </a:xfrm>
-          <a:prstGeom prst="ellipse">
-            <a:avLst/>
-          </a:prstGeom>
-          <a:solidFill>
-            <a:srgbClr val="F3EEE3">
-              <a:alpha val="28000"/>
-            </a:srgbClr>
-          </a:solidFill>
-          <a:ln/>
-        </p:spPr>
-      </p:sp>
-      <p:sp>
-        <p:nvSpPr>
-          <p:cNvPr id="18" name="Shape 16"/>
-          <p:cNvSpPr/>
-          <p:nvPr/>
-        </p:nvSpPr>
-        <p:spPr>
-          <a:xfrm>
-            <a:off x="1628775" y="9563100"/>
-            <a:ext cx="114300" cy="114300"/>
-          </a:xfrm>
-          <a:prstGeom prst="ellipse">
-            <a:avLst/>
-          </a:prstGeom>
-          <a:solidFill>
-            <a:srgbClr val="F3EEE3">
-              <a:alpha val="28000"/>
-            </a:srgbClr>
-          </a:solidFill>
-          <a:ln/>
-        </p:spPr>
-      </p:sp>
-      <p:sp>
-        <p:nvSpPr>
-          <p:cNvPr id="19" name="Shape 17"/>
-          <p:cNvSpPr/>
-          <p:nvPr/>
-        </p:nvSpPr>
-        <p:spPr>
-          <a:xfrm>
-            <a:off x="1857375" y="9563100"/>
-            <a:ext cx="114300" cy="114300"/>
-          </a:xfrm>
-          <a:prstGeom prst="ellipse">
-            <a:avLst/>
-          </a:prstGeom>
-          <a:solidFill>
-            <a:srgbClr val="F3EEE3">
-              <a:alpha val="28000"/>
-            </a:srgbClr>
-          </a:solidFill>
-          <a:ln/>
-        </p:spPr>
-      </p:sp>
-      <p:sp>
-        <p:nvSpPr>
-          <p:cNvPr id="20" name="Shape 18"/>
-          <p:cNvSpPr/>
-          <p:nvPr/>
-        </p:nvSpPr>
-        <p:spPr>
-          <a:xfrm>
-            <a:off x="2085975" y="9563100"/>
-            <a:ext cx="114300" cy="114300"/>
-          </a:xfrm>
-          <a:prstGeom prst="ellipse">
-            <a:avLst/>
-          </a:prstGeom>
-          <a:solidFill>
-            <a:srgbClr val="F3EEE3">
-              <a:alpha val="28000"/>
-            </a:srgbClr>
-          </a:solidFill>
-          <a:ln/>
-        </p:spPr>
-      </p:sp>
-      <p:sp>
-        <p:nvSpPr>
-          <p:cNvPr id="21" name="Shape 19"/>
-          <p:cNvSpPr/>
-          <p:nvPr/>
-        </p:nvSpPr>
-        <p:spPr>
-          <a:xfrm>
-            <a:off x="2314575" y="9563100"/>
-            <a:ext cx="114300" cy="114300"/>
-          </a:xfrm>
-          <a:prstGeom prst="ellipse">
-            <a:avLst/>
-          </a:prstGeom>
-          <a:solidFill>
-            <a:srgbClr val="F3EEE3">
-              <a:alpha val="28000"/>
-            </a:srgbClr>
-          </a:solidFill>
-          <a:ln/>
-        </p:spPr>
-      </p:sp>
-      <p:sp>
-        <p:nvSpPr>
-          <p:cNvPr id="22" name="Shape 20"/>
-          <p:cNvSpPr/>
-          <p:nvPr/>
-        </p:nvSpPr>
-        <p:spPr>
-          <a:xfrm>
-            <a:off x="2543175" y="9563100"/>
-            <a:ext cx="114300" cy="114300"/>
-          </a:xfrm>
-          <a:prstGeom prst="ellipse">
-            <a:avLst/>
-          </a:prstGeom>
-          <a:solidFill>
-            <a:srgbClr val="F3EEE3">
-              <a:alpha val="28000"/>
-            </a:srgbClr>
-          </a:solidFill>
-          <a:ln/>
-        </p:spPr>
-      </p:sp>
-      <p:sp>
-        <p:nvSpPr>
-          <p:cNvPr id="23" name="Shape 21"/>
-          <p:cNvSpPr/>
-          <p:nvPr/>
-        </p:nvSpPr>
-        <p:spPr>
-          <a:xfrm>
-            <a:off x="2771775" y="9563100"/>
-            <a:ext cx="114300" cy="114300"/>
-          </a:xfrm>
-          <a:prstGeom prst="ellipse">
-            <a:avLst/>
-          </a:prstGeom>
-          <a:solidFill>
-            <a:srgbClr val="F3EEE3">
-              <a:alpha val="28000"/>
-            </a:srgbClr>
-          </a:solidFill>
-          <a:ln/>
-        </p:spPr>
-      </p:sp>
-      <p:sp>
-        <p:nvSpPr>
-          <p:cNvPr id="24" name="Shape 22"/>
-          <p:cNvSpPr/>
-          <p:nvPr/>
-        </p:nvSpPr>
-        <p:spPr>
-          <a:xfrm>
-            <a:off x="3000375" y="9563100"/>
-            <a:ext cx="114300" cy="114300"/>
-          </a:xfrm>
-          <a:prstGeom prst="ellipse">
-            <a:avLst/>
-          </a:prstGeom>
-          <a:solidFill>
-            <a:srgbClr val="F3EEE3">
-              <a:alpha val="28000"/>
-            </a:srgbClr>
-          </a:solidFill>
-          <a:ln/>
-        </p:spPr>
-      </p:sp>
-      <p:sp>
-        <p:nvSpPr>
-          <p:cNvPr id="25" name="Shape 23"/>
-          <p:cNvSpPr/>
-          <p:nvPr/>
-        </p:nvSpPr>
-        <p:spPr>
-          <a:xfrm>
-            <a:off x="3228975" y="9563100"/>
-            <a:ext cx="114300" cy="114300"/>
-          </a:xfrm>
-          <a:prstGeom prst="ellipse">
-            <a:avLst/>
-          </a:prstGeom>
-          <a:solidFill>
-            <a:srgbClr val="F3EEE3">
-              <a:alpha val="28000"/>
-            </a:srgbClr>
-          </a:solidFill>
-          <a:ln/>
-        </p:spPr>
-      </p:sp>
-      <p:sp>
-        <p:nvSpPr>
-          <p:cNvPr id="26" name="Shape 24"/>
-          <p:cNvSpPr/>
-          <p:nvPr/>
-        </p:nvSpPr>
-        <p:spPr>
-          <a:xfrm>
-            <a:off x="3457575" y="9563100"/>
-            <a:ext cx="114300" cy="114300"/>
-          </a:xfrm>
-          <a:prstGeom prst="ellipse">
-            <a:avLst/>
-          </a:prstGeom>
-          <a:solidFill>
-            <a:srgbClr val="F3EEE3">
-              <a:alpha val="28000"/>
-            </a:srgbClr>
-          </a:solidFill>
-          <a:ln/>
-        </p:spPr>
-      </p:sp>
-      <p:sp>
-        <p:nvSpPr>
-          <p:cNvPr id="27" name="Shape 25"/>
-          <p:cNvSpPr/>
-          <p:nvPr/>
-        </p:nvSpPr>
-        <p:spPr>
-          <a:xfrm>
-            <a:off x="3686175" y="9563100"/>
-            <a:ext cx="114300" cy="114300"/>
-          </a:xfrm>
-          <a:prstGeom prst="ellipse">
-            <a:avLst/>
-          </a:prstGeom>
-          <a:solidFill>
-            <a:srgbClr val="F3EEE3">
-              <a:alpha val="28000"/>
-            </a:srgbClr>
-          </a:solidFill>
-          <a:ln/>
-        </p:spPr>
-      </p:sp>
-      <p:sp>
-        <p:nvSpPr>
-          <p:cNvPr id="28" name="Shape 26"/>
-          <p:cNvSpPr/>
-          <p:nvPr/>
-        </p:nvSpPr>
-        <p:spPr>
-          <a:xfrm>
-            <a:off x="3914775" y="9563100"/>
-            <a:ext cx="114300" cy="114300"/>
-          </a:xfrm>
-          <a:prstGeom prst="ellipse">
-            <a:avLst/>
-          </a:prstGeom>
-          <a:solidFill>
-            <a:srgbClr val="F3EEE3">
-              <a:alpha val="28000"/>
-            </a:srgbClr>
-          </a:solidFill>
-          <a:ln/>
-        </p:spPr>
-      </p:sp>
-      <p:sp>
-        <p:nvSpPr>
-          <p:cNvPr id="29" name="Shape 27"/>
-          <p:cNvSpPr/>
-          <p:nvPr/>
-        </p:nvSpPr>
-        <p:spPr>
-          <a:xfrm>
-            <a:off x="4143375" y="9563100"/>
-            <a:ext cx="114300" cy="114300"/>
-          </a:xfrm>
-          <a:prstGeom prst="ellipse">
-            <a:avLst/>
-          </a:prstGeom>
-          <a:solidFill>
-            <a:srgbClr val="F3EEE3">
-              <a:alpha val="28000"/>
-            </a:srgbClr>
-          </a:solidFill>
-          <a:ln/>
-        </p:spPr>
-      </p:sp>
-      <p:sp>
-        <p:nvSpPr>
-          <p:cNvPr id="30" name="Shape 28"/>
-          <p:cNvSpPr/>
-          <p:nvPr/>
-        </p:nvSpPr>
-        <p:spPr>
-          <a:xfrm>
-            <a:off x="4371975" y="9563100"/>
-            <a:ext cx="114300" cy="114300"/>
-          </a:xfrm>
-          <a:prstGeom prst="ellipse">
-            <a:avLst/>
-          </a:prstGeom>
-          <a:solidFill>
-            <a:srgbClr val="F3EEE3">
-              <a:alpha val="28000"/>
-            </a:srgbClr>
-          </a:solidFill>
-          <a:ln/>
-        </p:spPr>
-      </p:sp>
-      <p:sp>
-        <p:nvSpPr>
-          <p:cNvPr id="31" name="Shape 29"/>
-          <p:cNvSpPr/>
-          <p:nvPr/>
-        </p:nvSpPr>
-        <p:spPr>
-          <a:xfrm>
-            <a:off x="4581525" y="9544050"/>
-            <a:ext cx="152400" cy="152400"/>
-          </a:xfrm>
-          <a:prstGeom prst="ellipse">
-            <a:avLst/>
+            <a:off x="914400" y="7639050"/>
+            <a:ext cx="133350" cy="1085850"/>
+          </a:xfrm>
+          <a:prstGeom prst="roundRect">
+            <a:avLst>
+              <a:gd name="adj" fmla="val 50000"/>
+            </a:avLst>
           </a:prstGeom>
           <a:solidFill>
             <a:srgbClr val="FF6A4D"/>
@@ -12842,14 +13792,14 @@
       </p:sp>
       <p:sp>
         <p:nvSpPr>
-          <p:cNvPr id="32" name="Text 30"/>
-          <p:cNvSpPr/>
-          <p:nvPr/>
-        </p:nvSpPr>
-        <p:spPr>
-          <a:xfrm>
-            <a:off x="5029200" y="9467850"/>
-            <a:ext cx="6667500" cy="304800"/>
+          <p:cNvPr id="17" name="Text 15"/>
+          <p:cNvSpPr/>
+          <p:nvPr/>
+        </p:nvSpPr>
+        <p:spPr>
+          <a:xfrm>
+            <a:off x="1295400" y="7639050"/>
+            <a:ext cx="15621000" cy="1085850"/>
           </a:xfrm>
           <a:prstGeom prst="rect">
             <a:avLst/>
@@ -12865,6 +13815,516 @@
               <a:buNone/>
             </a:pPr>
             <a:r>
+              <a:rPr lang="en-US" sz="3000" b="1" dirty="0" spc="-45" kern="0">
+                <a:solidFill>
+                  <a:srgbClr val="F3EEE3"/>
+                </a:solidFill>
+                <a:latin typeface="Be Vietnam Pro" pitchFamily="34" charset="0"/>
+                <a:ea typeface="Be Vietnam Pro" pitchFamily="34" charset="-122"/>
+                <a:cs typeface="Be Vietnam Pro" pitchFamily="34" charset="-120"/>
+              </a:rPr>
+              <a:t>Hove</a:t>
+            </a:r>
+            <a:r>
+              <a:rPr lang="en-US" sz="3000" b="1" dirty="0" spc="2" kern="0">
+                <a:solidFill>
+                  <a:srgbClr val="F3EEE3"/>
+                </a:solidFill>
+                <a:latin typeface="Be Vietnam Pro" pitchFamily="34" charset="0"/>
+                <a:ea typeface="Be Vietnam Pro" pitchFamily="34" charset="-122"/>
+                <a:cs typeface="Be Vietnam Pro" pitchFamily="34" charset="-120"/>
+              </a:rPr>
+              <a:t> &amp;</a:t>
+            </a:r>
+            <a:r>
+              <a:rPr lang="en-US" sz="3000" b="1" dirty="0" spc="-2" kern="0">
+                <a:solidFill>
+                  <a:srgbClr val="F3EEE3"/>
+                </a:solidFill>
+                <a:latin typeface="Be Vietnam Pro" pitchFamily="34" charset="0"/>
+                <a:ea typeface="Be Vietnam Pro" pitchFamily="34" charset="-122"/>
+                <a:cs typeface="Be Vietnam Pro" pitchFamily="34" charset="-120"/>
+              </a:rPr>
+              <a:t> Martinez,</a:t>
+            </a:r>
+            <a:r>
+              <a:rPr lang="en-US" sz="3000" b="1" dirty="0" spc="6" kern="0">
+                <a:solidFill>
+                  <a:srgbClr val="F3EEE3"/>
+                </a:solidFill>
+                <a:latin typeface="Be Vietnam Pro" pitchFamily="34" charset="0"/>
+                <a:ea typeface="Be Vietnam Pro" pitchFamily="34" charset="-122"/>
+                <a:cs typeface="Be Vietnam Pro" pitchFamily="34" charset="-120"/>
+              </a:rPr>
+              <a:t> chương</a:t>
+            </a:r>
+            <a:r>
+              <a:rPr lang="en-US" sz="3000" b="1" dirty="0" spc="4" kern="0">
+                <a:solidFill>
+                  <a:srgbClr val="F3EEE3"/>
+                </a:solidFill>
+                <a:latin typeface="Be Vietnam Pro" pitchFamily="34" charset="0"/>
+                <a:ea typeface="Be Vietnam Pro" pitchFamily="34" charset="-122"/>
+                <a:cs typeface="Be Vietnam Pro" pitchFamily="34" charset="-120"/>
+              </a:rPr>
+              <a:t> 12</a:t>
+            </a:r>
+            <a:r>
+              <a:rPr lang="en-US" sz="3000" b="1" dirty="0" spc="0" kern="0">
+                <a:solidFill>
+                  <a:srgbClr val="F3EEE3"/>
+                </a:solidFill>
+                <a:latin typeface="Be Vietnam Pro" pitchFamily="34" charset="0"/>
+                <a:ea typeface="Be Vietnam Pro" pitchFamily="34" charset="-122"/>
+                <a:cs typeface="Be Vietnam Pro" pitchFamily="34" charset="-120"/>
+              </a:rPr>
+              <a:t> (hình</a:t>
+            </a:r>
+            <a:r>
+              <a:rPr lang="en-US" sz="3000" b="1" dirty="0" spc="-1" kern="0">
+                <a:solidFill>
+                  <a:srgbClr val="F3EEE3"/>
+                </a:solidFill>
+                <a:latin typeface="Be Vietnam Pro" pitchFamily="34" charset="0"/>
+                <a:ea typeface="Be Vietnam Pro" pitchFamily="34" charset="-122"/>
+                <a:cs typeface="Be Vietnam Pro" pitchFamily="34" charset="-120"/>
+              </a:rPr>
+              <a:t> minh</a:t>
+            </a:r>
+            <a:r>
+              <a:rPr lang="en-US" sz="3000" b="1" dirty="0" spc="-8" kern="0">
+                <a:solidFill>
+                  <a:srgbClr val="F3EEE3"/>
+                </a:solidFill>
+                <a:latin typeface="Be Vietnam Pro" pitchFamily="34" charset="0"/>
+                <a:ea typeface="Be Vietnam Pro" pitchFamily="34" charset="-122"/>
+                <a:cs typeface="Be Vietnam Pro" pitchFamily="34" charset="-120"/>
+              </a:rPr>
+              <a:t> họa)</a:t>
+            </a:r>
+            <a:endParaRPr lang="en-US" sz="3000" dirty="0"/>
+          </a:p>
+        </p:txBody>
+      </p:sp>
+      <p:sp>
+        <p:nvSpPr>
+          <p:cNvPr id="18" name="Shape 16"/>
+          <p:cNvSpPr/>
+          <p:nvPr/>
+        </p:nvSpPr>
+        <p:spPr>
+          <a:xfrm>
+            <a:off x="942975" y="9563100"/>
+            <a:ext cx="114300" cy="114300"/>
+          </a:xfrm>
+          <a:prstGeom prst="ellipse">
+            <a:avLst/>
+          </a:prstGeom>
+          <a:solidFill>
+            <a:srgbClr val="F3EEE3">
+              <a:alpha val="28000"/>
+            </a:srgbClr>
+          </a:solidFill>
+          <a:ln/>
+        </p:spPr>
+      </p:sp>
+      <p:sp>
+        <p:nvSpPr>
+          <p:cNvPr id="19" name="Shape 17"/>
+          <p:cNvSpPr/>
+          <p:nvPr/>
+        </p:nvSpPr>
+        <p:spPr>
+          <a:xfrm>
+            <a:off x="1171575" y="9563100"/>
+            <a:ext cx="114300" cy="114300"/>
+          </a:xfrm>
+          <a:prstGeom prst="ellipse">
+            <a:avLst/>
+          </a:prstGeom>
+          <a:solidFill>
+            <a:srgbClr val="F3EEE3">
+              <a:alpha val="28000"/>
+            </a:srgbClr>
+          </a:solidFill>
+          <a:ln/>
+        </p:spPr>
+      </p:sp>
+      <p:sp>
+        <p:nvSpPr>
+          <p:cNvPr id="20" name="Shape 18"/>
+          <p:cNvSpPr/>
+          <p:nvPr/>
+        </p:nvSpPr>
+        <p:spPr>
+          <a:xfrm>
+            <a:off x="1400175" y="9563100"/>
+            <a:ext cx="114300" cy="114300"/>
+          </a:xfrm>
+          <a:prstGeom prst="ellipse">
+            <a:avLst/>
+          </a:prstGeom>
+          <a:solidFill>
+            <a:srgbClr val="F3EEE3">
+              <a:alpha val="28000"/>
+            </a:srgbClr>
+          </a:solidFill>
+          <a:ln/>
+        </p:spPr>
+      </p:sp>
+      <p:sp>
+        <p:nvSpPr>
+          <p:cNvPr id="21" name="Shape 19"/>
+          <p:cNvSpPr/>
+          <p:nvPr/>
+        </p:nvSpPr>
+        <p:spPr>
+          <a:xfrm>
+            <a:off x="1628775" y="9563100"/>
+            <a:ext cx="114300" cy="114300"/>
+          </a:xfrm>
+          <a:prstGeom prst="ellipse">
+            <a:avLst/>
+          </a:prstGeom>
+          <a:solidFill>
+            <a:srgbClr val="F3EEE3">
+              <a:alpha val="28000"/>
+            </a:srgbClr>
+          </a:solidFill>
+          <a:ln/>
+        </p:spPr>
+      </p:sp>
+      <p:sp>
+        <p:nvSpPr>
+          <p:cNvPr id="22" name="Shape 20"/>
+          <p:cNvSpPr/>
+          <p:nvPr/>
+        </p:nvSpPr>
+        <p:spPr>
+          <a:xfrm>
+            <a:off x="1857375" y="9563100"/>
+            <a:ext cx="114300" cy="114300"/>
+          </a:xfrm>
+          <a:prstGeom prst="ellipse">
+            <a:avLst/>
+          </a:prstGeom>
+          <a:solidFill>
+            <a:srgbClr val="F3EEE3">
+              <a:alpha val="28000"/>
+            </a:srgbClr>
+          </a:solidFill>
+          <a:ln/>
+        </p:spPr>
+      </p:sp>
+      <p:sp>
+        <p:nvSpPr>
+          <p:cNvPr id="23" name="Shape 21"/>
+          <p:cNvSpPr/>
+          <p:nvPr/>
+        </p:nvSpPr>
+        <p:spPr>
+          <a:xfrm>
+            <a:off x="2085975" y="9563100"/>
+            <a:ext cx="114300" cy="114300"/>
+          </a:xfrm>
+          <a:prstGeom prst="ellipse">
+            <a:avLst/>
+          </a:prstGeom>
+          <a:solidFill>
+            <a:srgbClr val="F3EEE3">
+              <a:alpha val="28000"/>
+            </a:srgbClr>
+          </a:solidFill>
+          <a:ln/>
+        </p:spPr>
+      </p:sp>
+      <p:sp>
+        <p:nvSpPr>
+          <p:cNvPr id="24" name="Shape 22"/>
+          <p:cNvSpPr/>
+          <p:nvPr/>
+        </p:nvSpPr>
+        <p:spPr>
+          <a:xfrm>
+            <a:off x="2314575" y="9563100"/>
+            <a:ext cx="114300" cy="114300"/>
+          </a:xfrm>
+          <a:prstGeom prst="ellipse">
+            <a:avLst/>
+          </a:prstGeom>
+          <a:solidFill>
+            <a:srgbClr val="F3EEE3">
+              <a:alpha val="28000"/>
+            </a:srgbClr>
+          </a:solidFill>
+          <a:ln/>
+        </p:spPr>
+      </p:sp>
+      <p:sp>
+        <p:nvSpPr>
+          <p:cNvPr id="25" name="Shape 23"/>
+          <p:cNvSpPr/>
+          <p:nvPr/>
+        </p:nvSpPr>
+        <p:spPr>
+          <a:xfrm>
+            <a:off x="2543175" y="9563100"/>
+            <a:ext cx="114300" cy="114300"/>
+          </a:xfrm>
+          <a:prstGeom prst="ellipse">
+            <a:avLst/>
+          </a:prstGeom>
+          <a:solidFill>
+            <a:srgbClr val="F3EEE3">
+              <a:alpha val="28000"/>
+            </a:srgbClr>
+          </a:solidFill>
+          <a:ln/>
+        </p:spPr>
+      </p:sp>
+      <p:sp>
+        <p:nvSpPr>
+          <p:cNvPr id="26" name="Shape 24"/>
+          <p:cNvSpPr/>
+          <p:nvPr/>
+        </p:nvSpPr>
+        <p:spPr>
+          <a:xfrm>
+            <a:off x="2771775" y="9563100"/>
+            <a:ext cx="114300" cy="114300"/>
+          </a:xfrm>
+          <a:prstGeom prst="ellipse">
+            <a:avLst/>
+          </a:prstGeom>
+          <a:solidFill>
+            <a:srgbClr val="F3EEE3">
+              <a:alpha val="28000"/>
+            </a:srgbClr>
+          </a:solidFill>
+          <a:ln/>
+        </p:spPr>
+      </p:sp>
+      <p:sp>
+        <p:nvSpPr>
+          <p:cNvPr id="27" name="Shape 25"/>
+          <p:cNvSpPr/>
+          <p:nvPr/>
+        </p:nvSpPr>
+        <p:spPr>
+          <a:xfrm>
+            <a:off x="3000375" y="9563100"/>
+            <a:ext cx="114300" cy="114300"/>
+          </a:xfrm>
+          <a:prstGeom prst="ellipse">
+            <a:avLst/>
+          </a:prstGeom>
+          <a:solidFill>
+            <a:srgbClr val="F3EEE3">
+              <a:alpha val="28000"/>
+            </a:srgbClr>
+          </a:solidFill>
+          <a:ln/>
+        </p:spPr>
+      </p:sp>
+      <p:sp>
+        <p:nvSpPr>
+          <p:cNvPr id="28" name="Shape 26"/>
+          <p:cNvSpPr/>
+          <p:nvPr/>
+        </p:nvSpPr>
+        <p:spPr>
+          <a:xfrm>
+            <a:off x="3228975" y="9563100"/>
+            <a:ext cx="114300" cy="114300"/>
+          </a:xfrm>
+          <a:prstGeom prst="ellipse">
+            <a:avLst/>
+          </a:prstGeom>
+          <a:solidFill>
+            <a:srgbClr val="F3EEE3">
+              <a:alpha val="28000"/>
+            </a:srgbClr>
+          </a:solidFill>
+          <a:ln/>
+        </p:spPr>
+      </p:sp>
+      <p:sp>
+        <p:nvSpPr>
+          <p:cNvPr id="29" name="Shape 27"/>
+          <p:cNvSpPr/>
+          <p:nvPr/>
+        </p:nvSpPr>
+        <p:spPr>
+          <a:xfrm>
+            <a:off x="3457575" y="9563100"/>
+            <a:ext cx="114300" cy="114300"/>
+          </a:xfrm>
+          <a:prstGeom prst="ellipse">
+            <a:avLst/>
+          </a:prstGeom>
+          <a:solidFill>
+            <a:srgbClr val="F3EEE3">
+              <a:alpha val="28000"/>
+            </a:srgbClr>
+          </a:solidFill>
+          <a:ln/>
+        </p:spPr>
+      </p:sp>
+      <p:sp>
+        <p:nvSpPr>
+          <p:cNvPr id="30" name="Shape 28"/>
+          <p:cNvSpPr/>
+          <p:nvPr/>
+        </p:nvSpPr>
+        <p:spPr>
+          <a:xfrm>
+            <a:off x="3686175" y="9563100"/>
+            <a:ext cx="114300" cy="114300"/>
+          </a:xfrm>
+          <a:prstGeom prst="ellipse">
+            <a:avLst/>
+          </a:prstGeom>
+          <a:solidFill>
+            <a:srgbClr val="F3EEE3">
+              <a:alpha val="28000"/>
+            </a:srgbClr>
+          </a:solidFill>
+          <a:ln/>
+        </p:spPr>
+      </p:sp>
+      <p:sp>
+        <p:nvSpPr>
+          <p:cNvPr id="31" name="Shape 29"/>
+          <p:cNvSpPr/>
+          <p:nvPr/>
+        </p:nvSpPr>
+        <p:spPr>
+          <a:xfrm>
+            <a:off x="3914775" y="9563100"/>
+            <a:ext cx="114300" cy="114300"/>
+          </a:xfrm>
+          <a:prstGeom prst="ellipse">
+            <a:avLst/>
+          </a:prstGeom>
+          <a:solidFill>
+            <a:srgbClr val="F3EEE3">
+              <a:alpha val="28000"/>
+            </a:srgbClr>
+          </a:solidFill>
+          <a:ln/>
+        </p:spPr>
+      </p:sp>
+      <p:sp>
+        <p:nvSpPr>
+          <p:cNvPr id="32" name="Shape 30"/>
+          <p:cNvSpPr/>
+          <p:nvPr/>
+        </p:nvSpPr>
+        <p:spPr>
+          <a:xfrm>
+            <a:off x="4143375" y="9563100"/>
+            <a:ext cx="114300" cy="114300"/>
+          </a:xfrm>
+          <a:prstGeom prst="ellipse">
+            <a:avLst/>
+          </a:prstGeom>
+          <a:solidFill>
+            <a:srgbClr val="F3EEE3">
+              <a:alpha val="28000"/>
+            </a:srgbClr>
+          </a:solidFill>
+          <a:ln/>
+        </p:spPr>
+      </p:sp>
+      <p:sp>
+        <p:nvSpPr>
+          <p:cNvPr id="33" name="Shape 31"/>
+          <p:cNvSpPr/>
+          <p:nvPr/>
+        </p:nvSpPr>
+        <p:spPr>
+          <a:xfrm>
+            <a:off x="4371975" y="9563100"/>
+            <a:ext cx="114300" cy="114300"/>
+          </a:xfrm>
+          <a:prstGeom prst="ellipse">
+            <a:avLst/>
+          </a:prstGeom>
+          <a:solidFill>
+            <a:srgbClr val="F3EEE3">
+              <a:alpha val="28000"/>
+            </a:srgbClr>
+          </a:solidFill>
+          <a:ln/>
+        </p:spPr>
+      </p:sp>
+      <p:sp>
+        <p:nvSpPr>
+          <p:cNvPr id="34" name="Shape 32"/>
+          <p:cNvSpPr/>
+          <p:nvPr/>
+        </p:nvSpPr>
+        <p:spPr>
+          <a:xfrm>
+            <a:off x="4600575" y="9563100"/>
+            <a:ext cx="114300" cy="114300"/>
+          </a:xfrm>
+          <a:prstGeom prst="ellipse">
+            <a:avLst/>
+          </a:prstGeom>
+          <a:solidFill>
+            <a:srgbClr val="F3EEE3">
+              <a:alpha val="28000"/>
+            </a:srgbClr>
+          </a:solidFill>
+          <a:ln/>
+        </p:spPr>
+      </p:sp>
+      <p:sp>
+        <p:nvSpPr>
+          <p:cNvPr id="35" name="Shape 33"/>
+          <p:cNvSpPr/>
+          <p:nvPr/>
+        </p:nvSpPr>
+        <p:spPr>
+          <a:xfrm>
+            <a:off x="4810125" y="9544050"/>
+            <a:ext cx="152400" cy="152400"/>
+          </a:xfrm>
+          <a:prstGeom prst="ellipse">
+            <a:avLst/>
+          </a:prstGeom>
+          <a:solidFill>
+            <a:srgbClr val="FF6A4D"/>
+          </a:solidFill>
+          <a:ln/>
+        </p:spPr>
+      </p:sp>
+      <p:sp>
+        <p:nvSpPr>
+          <p:cNvPr id="36" name="Text 34"/>
+          <p:cNvSpPr/>
+          <p:nvPr/>
+        </p:nvSpPr>
+        <p:spPr>
+          <a:xfrm>
+            <a:off x="5257800" y="9467850"/>
+            <a:ext cx="6667500" cy="304800"/>
+          </a:xfrm>
+          <a:prstGeom prst="rect">
+            <a:avLst/>
+          </a:prstGeom>
+          <a:noFill/>
+          <a:ln/>
+        </p:spPr>
+        <p:txBody>
+          <a:bodyPr wrap="square" lIns="0" tIns="0" rIns="0" bIns="0" rtlCol="0" anchor="ctr"/>
+          <a:lstStyle/>
+          <a:p>
+            <a:pPr algn="l" indent="0" marL="0">
+              <a:buNone/>
+            </a:pPr>
+            <a:r>
               <a:rPr lang="en-US" sz="1800" dirty="0" spc="-6" kern="0">
                 <a:solidFill>
                   <a:srgbClr val="9AA0B5"/>
@@ -12909,7 +14369,7 @@
               <a:t> ·</a:t>
             </a:r>
             <a:r>
-              <a:rPr lang="en-US" sz="1800" dirty="0" spc="-11" kern="0">
+              <a:rPr lang="en-US" sz="1800" dirty="0" spc="4" kern="0">
                 <a:solidFill>
                   <a:srgbClr val="9AA0B5"/>
                 </a:solidFill>
@@ -12917,7 +14377,7 @@
                 <a:ea typeface="Be Vietnam Pro" pitchFamily="34" charset="-122"/>
                 <a:cs typeface="Be Vietnam Pro" pitchFamily="34" charset="-120"/>
               </a:rPr>
-              <a:t> 17/17</a:t>
+              <a:t> 18/18</a:t>
             </a:r>
             <a:endParaRPr lang="en-US" sz="1800" dirty="0"/>
           </a:p>
@@ -12925,7 +14385,7 @@
       </p:sp>
       <p:sp>
         <p:nvSpPr>
-          <p:cNvPr id="33" name="Shape 31"/>
+          <p:cNvPr id="37" name="Shape 35"/>
           <p:cNvSpPr/>
           <p:nvPr/>
         </p:nvSpPr>
@@ -12949,7 +14409,7 @@
       </p:sp>
       <p:pic>
         <p:nvPicPr>
-          <p:cNvPr id="34" name="Moda image moda-export-watermark-881ea679-d785-49d4-b4de-1b8731a6ad88" descr="">    </p:cNvPr>
+          <p:cNvPr id="38" name="Moda image moda-export-watermark-f57360b2-beab-41ef-bdb3-69f4e854f786" descr="">    </p:cNvPr>
           <p:cNvPicPr>
             <a:picLocks noChangeAspect="1"/>
           </p:cNvPicPr>
@@ -14151,13 +15611,35 @@
       </p:sp>
       <p:sp>
         <p:nvSpPr>
-          <p:cNvPr id="33" name="Text 31"/>
-          <p:cNvSpPr/>
-          <p:nvPr/>
-        </p:nvSpPr>
-        <p:spPr>
-          <a:xfrm>
-            <a:off x="5029200" y="9467850"/>
+          <p:cNvPr id="33" name="Shape 31"/>
+          <p:cNvSpPr/>
+          <p:nvPr/>
+        </p:nvSpPr>
+        <p:spPr>
+          <a:xfrm>
+            <a:off x="4829175" y="9563100"/>
+            <a:ext cx="114300" cy="114300"/>
+          </a:xfrm>
+          <a:prstGeom prst="ellipse">
+            <a:avLst/>
+          </a:prstGeom>
+          <a:solidFill>
+            <a:srgbClr val="14161C">
+              <a:alpha val="28000"/>
+            </a:srgbClr>
+          </a:solidFill>
+          <a:ln/>
+        </p:spPr>
+      </p:sp>
+      <p:sp>
+        <p:nvSpPr>
+          <p:cNvPr id="34" name="Text 32"/>
+          <p:cNvSpPr/>
+          <p:nvPr/>
+        </p:nvSpPr>
+        <p:spPr>
+          <a:xfrm>
+            <a:off x="5257800" y="9467850"/>
             <a:ext cx="6667500" cy="304800"/>
           </a:xfrm>
           <a:prstGeom prst="rect">
@@ -14218,7 +15700,7 @@
               <a:t> ·</a:t>
             </a:r>
             <a:r>
-              <a:rPr lang="en-US" sz="1800" dirty="0" spc="1" kern="0">
+              <a:rPr lang="en-US" sz="1800" dirty="0" spc="3" kern="0">
                 <a:solidFill>
                   <a:srgbClr val="6B6A66"/>
                 </a:solidFill>
@@ -14226,7 +15708,7 @@
                 <a:ea typeface="Be Vietnam Pro" pitchFamily="34" charset="-122"/>
                 <a:cs typeface="Be Vietnam Pro" pitchFamily="34" charset="-120"/>
               </a:rPr>
-              <a:t> 02/17</a:t>
+              <a:t> 02/18</a:t>
             </a:r>
             <a:endParaRPr lang="en-US" sz="1800" dirty="0"/>
           </a:p>
@@ -14234,7 +15716,7 @@
       </p:sp>
       <p:sp>
         <p:nvSpPr>
-          <p:cNvPr id="34" name="Shape 32"/>
+          <p:cNvPr id="35" name="Shape 33"/>
           <p:cNvSpPr/>
           <p:nvPr/>
         </p:nvSpPr>
@@ -14258,7 +15740,7 @@
       </p:sp>
       <p:pic>
         <p:nvPicPr>
-          <p:cNvPr id="35" name="Moda image moda-export-watermark-3e7bc96d-e3c0-49b1-8f17-f384ea7fbd24" descr="">    </p:cNvPr>
+          <p:cNvPr id="36" name="Moda image moda-export-watermark-845b208c-81c6-4fc5-b93c-b2c94837cd77" descr="">    </p:cNvPr>
           <p:cNvPicPr>
             <a:picLocks noChangeAspect="1"/>
           </p:cNvPicPr>
@@ -15164,13 +16646,35 @@
       </p:sp>
       <p:sp>
         <p:nvSpPr>
-          <p:cNvPr id="28" name="Text 26"/>
-          <p:cNvSpPr/>
-          <p:nvPr/>
-        </p:nvSpPr>
-        <p:spPr>
-          <a:xfrm>
-            <a:off x="5029200" y="9467850"/>
+          <p:cNvPr id="28" name="Shape 26"/>
+          <p:cNvSpPr/>
+          <p:nvPr/>
+        </p:nvSpPr>
+        <p:spPr>
+          <a:xfrm>
+            <a:off x="4829175" y="9563100"/>
+            <a:ext cx="114300" cy="114300"/>
+          </a:xfrm>
+          <a:prstGeom prst="ellipse">
+            <a:avLst/>
+          </a:prstGeom>
+          <a:solidFill>
+            <a:srgbClr val="F3EEE3">
+              <a:alpha val="28000"/>
+            </a:srgbClr>
+          </a:solidFill>
+          <a:ln/>
+        </p:spPr>
+      </p:sp>
+      <p:sp>
+        <p:nvSpPr>
+          <p:cNvPr id="29" name="Text 27"/>
+          <p:cNvSpPr/>
+          <p:nvPr/>
+        </p:nvSpPr>
+        <p:spPr>
+          <a:xfrm>
+            <a:off x="5257800" y="9467850"/>
             <a:ext cx="6667500" cy="304800"/>
           </a:xfrm>
           <a:prstGeom prst="rect">
@@ -15228,18 +16732,7 @@
                 <a:ea typeface="Be Vietnam Pro" pitchFamily="34" charset="-122"/>
                 <a:cs typeface="Be Vietnam Pro" pitchFamily="34" charset="-120"/>
               </a:rPr>
-              <a:t> ·</a:t>
-            </a:r>
-            <a:r>
-              <a:rPr lang="en-US" sz="1800" dirty="0" spc="-1" kern="0">
-                <a:solidFill>
-                  <a:srgbClr val="9AA0B5"/>
-                </a:solidFill>
-                <a:latin typeface="Be Vietnam Pro" pitchFamily="34" charset="0"/>
-                <a:ea typeface="Be Vietnam Pro" pitchFamily="34" charset="-122"/>
-                <a:cs typeface="Be Vietnam Pro" pitchFamily="34" charset="-120"/>
-              </a:rPr>
-              <a:t> 03/17</a:t>
+              <a:t> · 03/18</a:t>
             </a:r>
             <a:endParaRPr lang="en-US" sz="1800" dirty="0"/>
           </a:p>
@@ -15247,7 +16740,7 @@
       </p:sp>
       <p:sp>
         <p:nvSpPr>
-          <p:cNvPr id="29" name="Shape 27"/>
+          <p:cNvPr id="30" name="Shape 28"/>
           <p:cNvSpPr/>
           <p:nvPr/>
         </p:nvSpPr>
@@ -15271,7 +16764,7 @@
       </p:sp>
       <p:pic>
         <p:nvPicPr>
-          <p:cNvPr id="30" name="Moda image moda-export-watermark-9085fcf2-901e-488d-858f-ea6d5cf47deb" descr="">    </p:cNvPr>
+          <p:cNvPr id="31" name="Moda image moda-export-watermark-0c6acbdd-66ad-46b0-874d-08d37b133bb9" descr="">    </p:cNvPr>
           <p:cNvPicPr>
             <a:picLocks noChangeAspect="1"/>
           </p:cNvPicPr>
@@ -15992,13 +17485,35 @@
       </p:sp>
       <p:sp>
         <p:nvSpPr>
-          <p:cNvPr id="23" name="Text 21"/>
-          <p:cNvSpPr/>
-          <p:nvPr/>
-        </p:nvSpPr>
-        <p:spPr>
-          <a:xfrm>
-            <a:off x="5029200" y="9467850"/>
+          <p:cNvPr id="23" name="Shape 21"/>
+          <p:cNvSpPr/>
+          <p:nvPr/>
+        </p:nvSpPr>
+        <p:spPr>
+          <a:xfrm>
+            <a:off x="4829175" y="9563100"/>
+            <a:ext cx="114300" cy="114300"/>
+          </a:xfrm>
+          <a:prstGeom prst="ellipse">
+            <a:avLst/>
+          </a:prstGeom>
+          <a:solidFill>
+            <a:srgbClr val="14161C">
+              <a:alpha val="28000"/>
+            </a:srgbClr>
+          </a:solidFill>
+          <a:ln/>
+        </p:spPr>
+      </p:sp>
+      <p:sp>
+        <p:nvSpPr>
+          <p:cNvPr id="24" name="Text 22"/>
+          <p:cNvSpPr/>
+          <p:nvPr/>
+        </p:nvSpPr>
+        <p:spPr>
+          <a:xfrm>
+            <a:off x="5257800" y="9467850"/>
             <a:ext cx="6667500" cy="304800"/>
           </a:xfrm>
           <a:prstGeom prst="rect">
@@ -16059,7 +17574,7 @@
               <a:t> ·</a:t>
             </a:r>
             <a:r>
-              <a:rPr lang="en-US" sz="1800" dirty="0" spc="2" kern="0">
+              <a:rPr lang="en-US" sz="1800" dirty="0" spc="4" kern="0">
                 <a:solidFill>
                   <a:srgbClr val="6B6A66"/>
                 </a:solidFill>
@@ -16067,7 +17582,7 @@
                 <a:ea typeface="Be Vietnam Pro" pitchFamily="34" charset="-122"/>
                 <a:cs typeface="Be Vietnam Pro" pitchFamily="34" charset="-120"/>
               </a:rPr>
-              <a:t> 04/17</a:t>
+              <a:t> 04/18</a:t>
             </a:r>
             <a:endParaRPr lang="en-US" sz="1800" dirty="0"/>
           </a:p>
@@ -16075,7 +17590,7 @@
       </p:sp>
       <p:sp>
         <p:nvSpPr>
-          <p:cNvPr id="24" name="Shape 22"/>
+          <p:cNvPr id="25" name="Shape 23"/>
           <p:cNvSpPr/>
           <p:nvPr/>
         </p:nvSpPr>
@@ -16099,7 +17614,7 @@
       </p:sp>
       <p:pic>
         <p:nvPicPr>
-          <p:cNvPr id="25" name="Moda image moda-export-watermark-bf716935-12b8-48ad-93b4-0f5a3405eb42" descr="">    </p:cNvPr>
+          <p:cNvPr id="26" name="Moda image moda-export-watermark-ad3fa212-e699-470e-9c82-30a09702e857" descr="">    </p:cNvPr>
           <p:cNvPicPr>
             <a:picLocks noChangeAspect="1"/>
           </p:cNvPicPr>
@@ -17136,13 +18651,35 @@
       </p:sp>
       <p:sp>
         <p:nvSpPr>
-          <p:cNvPr id="32" name="Text 30"/>
-          <p:cNvSpPr/>
-          <p:nvPr/>
-        </p:nvSpPr>
-        <p:spPr>
-          <a:xfrm>
-            <a:off x="5029200" y="9467850"/>
+          <p:cNvPr id="32" name="Shape 30"/>
+          <p:cNvSpPr/>
+          <p:nvPr/>
+        </p:nvSpPr>
+        <p:spPr>
+          <a:xfrm>
+            <a:off x="4829175" y="9563100"/>
+            <a:ext cx="114300" cy="114300"/>
+          </a:xfrm>
+          <a:prstGeom prst="ellipse">
+            <a:avLst/>
+          </a:prstGeom>
+          <a:solidFill>
+            <a:srgbClr val="F3EEE3">
+              <a:alpha val="28000"/>
+            </a:srgbClr>
+          </a:solidFill>
+          <a:ln/>
+        </p:spPr>
+      </p:sp>
+      <p:sp>
+        <p:nvSpPr>
+          <p:cNvPr id="33" name="Text 31"/>
+          <p:cNvSpPr/>
+          <p:nvPr/>
+        </p:nvSpPr>
+        <p:spPr>
+          <a:xfrm>
+            <a:off x="5257800" y="9467850"/>
             <a:ext cx="6667500" cy="304800"/>
           </a:xfrm>
           <a:prstGeom prst="rect">
@@ -17203,7 +18740,7 @@
               <a:t> ·</a:t>
             </a:r>
             <a:r>
-              <a:rPr lang="en-US" sz="1800" dirty="0" spc="2" kern="0">
+              <a:rPr lang="en-US" sz="1800" dirty="0" spc="3" kern="0">
                 <a:solidFill>
                   <a:srgbClr val="9AA0B5"/>
                 </a:solidFill>
@@ -17211,7 +18748,7 @@
                 <a:ea typeface="Be Vietnam Pro" pitchFamily="34" charset="-122"/>
                 <a:cs typeface="Be Vietnam Pro" pitchFamily="34" charset="-120"/>
               </a:rPr>
-              <a:t> 05/17</a:t>
+              <a:t> 05/18</a:t>
             </a:r>
             <a:endParaRPr lang="en-US" sz="1800" dirty="0"/>
           </a:p>
@@ -17219,7 +18756,7 @@
       </p:sp>
       <p:sp>
         <p:nvSpPr>
-          <p:cNvPr id="33" name="Shape 31"/>
+          <p:cNvPr id="34" name="Shape 32"/>
           <p:cNvSpPr/>
           <p:nvPr/>
         </p:nvSpPr>
@@ -17243,7 +18780,7 @@
       </p:sp>
       <p:pic>
         <p:nvPicPr>
-          <p:cNvPr id="34" name="Moda image moda-export-watermark-5e680ea1-dac9-4b27-af50-ef9a80f3826a" descr="">    </p:cNvPr>
+          <p:cNvPr id="35" name="Moda image moda-export-watermark-e6e71163-497a-45c6-ac9e-7fcd6f00879e" descr="">    </p:cNvPr>
           <p:cNvPicPr>
             <a:picLocks noChangeAspect="1"/>
           </p:cNvPicPr>
@@ -17340,7 +18877,7 @@
       </p:sp>
       <p:sp>
         <p:nvSpPr>
-          <p:cNvPr id="3" name="Connector line-1792502845394-704060060"/>
+          <p:cNvPr id="3" name="Connector line-1792504672242-435475425"/>
           <p:cNvSpPr/>
           <p:nvPr/>
         </p:nvSpPr>
@@ -17365,7 +18902,7 @@
       </p:sp>
       <p:sp>
         <p:nvSpPr>
-          <p:cNvPr id="4" name="Connector line-1792502845395-255094615"/>
+          <p:cNvPr id="4" name="Connector line-1792504672242-263813267"/>
           <p:cNvSpPr/>
           <p:nvPr/>
         </p:nvSpPr>
@@ -17390,7 +18927,7 @@
       </p:sp>
       <p:sp>
         <p:nvSpPr>
-          <p:cNvPr id="5" name="Connector line-1792502845395-891996391"/>
+          <p:cNvPr id="5" name="Connector line-1792504672242-284194516"/>
           <p:cNvSpPr/>
           <p:nvPr/>
         </p:nvSpPr>
@@ -18161,13 +19698,35 @@
       </p:sp>
       <p:sp>
         <p:nvSpPr>
-          <p:cNvPr id="32" name="Text 30"/>
-          <p:cNvSpPr/>
-          <p:nvPr/>
-        </p:nvSpPr>
-        <p:spPr>
-          <a:xfrm>
-            <a:off x="5029200" y="9467850"/>
+          <p:cNvPr id="32" name="Shape 30"/>
+          <p:cNvSpPr/>
+          <p:nvPr/>
+        </p:nvSpPr>
+        <p:spPr>
+          <a:xfrm>
+            <a:off x="4829175" y="9563100"/>
+            <a:ext cx="114300" cy="114300"/>
+          </a:xfrm>
+          <a:prstGeom prst="ellipse">
+            <a:avLst/>
+          </a:prstGeom>
+          <a:solidFill>
+            <a:srgbClr val="14161C">
+              <a:alpha val="28000"/>
+            </a:srgbClr>
+          </a:solidFill>
+          <a:ln/>
+        </p:spPr>
+      </p:sp>
+      <p:sp>
+        <p:nvSpPr>
+          <p:cNvPr id="33" name="Text 31"/>
+          <p:cNvSpPr/>
+          <p:nvPr/>
+        </p:nvSpPr>
+        <p:spPr>
+          <a:xfrm>
+            <a:off x="5257800" y="9467850"/>
             <a:ext cx="6667500" cy="304800"/>
           </a:xfrm>
           <a:prstGeom prst="rect">
@@ -18228,7 +19787,7 @@
               <a:t> ·</a:t>
             </a:r>
             <a:r>
-              <a:rPr lang="en-US" sz="1800" dirty="0" spc="2" kern="0">
+              <a:rPr lang="en-US" sz="1800" dirty="0" spc="3" kern="0">
                 <a:solidFill>
                   <a:srgbClr val="6B6A66"/>
                 </a:solidFill>
@@ -18236,7 +19795,7 @@
                 <a:ea typeface="Be Vietnam Pro" pitchFamily="34" charset="-122"/>
                 <a:cs typeface="Be Vietnam Pro" pitchFamily="34" charset="-120"/>
               </a:rPr>
-              <a:t> 06/17</a:t>
+              <a:t> 06/18</a:t>
             </a:r>
             <a:endParaRPr lang="en-US" sz="1800" dirty="0"/>
           </a:p>
@@ -18244,7 +19803,7 @@
       </p:sp>
       <p:sp>
         <p:nvSpPr>
-          <p:cNvPr id="33" name="Shape 31"/>
+          <p:cNvPr id="34" name="Shape 32"/>
           <p:cNvSpPr/>
           <p:nvPr/>
         </p:nvSpPr>
@@ -18268,7 +19827,7 @@
       </p:sp>
       <p:pic>
         <p:nvPicPr>
-          <p:cNvPr id="34" name="Moda image moda-export-watermark-d772769f-a9b9-49c2-b624-5691b4458060" descr="">    </p:cNvPr>
+          <p:cNvPr id="35" name="Moda image moda-export-watermark-bad1c3fa-f5c5-497f-8a68-9cc87a669c70" descr="">    </p:cNvPr>
           <p:cNvPicPr>
             <a:picLocks noChangeAspect="1"/>
           </p:cNvPicPr>
@@ -19206,13 +20765,35 @@
       </p:sp>
       <p:sp>
         <p:nvSpPr>
-          <p:cNvPr id="33" name="Text 31"/>
-          <p:cNvSpPr/>
-          <p:nvPr/>
-        </p:nvSpPr>
-        <p:spPr>
-          <a:xfrm>
-            <a:off x="5029200" y="9467850"/>
+          <p:cNvPr id="33" name="Shape 31"/>
+          <p:cNvSpPr/>
+          <p:nvPr/>
+        </p:nvSpPr>
+        <p:spPr>
+          <a:xfrm>
+            <a:off x="4829175" y="9563100"/>
+            <a:ext cx="114300" cy="114300"/>
+          </a:xfrm>
+          <a:prstGeom prst="ellipse">
+            <a:avLst/>
+          </a:prstGeom>
+          <a:solidFill>
+            <a:srgbClr val="F3EEE3">
+              <a:alpha val="28000"/>
+            </a:srgbClr>
+          </a:solidFill>
+          <a:ln/>
+        </p:spPr>
+      </p:sp>
+      <p:sp>
+        <p:nvSpPr>
+          <p:cNvPr id="34" name="Text 32"/>
+          <p:cNvSpPr/>
+          <p:nvPr/>
+        </p:nvSpPr>
+        <p:spPr>
+          <a:xfrm>
+            <a:off x="5257800" y="9467850"/>
             <a:ext cx="6667500" cy="304800"/>
           </a:xfrm>
           <a:prstGeom prst="rect">
@@ -19273,7 +20854,7 @@
               <a:t> ·</a:t>
             </a:r>
             <a:r>
-              <a:rPr lang="en-US" sz="1800" dirty="0" spc="-14" kern="0">
+              <a:rPr lang="en-US" sz="1800" dirty="0" spc="-13" kern="0">
                 <a:solidFill>
                   <a:srgbClr val="9AA0B5"/>
                 </a:solidFill>
@@ -19281,7 +20862,7 @@
                 <a:ea typeface="Be Vietnam Pro" pitchFamily="34" charset="-122"/>
                 <a:cs typeface="Be Vietnam Pro" pitchFamily="34" charset="-120"/>
               </a:rPr>
-              <a:t> 07/17</a:t>
+              <a:t> 07/18</a:t>
             </a:r>
             <a:endParaRPr lang="en-US" sz="1800" dirty="0"/>
           </a:p>
@@ -19289,7 +20870,7 @@
       </p:sp>
       <p:sp>
         <p:nvSpPr>
-          <p:cNvPr id="34" name="Shape 32"/>
+          <p:cNvPr id="35" name="Shape 33"/>
           <p:cNvSpPr/>
           <p:nvPr/>
         </p:nvSpPr>
@@ -19313,7 +20894,7 @@
       </p:sp>
       <p:pic>
         <p:nvPicPr>
-          <p:cNvPr id="35" name="Moda image moda-export-watermark-b571e6aa-586e-4361-b545-3813856537de" descr="">    </p:cNvPr>
+          <p:cNvPr id="36" name="Moda image moda-export-watermark-298732ea-1f2c-4b6c-8e55-1be09ae788eb" descr="">    </p:cNvPr>
           <p:cNvPicPr>
             <a:picLocks noChangeAspect="1"/>
           </p:cNvPicPr>
@@ -19394,7 +20975,7 @@
               <a:buNone/>
             </a:pPr>
             <a:r>
-              <a:rPr lang="en-US" sz="5700" dirty="0" spc="-11" kern="0">
+              <a:rPr lang="en-US" sz="5700" dirty="0" spc="0" kern="0">
                 <a:solidFill>
                   <a:srgbClr val="14161C"/>
                 </a:solidFill>
@@ -19402,7 +20983,51 @@
                 <a:ea typeface="Bricolage Grotesque ExtraBold" pitchFamily="34" charset="-122"/>
                 <a:cs typeface="Bricolage Grotesque ExtraBold" pitchFamily="34" charset="-120"/>
               </a:rPr>
-              <a:t>Noradrenaline</a:t>
+              <a:t>Thuốc</a:t>
+            </a:r>
+            <a:r>
+              <a:rPr lang="en-US" sz="5700" dirty="0" spc="-8" kern="0">
+                <a:solidFill>
+                  <a:srgbClr val="14161C"/>
+                </a:solidFill>
+                <a:latin typeface="Bricolage Grotesque ExtraBold" pitchFamily="34" charset="0"/>
+                <a:ea typeface="Bricolage Grotesque ExtraBold" pitchFamily="34" charset="-122"/>
+                <a:cs typeface="Bricolage Grotesque ExtraBold" pitchFamily="34" charset="-120"/>
+              </a:rPr>
+              <a:t> tác</a:t>
+            </a:r>
+            <a:r>
+              <a:rPr lang="en-US" sz="5700" dirty="0" spc="8" kern="0">
+                <a:solidFill>
+                  <a:srgbClr val="14161C"/>
+                </a:solidFill>
+                <a:latin typeface="Bricolage Grotesque ExtraBold" pitchFamily="34" charset="0"/>
+                <a:ea typeface="Bricolage Grotesque ExtraBold" pitchFamily="34" charset="-122"/>
+                <a:cs typeface="Bricolage Grotesque ExtraBold" pitchFamily="34" charset="-120"/>
+              </a:rPr>
+              <a:t> động</a:t>
+            </a:r>
+            <a:r>
+              <a:rPr lang="en-US" sz="5700" dirty="0" spc="-8" kern="0">
+                <a:solidFill>
+                  <a:srgbClr val="14161C"/>
+                </a:solidFill>
+                <a:latin typeface="Bricolage Grotesque ExtraBold" pitchFamily="34" charset="0"/>
+                <a:ea typeface="Bricolage Grotesque ExtraBold" pitchFamily="34" charset="-122"/>
+                <a:cs typeface="Bricolage Grotesque ExtraBold" pitchFamily="34" charset="-120"/>
+              </a:rPr>
+              <a:t> tại</a:t>
+            </a:r>
+            <a:r>
+              <a:rPr lang="en-US" sz="5700" dirty="0" spc="-3" kern="0">
+                <a:solidFill>
+                  <a:srgbClr val="14161C"/>
+                </a:solidFill>
+                <a:latin typeface="Bricolage Grotesque ExtraBold" pitchFamily="34" charset="0"/>
+                <a:ea typeface="Bricolage Grotesque ExtraBold" pitchFamily="34" charset="-122"/>
+                <a:cs typeface="Bricolage Grotesque ExtraBold" pitchFamily="34" charset="-120"/>
+              </a:rPr>
+              <a:t> synapse</a:t>
             </a:r>
             <a:endParaRPr lang="en-US" sz="5700" dirty="0"/>
           </a:p>
@@ -19410,14 +21035,108 @@
       </p:sp>
       <p:sp>
         <p:nvSpPr>
-          <p:cNvPr id="3" name="Text 1"/>
-          <p:cNvSpPr/>
-          <p:nvPr/>
-        </p:nvSpPr>
-        <p:spPr>
-          <a:xfrm>
-            <a:off x="914400" y="2667000"/>
-            <a:ext cx="1619250" cy="1428750"/>
+          <p:cNvPr id="3" name="Shape 1"/>
+          <p:cNvSpPr/>
+          <p:nvPr/>
+        </p:nvSpPr>
+        <p:spPr>
+          <a:xfrm>
+            <a:off x="914400" y="2247900"/>
+            <a:ext cx="10096500" cy="6096000"/>
+          </a:xfrm>
+          <a:prstGeom prst="roundRect">
+            <a:avLst>
+              <a:gd name="adj" fmla="val 4375"/>
+            </a:avLst>
+          </a:prstGeom>
+          <a:solidFill>
+            <a:srgbClr val="FFFFFF"/>
+          </a:solidFill>
+          <a:ln w="28575">
+            <a:solidFill>
+              <a:srgbClr val="DDD5C1"/>
+            </a:solidFill>
+            <a:prstDash val="solid"/>
+          </a:ln>
+        </p:spPr>
+      </p:sp>
+      <p:pic>
+        <p:nvPicPr>
+          <p:cNvPr id="4" name="Moda image rect-1792504709289-611689730" descr="">    </p:cNvPr>
+          <p:cNvPicPr>
+            <a:picLocks noChangeAspect="1"/>
+          </p:cNvPicPr>
+          <p:nvPr/>
+        </p:nvPicPr>
+        <p:blipFill>
+          <a:blip r:embed="rId1"/>
+          <a:srcRect l="0" r="0" t="0" b="0"/>
+          <a:stretch/>
+        </p:blipFill>
+        <p:spPr>
+          <a:xfrm>
+            <a:off x="3328392" y="2438400"/>
+            <a:ext cx="5268516" cy="5715000"/>
+          </a:xfrm>
+          <a:prstGeom prst="rect">
+            <a:avLst/>
+          </a:prstGeom>
+        </p:spPr>
+      </p:pic>
+      <p:sp>
+        <p:nvSpPr>
+          <p:cNvPr id="5" name="Shape 2"/>
+          <p:cNvSpPr/>
+          <p:nvPr/>
+        </p:nvSpPr>
+        <p:spPr>
+          <a:xfrm>
+            <a:off x="11391900" y="2247900"/>
+            <a:ext cx="5981700" cy="1428750"/>
+          </a:xfrm>
+          <a:prstGeom prst="roundRect">
+            <a:avLst>
+              <a:gd name="adj" fmla="val 13333"/>
+            </a:avLst>
+          </a:prstGeom>
+          <a:solidFill>
+            <a:srgbClr val="E8E0CF"/>
+          </a:solidFill>
+          <a:ln/>
+        </p:spPr>
+      </p:sp>
+      <p:sp>
+        <p:nvSpPr>
+          <p:cNvPr id="6" name="Shape 3"/>
+          <p:cNvSpPr/>
+          <p:nvPr/>
+        </p:nvSpPr>
+        <p:spPr>
+          <a:xfrm>
+            <a:off x="11391900" y="2247900"/>
+            <a:ext cx="114300" cy="1428750"/>
+          </a:xfrm>
+          <a:prstGeom prst="roundRect">
+            <a:avLst>
+              <a:gd name="adj" fmla="val 50000"/>
+            </a:avLst>
+          </a:prstGeom>
+          <a:solidFill>
+            <a:srgbClr val="0F766E"/>
+          </a:solidFill>
+          <a:ln/>
+        </p:spPr>
+      </p:sp>
+      <p:sp>
+        <p:nvSpPr>
+          <p:cNvPr id="7" name="Text 4"/>
+          <p:cNvSpPr/>
+          <p:nvPr/>
+        </p:nvSpPr>
+        <p:spPr>
+          <a:xfrm>
+            <a:off x="11734800" y="2381250"/>
+            <a:ext cx="5448300" cy="542925"/>
           </a:xfrm>
           <a:prstGeom prst="rect">
             <a:avLst/>
@@ -19433,34 +21152,98 @@
               <a:buNone/>
             </a:pPr>
             <a:r>
-              <a:rPr lang="en-US" sz="8700" dirty="0" spc="-3" kern="0">
-                <a:solidFill>
-                  <a:srgbClr val="E8472B"/>
-                </a:solidFill>
-                <a:latin typeface="Bricolage Grotesque ExtraBold" pitchFamily="34" charset="0"/>
-                <a:ea typeface="Bricolage Grotesque ExtraBold" pitchFamily="34" charset="-122"/>
-                <a:cs typeface="Bricolage Grotesque ExtraBold" pitchFamily="34" charset="-120"/>
-              </a:rPr>
-              <a:t>1</a:t>
-            </a:r>
-            <a:endParaRPr lang="en-US" sz="8700" dirty="0"/>
+              <a:rPr lang="en-US" sz="2250" dirty="0" spc="-4" kern="0">
+                <a:solidFill>
+                  <a:srgbClr val="0F766E"/>
+                </a:solidFill>
+                <a:latin typeface="Be Vietnam Pro ExtraBold" pitchFamily="34" charset="0"/>
+                <a:ea typeface="Be Vietnam Pro ExtraBold" pitchFamily="34" charset="-122"/>
+                <a:cs typeface="Be Vietnam Pro ExtraBold" pitchFamily="34" charset="-120"/>
+              </a:rPr>
+              <a:t>Neurotransmitter</a:t>
+            </a:r>
+            <a:endParaRPr lang="en-US" sz="2250" dirty="0"/>
           </a:p>
         </p:txBody>
       </p:sp>
       <p:sp>
         <p:nvSpPr>
-          <p:cNvPr id="4" name="Shape 2"/>
-          <p:cNvSpPr/>
-          <p:nvPr/>
-        </p:nvSpPr>
-        <p:spPr>
-          <a:xfrm>
-            <a:off x="2724150" y="2762250"/>
-            <a:ext cx="14649450" cy="1238250"/>
+          <p:cNvPr id="8" name="Text 5"/>
+          <p:cNvSpPr/>
+          <p:nvPr/>
+        </p:nvSpPr>
+        <p:spPr>
+          <a:xfrm>
+            <a:off x="11734800" y="2819400"/>
+            <a:ext cx="5448300" cy="781050"/>
+          </a:xfrm>
+          <a:prstGeom prst="rect">
+            <a:avLst/>
+          </a:prstGeom>
+          <a:noFill/>
+          <a:ln/>
+        </p:spPr>
+        <p:txBody>
+          <a:bodyPr wrap="square" lIns="0" tIns="14180" rIns="0" bIns="-14180" rtlCol="0" anchor="ctr"/>
+          <a:lstStyle/>
+          <a:p>
+            <a:pPr algn="l" indent="0" marL="0">
+              <a:lnSpc>
+                <a:spcPts val="2933"/>
+              </a:lnSpc>
+              <a:buNone/>
+            </a:pPr>
+            <a:r>
+              <a:rPr lang="en-US" sz="2550" dirty="0" spc="-11" kern="0">
+                <a:solidFill>
+                  <a:srgbClr val="14161C"/>
+                </a:solidFill>
+                <a:latin typeface="Be Vietnam Pro SemiBold" pitchFamily="34" charset="0"/>
+                <a:ea typeface="Be Vietnam Pro SemiBold" pitchFamily="34" charset="-122"/>
+                <a:cs typeface="Be Vietnam Pro SemiBold" pitchFamily="34" charset="-120"/>
+              </a:rPr>
+              <a:t>chất</a:t>
+            </a:r>
+            <a:r>
+              <a:rPr lang="en-US" sz="2550" dirty="0" spc="-1" kern="0">
+                <a:solidFill>
+                  <a:srgbClr val="14161C"/>
+                </a:solidFill>
+                <a:latin typeface="Be Vietnam Pro SemiBold" pitchFamily="34" charset="0"/>
+                <a:ea typeface="Be Vietnam Pro SemiBold" pitchFamily="34" charset="-122"/>
+                <a:cs typeface="Be Vietnam Pro SemiBold" pitchFamily="34" charset="-120"/>
+              </a:rPr>
+              <a:t> dẫn</a:t>
+            </a:r>
+            <a:r>
+              <a:rPr lang="en-US" sz="2550" dirty="0" spc="-14" kern="0">
+                <a:solidFill>
+                  <a:srgbClr val="14161C"/>
+                </a:solidFill>
+                <a:latin typeface="Be Vietnam Pro SemiBold" pitchFamily="34" charset="0"/>
+                <a:ea typeface="Be Vietnam Pro SemiBold" pitchFamily="34" charset="-122"/>
+                <a:cs typeface="Be Vietnam Pro SemiBold" pitchFamily="34" charset="-120"/>
+              </a:rPr>
+              <a:t> truyền</a:t>
+            </a:r>
+            <a:endParaRPr lang="en-US" sz="2550" dirty="0"/>
+          </a:p>
+        </p:txBody>
+      </p:sp>
+      <p:sp>
+        <p:nvSpPr>
+          <p:cNvPr id="9" name="Shape 6"/>
+          <p:cNvSpPr/>
+          <p:nvPr/>
+        </p:nvSpPr>
+        <p:spPr>
+          <a:xfrm>
+            <a:off x="11391900" y="3905250"/>
+            <a:ext cx="5981700" cy="1428750"/>
           </a:xfrm>
           <a:prstGeom prst="roundRect">
             <a:avLst>
-              <a:gd name="adj" fmla="val 15385"/>
+              <a:gd name="adj" fmla="val 13333"/>
             </a:avLst>
           </a:prstGeom>
           <a:solidFill>
@@ -19471,14 +21254,36 @@
       </p:sp>
       <p:sp>
         <p:nvSpPr>
-          <p:cNvPr id="5" name="Text 3"/>
-          <p:cNvSpPr/>
-          <p:nvPr/>
-        </p:nvSpPr>
-        <p:spPr>
-          <a:xfrm>
-            <a:off x="3105150" y="2762250"/>
-            <a:ext cx="14001750" cy="1238250"/>
+          <p:cNvPr id="10" name="Shape 7"/>
+          <p:cNvSpPr/>
+          <p:nvPr/>
+        </p:nvSpPr>
+        <p:spPr>
+          <a:xfrm>
+            <a:off x="11391900" y="3905250"/>
+            <a:ext cx="114300" cy="1428750"/>
+          </a:xfrm>
+          <a:prstGeom prst="roundRect">
+            <a:avLst>
+              <a:gd name="adj" fmla="val 50000"/>
+            </a:avLst>
+          </a:prstGeom>
+          <a:solidFill>
+            <a:srgbClr val="E8472B"/>
+          </a:solidFill>
+          <a:ln/>
+        </p:spPr>
+      </p:sp>
+      <p:sp>
+        <p:nvSpPr>
+          <p:cNvPr id="11" name="Text 8"/>
+          <p:cNvSpPr/>
+          <p:nvPr/>
+        </p:nvSpPr>
+        <p:spPr>
+          <a:xfrm>
+            <a:off x="11734800" y="4038600"/>
+            <a:ext cx="5448300" cy="542925"/>
           </a:xfrm>
           <a:prstGeom prst="rect">
             <a:avLst/>
@@ -19494,7 +21299,60 @@
               <a:buNone/>
             </a:pPr>
             <a:r>
-              <a:rPr lang="en-US" sz="3000" dirty="0" spc="-3" kern="0">
+              <a:rPr lang="en-US" sz="2250" dirty="0" spc="-24" kern="0">
+                <a:solidFill>
+                  <a:srgbClr val="E8472B"/>
+                </a:solidFill>
+                <a:latin typeface="Be Vietnam Pro ExtraBold" pitchFamily="34" charset="0"/>
+                <a:ea typeface="Be Vietnam Pro ExtraBold" pitchFamily="34" charset="-122"/>
+                <a:cs typeface="Be Vietnam Pro ExtraBold" pitchFamily="34" charset="-120"/>
+              </a:rPr>
+              <a:t>Reuptake</a:t>
+            </a:r>
+            <a:r>
+              <a:rPr lang="en-US" sz="2250" dirty="0" spc="-9" kern="0">
+                <a:solidFill>
+                  <a:srgbClr val="E8472B"/>
+                </a:solidFill>
+                <a:latin typeface="Be Vietnam Pro ExtraBold" pitchFamily="34" charset="0"/>
+                <a:ea typeface="Be Vietnam Pro ExtraBold" pitchFamily="34" charset="-122"/>
+                <a:cs typeface="Be Vietnam Pro ExtraBold" pitchFamily="34" charset="-120"/>
+              </a:rPr>
+              <a:t> receptor</a:t>
+            </a:r>
+            <a:endParaRPr lang="en-US" sz="2250" dirty="0"/>
+          </a:p>
+        </p:txBody>
+      </p:sp>
+      <p:sp>
+        <p:nvSpPr>
+          <p:cNvPr id="12" name="Text 9"/>
+          <p:cNvSpPr/>
+          <p:nvPr/>
+        </p:nvSpPr>
+        <p:spPr>
+          <a:xfrm>
+            <a:off x="11734800" y="4476750"/>
+            <a:ext cx="5448300" cy="781050"/>
+          </a:xfrm>
+          <a:prstGeom prst="rect">
+            <a:avLst/>
+          </a:prstGeom>
+          <a:noFill/>
+          <a:ln/>
+        </p:spPr>
+        <p:txBody>
+          <a:bodyPr wrap="square" lIns="0" tIns="14180" rIns="0" bIns="-14180" rtlCol="0" anchor="ctr"/>
+          <a:lstStyle/>
+          <a:p>
+            <a:pPr algn="l" indent="0" marL="0">
+              <a:lnSpc>
+                <a:spcPts val="2933"/>
+              </a:lnSpc>
+              <a:buNone/>
+            </a:pPr>
+            <a:r>
+              <a:rPr lang="en-US" sz="2550" dirty="0" spc="0" kern="0">
                 <a:solidFill>
                   <a:srgbClr val="14161C"/>
                 </a:solidFill>
@@ -19502,22 +21360,88 @@
                 <a:ea typeface="Be Vietnam Pro SemiBold" pitchFamily="34" charset="-122"/>
                 <a:cs typeface="Be Vietnam Pro SemiBold" pitchFamily="34" charset="-120"/>
               </a:rPr>
-              <a:t>Tỉnh táo</a:t>
-            </a:r>
-            <a:endParaRPr lang="en-US" sz="3000" dirty="0"/>
+              <a:t>thụ</a:t>
+            </a:r>
+            <a:r>
+              <a:rPr lang="en-US" sz="2550" dirty="0" spc="-2" kern="0">
+                <a:solidFill>
+                  <a:srgbClr val="14161C"/>
+                </a:solidFill>
+                <a:latin typeface="Be Vietnam Pro SemiBold" pitchFamily="34" charset="0"/>
+                <a:ea typeface="Be Vietnam Pro SemiBold" pitchFamily="34" charset="-122"/>
+                <a:cs typeface="Be Vietnam Pro SemiBold" pitchFamily="34" charset="-120"/>
+              </a:rPr>
+              <a:t> thể thu</a:t>
+            </a:r>
+            <a:r>
+              <a:rPr lang="en-US" sz="2550" dirty="0" spc="-1" kern="0">
+                <a:solidFill>
+                  <a:srgbClr val="14161C"/>
+                </a:solidFill>
+                <a:latin typeface="Be Vietnam Pro SemiBold" pitchFamily="34" charset="0"/>
+                <a:ea typeface="Be Vietnam Pro SemiBold" pitchFamily="34" charset="-122"/>
+                <a:cs typeface="Be Vietnam Pro SemiBold" pitchFamily="34" charset="-120"/>
+              </a:rPr>
+              <a:t> hồi</a:t>
+            </a:r>
+            <a:endParaRPr lang="en-US" sz="2550" dirty="0"/>
           </a:p>
         </p:txBody>
       </p:sp>
       <p:sp>
         <p:nvSpPr>
-          <p:cNvPr id="6" name="Text 4"/>
-          <p:cNvSpPr/>
-          <p:nvPr/>
-        </p:nvSpPr>
-        <p:spPr>
-          <a:xfrm>
-            <a:off x="914400" y="4210050"/>
-            <a:ext cx="1619250" cy="1428750"/>
+          <p:cNvPr id="13" name="Shape 10"/>
+          <p:cNvSpPr/>
+          <p:nvPr/>
+        </p:nvSpPr>
+        <p:spPr>
+          <a:xfrm>
+            <a:off x="11391900" y="5562600"/>
+            <a:ext cx="5981700" cy="1428750"/>
+          </a:xfrm>
+          <a:prstGeom prst="roundRect">
+            <a:avLst>
+              <a:gd name="adj" fmla="val 13333"/>
+            </a:avLst>
+          </a:prstGeom>
+          <a:solidFill>
+            <a:srgbClr val="E8E0CF"/>
+          </a:solidFill>
+          <a:ln/>
+        </p:spPr>
+      </p:sp>
+      <p:sp>
+        <p:nvSpPr>
+          <p:cNvPr id="14" name="Shape 11"/>
+          <p:cNvSpPr/>
+          <p:nvPr/>
+        </p:nvSpPr>
+        <p:spPr>
+          <a:xfrm>
+            <a:off x="11391900" y="5562600"/>
+            <a:ext cx="114300" cy="1428750"/>
+          </a:xfrm>
+          <a:prstGeom prst="roundRect">
+            <a:avLst>
+              <a:gd name="adj" fmla="val 50000"/>
+            </a:avLst>
+          </a:prstGeom>
+          <a:solidFill>
+            <a:srgbClr val="1F3FD1"/>
+          </a:solidFill>
+          <a:ln/>
+        </p:spPr>
+      </p:sp>
+      <p:sp>
+        <p:nvSpPr>
+          <p:cNvPr id="15" name="Text 12"/>
+          <p:cNvSpPr/>
+          <p:nvPr/>
+        </p:nvSpPr>
+        <p:spPr>
+          <a:xfrm>
+            <a:off x="11734800" y="5695950"/>
+            <a:ext cx="5448300" cy="542925"/>
           </a:xfrm>
           <a:prstGeom prst="rect">
             <a:avLst/>
@@ -19533,52 +21457,127 @@
               <a:buNone/>
             </a:pPr>
             <a:r>
-              <a:rPr lang="en-US" sz="8700" dirty="0" spc="6" kern="0">
+              <a:rPr lang="en-US" sz="2250" dirty="0" spc="-24" kern="0">
                 <a:solidFill>
                   <a:srgbClr val="1F3FD1"/>
                 </a:solidFill>
-                <a:latin typeface="Bricolage Grotesque ExtraBold" pitchFamily="34" charset="0"/>
-                <a:ea typeface="Bricolage Grotesque ExtraBold" pitchFamily="34" charset="-122"/>
-                <a:cs typeface="Bricolage Grotesque ExtraBold" pitchFamily="34" charset="-120"/>
-              </a:rPr>
-              <a:t>2</a:t>
-            </a:r>
-            <a:endParaRPr lang="en-US" sz="8700" dirty="0"/>
+                <a:latin typeface="Be Vietnam Pro ExtraBold" pitchFamily="34" charset="0"/>
+                <a:ea typeface="Be Vietnam Pro ExtraBold" pitchFamily="34" charset="-122"/>
+                <a:cs typeface="Be Vietnam Pro ExtraBold" pitchFamily="34" charset="-120"/>
+              </a:rPr>
+              <a:t>Reuptake</a:t>
+            </a:r>
+            <a:r>
+              <a:rPr lang="en-US" sz="2250" dirty="0" spc="1" kern="0">
+                <a:solidFill>
+                  <a:srgbClr val="1F3FD1"/>
+                </a:solidFill>
+                <a:latin typeface="Be Vietnam Pro ExtraBold" pitchFamily="34" charset="0"/>
+                <a:ea typeface="Be Vietnam Pro ExtraBold" pitchFamily="34" charset="-122"/>
+                <a:cs typeface="Be Vietnam Pro ExtraBold" pitchFamily="34" charset="-120"/>
+              </a:rPr>
+              <a:t> inhibitor</a:t>
+            </a:r>
+            <a:endParaRPr lang="en-US" sz="2250" dirty="0"/>
           </a:p>
         </p:txBody>
       </p:sp>
       <p:sp>
         <p:nvSpPr>
-          <p:cNvPr id="7" name="Shape 5"/>
-          <p:cNvSpPr/>
-          <p:nvPr/>
-        </p:nvSpPr>
-        <p:spPr>
-          <a:xfrm>
-            <a:off x="2724150" y="4305300"/>
-            <a:ext cx="14649450" cy="1238250"/>
-          </a:xfrm>
-          <a:prstGeom prst="roundRect">
-            <a:avLst>
-              <a:gd name="adj" fmla="val 15385"/>
-            </a:avLst>
-          </a:prstGeom>
-          <a:solidFill>
-            <a:srgbClr val="E8E0CF"/>
-          </a:solidFill>
-          <a:ln/>
-        </p:spPr>
-      </p:sp>
-      <p:sp>
-        <p:nvSpPr>
-          <p:cNvPr id="8" name="Text 6"/>
-          <p:cNvSpPr/>
-          <p:nvPr/>
-        </p:nvSpPr>
-        <p:spPr>
-          <a:xfrm>
-            <a:off x="3105150" y="4305300"/>
-            <a:ext cx="14001750" cy="1238250"/>
+          <p:cNvPr id="16" name="Text 13"/>
+          <p:cNvSpPr/>
+          <p:nvPr/>
+        </p:nvSpPr>
+        <p:spPr>
+          <a:xfrm>
+            <a:off x="11734800" y="6134100"/>
+            <a:ext cx="5448300" cy="781050"/>
+          </a:xfrm>
+          <a:prstGeom prst="rect">
+            <a:avLst/>
+          </a:prstGeom>
+          <a:noFill/>
+          <a:ln/>
+        </p:spPr>
+        <p:txBody>
+          <a:bodyPr wrap="square" lIns="0" tIns="14180" rIns="0" bIns="-14180" rtlCol="0" anchor="ctr"/>
+          <a:lstStyle/>
+          <a:p>
+            <a:pPr algn="l" indent="0" marL="0">
+              <a:lnSpc>
+                <a:spcPts val="2933"/>
+              </a:lnSpc>
+              <a:buNone/>
+            </a:pPr>
+            <a:r>
+              <a:rPr lang="en-US" sz="2550" dirty="0" spc="-11" kern="0">
+                <a:solidFill>
+                  <a:srgbClr val="14161C"/>
+                </a:solidFill>
+                <a:latin typeface="Be Vietnam Pro SemiBold" pitchFamily="34" charset="0"/>
+                <a:ea typeface="Be Vietnam Pro SemiBold" pitchFamily="34" charset="-122"/>
+                <a:cs typeface="Be Vietnam Pro SemiBold" pitchFamily="34" charset="-120"/>
+              </a:rPr>
+              <a:t>chất</a:t>
+            </a:r>
+            <a:r>
+              <a:rPr lang="en-US" sz="2550" dirty="0" spc="18" kern="0">
+                <a:solidFill>
+                  <a:srgbClr val="14161C"/>
+                </a:solidFill>
+                <a:latin typeface="Be Vietnam Pro SemiBold" pitchFamily="34" charset="0"/>
+                <a:ea typeface="Be Vietnam Pro SemiBold" pitchFamily="34" charset="-122"/>
+                <a:cs typeface="Be Vietnam Pro SemiBold" pitchFamily="34" charset="-120"/>
+              </a:rPr>
+              <a:t> ức</a:t>
+            </a:r>
+            <a:r>
+              <a:rPr lang="en-US" sz="2550" dirty="0" spc="0" kern="0">
+                <a:solidFill>
+                  <a:srgbClr val="14161C"/>
+                </a:solidFill>
+                <a:latin typeface="Be Vietnam Pro SemiBold" pitchFamily="34" charset="0"/>
+                <a:ea typeface="Be Vietnam Pro SemiBold" pitchFamily="34" charset="-122"/>
+                <a:cs typeface="Be Vietnam Pro SemiBold" pitchFamily="34" charset="-120"/>
+              </a:rPr>
+              <a:t> chế</a:t>
+            </a:r>
+            <a:r>
+              <a:rPr lang="en-US" sz="2550" dirty="0" spc="-1" kern="0">
+                <a:solidFill>
+                  <a:srgbClr val="14161C"/>
+                </a:solidFill>
+                <a:latin typeface="Be Vietnam Pro SemiBold" pitchFamily="34" charset="0"/>
+                <a:ea typeface="Be Vietnam Pro SemiBold" pitchFamily="34" charset="-122"/>
+                <a:cs typeface="Be Vietnam Pro SemiBold" pitchFamily="34" charset="-120"/>
+              </a:rPr>
+              <a:t> thu</a:t>
+            </a:r>
+            <a:r>
+              <a:rPr lang="en-US" sz="2550" dirty="0" spc="-2" kern="0">
+                <a:solidFill>
+                  <a:srgbClr val="14161C"/>
+                </a:solidFill>
+                <a:latin typeface="Be Vietnam Pro SemiBold" pitchFamily="34" charset="0"/>
+                <a:ea typeface="Be Vietnam Pro SemiBold" pitchFamily="34" charset="-122"/>
+                <a:cs typeface="Be Vietnam Pro SemiBold" pitchFamily="34" charset="-120"/>
+              </a:rPr>
+              <a:t> hồi</a:t>
+            </a:r>
+            <a:endParaRPr lang="en-US" sz="2550" dirty="0"/>
+          </a:p>
+        </p:txBody>
+      </p:sp>
+      <p:sp>
+        <p:nvSpPr>
+          <p:cNvPr id="17" name="Text 14"/>
+          <p:cNvSpPr/>
+          <p:nvPr/>
+        </p:nvSpPr>
+        <p:spPr>
+          <a:xfrm>
+            <a:off x="914400" y="8496300"/>
+            <a:ext cx="16459200" cy="342900"/>
           </a:xfrm>
           <a:prstGeom prst="rect">
             <a:avLst/>
@@ -19594,41 +21593,195 @@
               <a:buNone/>
             </a:pPr>
             <a:r>
-              <a:rPr lang="en-US" sz="3000" dirty="0" spc="-3" kern="0">
-                <a:solidFill>
-                  <a:srgbClr val="14161C"/>
-                </a:solidFill>
-                <a:latin typeface="Be Vietnam Pro SemiBold" pitchFamily="34" charset="0"/>
-                <a:ea typeface="Be Vietnam Pro SemiBold" pitchFamily="34" charset="-122"/>
-                <a:cs typeface="Be Vietnam Pro SemiBold" pitchFamily="34" charset="-120"/>
-              </a:rPr>
-              <a:t>Chú</a:t>
-            </a:r>
-            <a:r>
-              <a:rPr lang="en-US" sz="3000" dirty="0" spc="1" kern="0">
-                <a:solidFill>
-                  <a:srgbClr val="14161C"/>
-                </a:solidFill>
-                <a:latin typeface="Be Vietnam Pro SemiBold" pitchFamily="34" charset="0"/>
-                <a:ea typeface="Be Vietnam Pro SemiBold" pitchFamily="34" charset="-122"/>
-                <a:cs typeface="Be Vietnam Pro SemiBold" pitchFamily="34" charset="-120"/>
-              </a:rPr>
-              <a:t> ý</a:t>
-            </a:r>
-            <a:endParaRPr lang="en-US" sz="3000" dirty="0"/>
+              <a:rPr lang="en-US" sz="1650" dirty="0" spc="-2" kern="0">
+                <a:solidFill>
+                  <a:srgbClr val="6B6A66"/>
+                </a:solidFill>
+                <a:latin typeface="Be Vietnam Pro" pitchFamily="34" charset="0"/>
+                <a:ea typeface="Be Vietnam Pro" pitchFamily="34" charset="-122"/>
+                <a:cs typeface="Be Vietnam Pro" pitchFamily="34" charset="-120"/>
+              </a:rPr>
+              <a:t>Hình:</a:t>
+            </a:r>
+            <a:r>
+              <a:rPr lang="en-US" sz="1650" dirty="0" spc="-4" kern="0">
+                <a:solidFill>
+                  <a:srgbClr val="6B6A66"/>
+                </a:solidFill>
+                <a:latin typeface="Be Vietnam Pro" pitchFamily="34" charset="0"/>
+                <a:ea typeface="Be Vietnam Pro" pitchFamily="34" charset="-122"/>
+                <a:cs typeface="Be Vietnam Pro" pitchFamily="34" charset="-120"/>
+              </a:rPr>
+              <a:t> OpenStax</a:t>
+            </a:r>
+            <a:r>
+              <a:rPr lang="en-US" sz="1650" dirty="0" spc="-10" kern="0">
+                <a:solidFill>
+                  <a:srgbClr val="6B6A66"/>
+                </a:solidFill>
+                <a:latin typeface="Be Vietnam Pro" pitchFamily="34" charset="0"/>
+                <a:ea typeface="Be Vietnam Pro" pitchFamily="34" charset="-122"/>
+                <a:cs typeface="Be Vietnam Pro" pitchFamily="34" charset="-120"/>
+              </a:rPr>
+              <a:t> Psychology</a:t>
+            </a:r>
+            <a:r>
+              <a:rPr lang="en-US" sz="1650" dirty="0" spc="1" kern="0">
+                <a:solidFill>
+                  <a:srgbClr val="6B6A66"/>
+                </a:solidFill>
+                <a:latin typeface="Be Vietnam Pro" pitchFamily="34" charset="0"/>
+                <a:ea typeface="Be Vietnam Pro" pitchFamily="34" charset="-122"/>
+                <a:cs typeface="Be Vietnam Pro" pitchFamily="34" charset="-120"/>
+              </a:rPr>
+              <a:t> 2e,</a:t>
+            </a:r>
+            <a:r>
+              <a:rPr lang="en-US" sz="1650" dirty="0" spc="-5" kern="0">
+                <a:solidFill>
+                  <a:srgbClr val="6B6A66"/>
+                </a:solidFill>
+                <a:latin typeface="Be Vietnam Pro" pitchFamily="34" charset="0"/>
+                <a:ea typeface="Be Vietnam Pro" pitchFamily="34" charset="-122"/>
+                <a:cs typeface="Be Vietnam Pro" pitchFamily="34" charset="-120"/>
+              </a:rPr>
+              <a:t> giấy</a:t>
+            </a:r>
+            <a:r>
+              <a:rPr lang="en-US" sz="1650" dirty="0" spc="2" kern="0">
+                <a:solidFill>
+                  <a:srgbClr val="6B6A66"/>
+                </a:solidFill>
+                <a:latin typeface="Be Vietnam Pro" pitchFamily="34" charset="0"/>
+                <a:ea typeface="Be Vietnam Pro" pitchFamily="34" charset="-122"/>
+                <a:cs typeface="Be Vietnam Pro" pitchFamily="34" charset="-120"/>
+              </a:rPr>
+              <a:t> phép</a:t>
+            </a:r>
+            <a:r>
+              <a:rPr lang="en-US" sz="1650" dirty="0" spc="0" kern="0">
+                <a:solidFill>
+                  <a:srgbClr val="6B6A66"/>
+                </a:solidFill>
+                <a:latin typeface="Be Vietnam Pro" pitchFamily="34" charset="0"/>
+                <a:ea typeface="Be Vietnam Pro" pitchFamily="34" charset="-122"/>
+                <a:cs typeface="Be Vietnam Pro" pitchFamily="34" charset="-120"/>
+              </a:rPr>
+              <a:t> theo</a:t>
+            </a:r>
+            <a:r>
+              <a:rPr lang="en-US" sz="1650" dirty="0" spc="-2" kern="0">
+                <a:solidFill>
+                  <a:srgbClr val="6B6A66"/>
+                </a:solidFill>
+                <a:latin typeface="Be Vietnam Pro" pitchFamily="34" charset="0"/>
+                <a:ea typeface="Be Vietnam Pro" pitchFamily="34" charset="-122"/>
+                <a:cs typeface="Be Vietnam Pro" pitchFamily="34" charset="-120"/>
+              </a:rPr>
+              <a:t> sách</a:t>
+            </a:r>
+            <a:r>
+              <a:rPr lang="en-US" sz="1650" dirty="0" spc="4" kern="0">
+                <a:solidFill>
+                  <a:srgbClr val="6B6A66"/>
+                </a:solidFill>
+                <a:latin typeface="Be Vietnam Pro" pitchFamily="34" charset="0"/>
+                <a:ea typeface="Be Vietnam Pro" pitchFamily="34" charset="-122"/>
+                <a:cs typeface="Be Vietnam Pro" pitchFamily="34" charset="-120"/>
+              </a:rPr>
+              <a:t> CC</a:t>
+            </a:r>
+            <a:r>
+              <a:rPr lang="en-US" sz="1650" dirty="0" spc="-9" kern="0">
+                <a:solidFill>
+                  <a:srgbClr val="6B6A66"/>
+                </a:solidFill>
+                <a:latin typeface="Be Vietnam Pro" pitchFamily="34" charset="0"/>
+                <a:ea typeface="Be Vietnam Pro" pitchFamily="34" charset="-122"/>
+                <a:cs typeface="Be Vietnam Pro" pitchFamily="34" charset="-120"/>
+              </a:rPr>
+              <a:t> BY-NC-SA;</a:t>
+            </a:r>
+            <a:r>
+              <a:rPr lang="en-US" sz="1650" dirty="0" spc="-14" kern="0">
+                <a:solidFill>
+                  <a:srgbClr val="6B6A66"/>
+                </a:solidFill>
+                <a:latin typeface="Be Vietnam Pro" pitchFamily="34" charset="0"/>
+                <a:ea typeface="Be Vietnam Pro" pitchFamily="34" charset="-122"/>
+                <a:cs typeface="Be Vietnam Pro" pitchFamily="34" charset="-120"/>
+              </a:rPr>
+              <a:t> Hove</a:t>
+            </a:r>
+            <a:r>
+              <a:rPr lang="en-US" sz="1650" dirty="0" spc="0" kern="0">
+                <a:solidFill>
+                  <a:srgbClr val="6B6A66"/>
+                </a:solidFill>
+                <a:latin typeface="Be Vietnam Pro" pitchFamily="34" charset="0"/>
+                <a:ea typeface="Be Vietnam Pro" pitchFamily="34" charset="-122"/>
+                <a:cs typeface="Be Vietnam Pro" pitchFamily="34" charset="-120"/>
+              </a:rPr>
+              <a:t> &amp; Martinez,</a:t>
+            </a:r>
+            <a:r>
+              <a:rPr lang="en-US" sz="1650" dirty="0" spc="-1" kern="0">
+                <a:solidFill>
+                  <a:srgbClr val="6B6A66"/>
+                </a:solidFill>
+                <a:latin typeface="Be Vietnam Pro" pitchFamily="34" charset="0"/>
+                <a:ea typeface="Be Vietnam Pro" pitchFamily="34" charset="-122"/>
+                <a:cs typeface="Be Vietnam Pro" pitchFamily="34" charset="-120"/>
+              </a:rPr>
+              <a:t> Hình</a:t>
+            </a:r>
+            <a:r>
+              <a:rPr lang="en-US" sz="1650" dirty="0" spc="4" kern="0">
+                <a:solidFill>
+                  <a:srgbClr val="6B6A66"/>
+                </a:solidFill>
+                <a:latin typeface="Be Vietnam Pro" pitchFamily="34" charset="0"/>
+                <a:ea typeface="Be Vietnam Pro" pitchFamily="34" charset="-122"/>
+                <a:cs typeface="Be Vietnam Pro" pitchFamily="34" charset="-120"/>
+              </a:rPr>
+              <a:t> 3</a:t>
+            </a:r>
+            <a:r>
+              <a:rPr lang="en-US" sz="1650" dirty="0" spc="2" kern="0">
+                <a:solidFill>
+                  <a:srgbClr val="6B6A66"/>
+                </a:solidFill>
+                <a:latin typeface="Be Vietnam Pro" pitchFamily="34" charset="0"/>
+                <a:ea typeface="Be Vietnam Pro" pitchFamily="34" charset="-122"/>
+                <a:cs typeface="Be Vietnam Pro" pitchFamily="34" charset="-120"/>
+              </a:rPr>
+              <a:t> (chương</a:t>
+            </a:r>
+            <a:r>
+              <a:rPr lang="en-US" sz="1650" dirty="0" spc="1" kern="0">
+                <a:solidFill>
+                  <a:srgbClr val="6B6A66"/>
+                </a:solidFill>
+                <a:latin typeface="Be Vietnam Pro" pitchFamily="34" charset="0"/>
+                <a:ea typeface="Be Vietnam Pro" pitchFamily="34" charset="-122"/>
+                <a:cs typeface="Be Vietnam Pro" pitchFamily="34" charset="-120"/>
+              </a:rPr>
+              <a:t> 12)</a:t>
+            </a:r>
+            <a:endParaRPr lang="en-US" sz="1650" dirty="0"/>
           </a:p>
         </p:txBody>
       </p:sp>
       <p:sp>
         <p:nvSpPr>
-          <p:cNvPr id="9" name="Text 7"/>
-          <p:cNvSpPr/>
-          <p:nvPr/>
-        </p:nvSpPr>
-        <p:spPr>
-          <a:xfrm>
-            <a:off x="914400" y="5753100"/>
-            <a:ext cx="1619250" cy="1428750"/>
+          <p:cNvPr id="18" name="Text 15"/>
+          <p:cNvSpPr/>
+          <p:nvPr/>
+        </p:nvSpPr>
+        <p:spPr>
+          <a:xfrm>
+            <a:off x="914400" y="8991600"/>
+            <a:ext cx="16459200" cy="342900"/>
           </a:xfrm>
           <a:prstGeom prst="rect">
             <a:avLst/>
@@ -19644,52 +21797,435 @@
               <a:buNone/>
             </a:pPr>
             <a:r>
-              <a:rPr lang="en-US" sz="8700" dirty="0" spc="3" kern="0">
-                <a:solidFill>
-                  <a:srgbClr val="B45309"/>
-                </a:solidFill>
-                <a:latin typeface="Bricolage Grotesque ExtraBold" pitchFamily="34" charset="0"/>
-                <a:ea typeface="Bricolage Grotesque ExtraBold" pitchFamily="34" charset="-122"/>
-                <a:cs typeface="Bricolage Grotesque ExtraBold" pitchFamily="34" charset="-120"/>
-              </a:rPr>
-              <a:t>3</a:t>
-            </a:r>
-            <a:endParaRPr lang="en-US" sz="8700" dirty="0"/>
+              <a:rPr lang="en-US" sz="1800" dirty="0" spc="-2" kern="0">
+                <a:solidFill>
+                  <a:srgbClr val="6B6A66"/>
+                </a:solidFill>
+                <a:latin typeface="Be Vietnam Pro" pitchFamily="34" charset="0"/>
+                <a:ea typeface="Be Vietnam Pro" pitchFamily="34" charset="-122"/>
+                <a:cs typeface="Be Vietnam Pro" pitchFamily="34" charset="-120"/>
+              </a:rPr>
+              <a:t>Nguồn:</a:t>
+            </a:r>
+            <a:r>
+              <a:rPr lang="en-US" sz="1800" dirty="0" spc="2" kern="0">
+                <a:solidFill>
+                  <a:srgbClr val="6B6A66"/>
+                </a:solidFill>
+                <a:latin typeface="Be Vietnam Pro" pitchFamily="34" charset="0"/>
+                <a:ea typeface="Be Vietnam Pro" pitchFamily="34" charset="-122"/>
+                <a:cs typeface="Be Vietnam Pro" pitchFamily="34" charset="-120"/>
+              </a:rPr>
+              <a:t> [S5]</a:t>
+            </a:r>
+            <a:endParaRPr lang="en-US" sz="1800" dirty="0"/>
           </a:p>
         </p:txBody>
       </p:sp>
       <p:sp>
         <p:nvSpPr>
-          <p:cNvPr id="10" name="Shape 8"/>
-          <p:cNvSpPr/>
-          <p:nvPr/>
-        </p:nvSpPr>
-        <p:spPr>
-          <a:xfrm>
-            <a:off x="2724150" y="5848350"/>
-            <a:ext cx="14649450" cy="1238250"/>
-          </a:xfrm>
-          <a:prstGeom prst="roundRect">
-            <a:avLst>
-              <a:gd name="adj" fmla="val 15385"/>
-            </a:avLst>
-          </a:prstGeom>
-          <a:solidFill>
-            <a:srgbClr val="E8E0CF"/>
-          </a:solidFill>
-          <a:ln/>
-        </p:spPr>
-      </p:sp>
-      <p:sp>
-        <p:nvSpPr>
-          <p:cNvPr id="11" name="Text 9"/>
-          <p:cNvSpPr/>
-          <p:nvPr/>
-        </p:nvSpPr>
-        <p:spPr>
-          <a:xfrm>
-            <a:off x="3105150" y="5848350"/>
-            <a:ext cx="14001750" cy="1238250"/>
+          <p:cNvPr id="19" name="Shape 16"/>
+          <p:cNvSpPr/>
+          <p:nvPr/>
+        </p:nvSpPr>
+        <p:spPr>
+          <a:xfrm>
+            <a:off x="942975" y="9563100"/>
+            <a:ext cx="114300" cy="114300"/>
+          </a:xfrm>
+          <a:prstGeom prst="ellipse">
+            <a:avLst/>
+          </a:prstGeom>
+          <a:solidFill>
+            <a:srgbClr val="14161C">
+              <a:alpha val="28000"/>
+            </a:srgbClr>
+          </a:solidFill>
+          <a:ln/>
+        </p:spPr>
+      </p:sp>
+      <p:sp>
+        <p:nvSpPr>
+          <p:cNvPr id="20" name="Shape 17"/>
+          <p:cNvSpPr/>
+          <p:nvPr/>
+        </p:nvSpPr>
+        <p:spPr>
+          <a:xfrm>
+            <a:off x="1171575" y="9563100"/>
+            <a:ext cx="114300" cy="114300"/>
+          </a:xfrm>
+          <a:prstGeom prst="ellipse">
+            <a:avLst/>
+          </a:prstGeom>
+          <a:solidFill>
+            <a:srgbClr val="14161C">
+              <a:alpha val="28000"/>
+            </a:srgbClr>
+          </a:solidFill>
+          <a:ln/>
+        </p:spPr>
+      </p:sp>
+      <p:sp>
+        <p:nvSpPr>
+          <p:cNvPr id="21" name="Shape 18"/>
+          <p:cNvSpPr/>
+          <p:nvPr/>
+        </p:nvSpPr>
+        <p:spPr>
+          <a:xfrm>
+            <a:off x="1400175" y="9563100"/>
+            <a:ext cx="114300" cy="114300"/>
+          </a:xfrm>
+          <a:prstGeom prst="ellipse">
+            <a:avLst/>
+          </a:prstGeom>
+          <a:solidFill>
+            <a:srgbClr val="14161C">
+              <a:alpha val="28000"/>
+            </a:srgbClr>
+          </a:solidFill>
+          <a:ln/>
+        </p:spPr>
+      </p:sp>
+      <p:sp>
+        <p:nvSpPr>
+          <p:cNvPr id="22" name="Shape 19"/>
+          <p:cNvSpPr/>
+          <p:nvPr/>
+        </p:nvSpPr>
+        <p:spPr>
+          <a:xfrm>
+            <a:off x="1628775" y="9563100"/>
+            <a:ext cx="114300" cy="114300"/>
+          </a:xfrm>
+          <a:prstGeom prst="ellipse">
+            <a:avLst/>
+          </a:prstGeom>
+          <a:solidFill>
+            <a:srgbClr val="14161C">
+              <a:alpha val="28000"/>
+            </a:srgbClr>
+          </a:solidFill>
+          <a:ln/>
+        </p:spPr>
+      </p:sp>
+      <p:sp>
+        <p:nvSpPr>
+          <p:cNvPr id="23" name="Shape 20"/>
+          <p:cNvSpPr/>
+          <p:nvPr/>
+        </p:nvSpPr>
+        <p:spPr>
+          <a:xfrm>
+            <a:off x="1857375" y="9563100"/>
+            <a:ext cx="114300" cy="114300"/>
+          </a:xfrm>
+          <a:prstGeom prst="ellipse">
+            <a:avLst/>
+          </a:prstGeom>
+          <a:solidFill>
+            <a:srgbClr val="14161C">
+              <a:alpha val="28000"/>
+            </a:srgbClr>
+          </a:solidFill>
+          <a:ln/>
+        </p:spPr>
+      </p:sp>
+      <p:sp>
+        <p:nvSpPr>
+          <p:cNvPr id="24" name="Shape 21"/>
+          <p:cNvSpPr/>
+          <p:nvPr/>
+        </p:nvSpPr>
+        <p:spPr>
+          <a:xfrm>
+            <a:off x="2085975" y="9563100"/>
+            <a:ext cx="114300" cy="114300"/>
+          </a:xfrm>
+          <a:prstGeom prst="ellipse">
+            <a:avLst/>
+          </a:prstGeom>
+          <a:solidFill>
+            <a:srgbClr val="14161C">
+              <a:alpha val="28000"/>
+            </a:srgbClr>
+          </a:solidFill>
+          <a:ln/>
+        </p:spPr>
+      </p:sp>
+      <p:sp>
+        <p:nvSpPr>
+          <p:cNvPr id="25" name="Shape 22"/>
+          <p:cNvSpPr/>
+          <p:nvPr/>
+        </p:nvSpPr>
+        <p:spPr>
+          <a:xfrm>
+            <a:off x="2314575" y="9563100"/>
+            <a:ext cx="114300" cy="114300"/>
+          </a:xfrm>
+          <a:prstGeom prst="ellipse">
+            <a:avLst/>
+          </a:prstGeom>
+          <a:solidFill>
+            <a:srgbClr val="14161C">
+              <a:alpha val="28000"/>
+            </a:srgbClr>
+          </a:solidFill>
+          <a:ln/>
+        </p:spPr>
+      </p:sp>
+      <p:sp>
+        <p:nvSpPr>
+          <p:cNvPr id="26" name="Shape 23"/>
+          <p:cNvSpPr/>
+          <p:nvPr/>
+        </p:nvSpPr>
+        <p:spPr>
+          <a:xfrm>
+            <a:off x="2524125" y="9544050"/>
+            <a:ext cx="152400" cy="152400"/>
+          </a:xfrm>
+          <a:prstGeom prst="ellipse">
+            <a:avLst/>
+          </a:prstGeom>
+          <a:solidFill>
+            <a:srgbClr val="E8472B"/>
+          </a:solidFill>
+          <a:ln/>
+        </p:spPr>
+      </p:sp>
+      <p:sp>
+        <p:nvSpPr>
+          <p:cNvPr id="27" name="Shape 24"/>
+          <p:cNvSpPr/>
+          <p:nvPr/>
+        </p:nvSpPr>
+        <p:spPr>
+          <a:xfrm>
+            <a:off x="2771775" y="9563100"/>
+            <a:ext cx="114300" cy="114300"/>
+          </a:xfrm>
+          <a:prstGeom prst="ellipse">
+            <a:avLst/>
+          </a:prstGeom>
+          <a:solidFill>
+            <a:srgbClr val="14161C">
+              <a:alpha val="28000"/>
+            </a:srgbClr>
+          </a:solidFill>
+          <a:ln/>
+        </p:spPr>
+      </p:sp>
+      <p:sp>
+        <p:nvSpPr>
+          <p:cNvPr id="28" name="Shape 25"/>
+          <p:cNvSpPr/>
+          <p:nvPr/>
+        </p:nvSpPr>
+        <p:spPr>
+          <a:xfrm>
+            <a:off x="3000375" y="9563100"/>
+            <a:ext cx="114300" cy="114300"/>
+          </a:xfrm>
+          <a:prstGeom prst="ellipse">
+            <a:avLst/>
+          </a:prstGeom>
+          <a:solidFill>
+            <a:srgbClr val="14161C">
+              <a:alpha val="28000"/>
+            </a:srgbClr>
+          </a:solidFill>
+          <a:ln/>
+        </p:spPr>
+      </p:sp>
+      <p:sp>
+        <p:nvSpPr>
+          <p:cNvPr id="29" name="Shape 26"/>
+          <p:cNvSpPr/>
+          <p:nvPr/>
+        </p:nvSpPr>
+        <p:spPr>
+          <a:xfrm>
+            <a:off x="3228975" y="9563100"/>
+            <a:ext cx="114300" cy="114300"/>
+          </a:xfrm>
+          <a:prstGeom prst="ellipse">
+            <a:avLst/>
+          </a:prstGeom>
+          <a:solidFill>
+            <a:srgbClr val="14161C">
+              <a:alpha val="28000"/>
+            </a:srgbClr>
+          </a:solidFill>
+          <a:ln/>
+        </p:spPr>
+      </p:sp>
+      <p:sp>
+        <p:nvSpPr>
+          <p:cNvPr id="30" name="Shape 27"/>
+          <p:cNvSpPr/>
+          <p:nvPr/>
+        </p:nvSpPr>
+        <p:spPr>
+          <a:xfrm>
+            <a:off x="3457575" y="9563100"/>
+            <a:ext cx="114300" cy="114300"/>
+          </a:xfrm>
+          <a:prstGeom prst="ellipse">
+            <a:avLst/>
+          </a:prstGeom>
+          <a:solidFill>
+            <a:srgbClr val="14161C">
+              <a:alpha val="28000"/>
+            </a:srgbClr>
+          </a:solidFill>
+          <a:ln/>
+        </p:spPr>
+      </p:sp>
+      <p:sp>
+        <p:nvSpPr>
+          <p:cNvPr id="31" name="Shape 28"/>
+          <p:cNvSpPr/>
+          <p:nvPr/>
+        </p:nvSpPr>
+        <p:spPr>
+          <a:xfrm>
+            <a:off x="3686175" y="9563100"/>
+            <a:ext cx="114300" cy="114300"/>
+          </a:xfrm>
+          <a:prstGeom prst="ellipse">
+            <a:avLst/>
+          </a:prstGeom>
+          <a:solidFill>
+            <a:srgbClr val="14161C">
+              <a:alpha val="28000"/>
+            </a:srgbClr>
+          </a:solidFill>
+          <a:ln/>
+        </p:spPr>
+      </p:sp>
+      <p:sp>
+        <p:nvSpPr>
+          <p:cNvPr id="32" name="Shape 29"/>
+          <p:cNvSpPr/>
+          <p:nvPr/>
+        </p:nvSpPr>
+        <p:spPr>
+          <a:xfrm>
+            <a:off x="3914775" y="9563100"/>
+            <a:ext cx="114300" cy="114300"/>
+          </a:xfrm>
+          <a:prstGeom prst="ellipse">
+            <a:avLst/>
+          </a:prstGeom>
+          <a:solidFill>
+            <a:srgbClr val="14161C">
+              <a:alpha val="28000"/>
+            </a:srgbClr>
+          </a:solidFill>
+          <a:ln/>
+        </p:spPr>
+      </p:sp>
+      <p:sp>
+        <p:nvSpPr>
+          <p:cNvPr id="33" name="Shape 30"/>
+          <p:cNvSpPr/>
+          <p:nvPr/>
+        </p:nvSpPr>
+        <p:spPr>
+          <a:xfrm>
+            <a:off x="4143375" y="9563100"/>
+            <a:ext cx="114300" cy="114300"/>
+          </a:xfrm>
+          <a:prstGeom prst="ellipse">
+            <a:avLst/>
+          </a:prstGeom>
+          <a:solidFill>
+            <a:srgbClr val="14161C">
+              <a:alpha val="28000"/>
+            </a:srgbClr>
+          </a:solidFill>
+          <a:ln/>
+        </p:spPr>
+      </p:sp>
+      <p:sp>
+        <p:nvSpPr>
+          <p:cNvPr id="34" name="Shape 31"/>
+          <p:cNvSpPr/>
+          <p:nvPr/>
+        </p:nvSpPr>
+        <p:spPr>
+          <a:xfrm>
+            <a:off x="4371975" y="9563100"/>
+            <a:ext cx="114300" cy="114300"/>
+          </a:xfrm>
+          <a:prstGeom prst="ellipse">
+            <a:avLst/>
+          </a:prstGeom>
+          <a:solidFill>
+            <a:srgbClr val="14161C">
+              <a:alpha val="28000"/>
+            </a:srgbClr>
+          </a:solidFill>
+          <a:ln/>
+        </p:spPr>
+      </p:sp>
+      <p:sp>
+        <p:nvSpPr>
+          <p:cNvPr id="35" name="Shape 32"/>
+          <p:cNvSpPr/>
+          <p:nvPr/>
+        </p:nvSpPr>
+        <p:spPr>
+          <a:xfrm>
+            <a:off x="4600575" y="9563100"/>
+            <a:ext cx="114300" cy="114300"/>
+          </a:xfrm>
+          <a:prstGeom prst="ellipse">
+            <a:avLst/>
+          </a:prstGeom>
+          <a:solidFill>
+            <a:srgbClr val="14161C">
+              <a:alpha val="28000"/>
+            </a:srgbClr>
+          </a:solidFill>
+          <a:ln/>
+        </p:spPr>
+      </p:sp>
+      <p:sp>
+        <p:nvSpPr>
+          <p:cNvPr id="36" name="Shape 33"/>
+          <p:cNvSpPr/>
+          <p:nvPr/>
+        </p:nvSpPr>
+        <p:spPr>
+          <a:xfrm>
+            <a:off x="4829175" y="9563100"/>
+            <a:ext cx="114300" cy="114300"/>
+          </a:xfrm>
+          <a:prstGeom prst="ellipse">
+            <a:avLst/>
+          </a:prstGeom>
+          <a:solidFill>
+            <a:srgbClr val="14161C">
+              <a:alpha val="28000"/>
+            </a:srgbClr>
+          </a:solidFill>
+          <a:ln/>
+        </p:spPr>
+      </p:sp>
+      <p:sp>
+        <p:nvSpPr>
+          <p:cNvPr id="37" name="Text 34"/>
+          <p:cNvSpPr/>
+          <p:nvPr/>
+        </p:nvSpPr>
+        <p:spPr>
+          <a:xfrm>
+            <a:off x="5257800" y="9467850"/>
+            <a:ext cx="6667500" cy="304800"/>
           </a:xfrm>
           <a:prstGeom prst="rect">
             <a:avLst/>
@@ -19705,90 +22241,7 @@
               <a:buNone/>
             </a:pPr>
             <a:r>
-              <a:rPr lang="en-US" sz="3000" dirty="0" spc="-1" kern="0">
-                <a:solidFill>
-                  <a:srgbClr val="14161C"/>
-                </a:solidFill>
-                <a:latin typeface="Be Vietnam Pro SemiBold" pitchFamily="34" charset="0"/>
-                <a:ea typeface="Be Vietnam Pro SemiBold" pitchFamily="34" charset="-122"/>
-                <a:cs typeface="Be Vietnam Pro SemiBold" pitchFamily="34" charset="-120"/>
-              </a:rPr>
-              <a:t>Phản</a:t>
-            </a:r>
-            <a:r>
-              <a:rPr lang="en-US" sz="3000" dirty="0" spc="31" kern="0">
-                <a:solidFill>
-                  <a:srgbClr val="14161C"/>
-                </a:solidFill>
-                <a:latin typeface="Be Vietnam Pro SemiBold" pitchFamily="34" charset="0"/>
-                <a:ea typeface="Be Vietnam Pro SemiBold" pitchFamily="34" charset="-122"/>
-                <a:cs typeface="Be Vietnam Pro SemiBold" pitchFamily="34" charset="-120"/>
-              </a:rPr>
-              <a:t> ứng</a:t>
-            </a:r>
-            <a:r>
-              <a:rPr lang="en-US" sz="3000" dirty="0" spc="-10" kern="0">
-                <a:solidFill>
-                  <a:srgbClr val="14161C"/>
-                </a:solidFill>
-                <a:latin typeface="Be Vietnam Pro SemiBold" pitchFamily="34" charset="0"/>
-                <a:ea typeface="Be Vietnam Pro SemiBold" pitchFamily="34" charset="-122"/>
-                <a:cs typeface="Be Vietnam Pro SemiBold" pitchFamily="34" charset="-120"/>
-              </a:rPr>
-              <a:t> với</a:t>
-            </a:r>
-            <a:r>
-              <a:rPr lang="en-US" sz="3000" dirty="0" spc="-4" kern="0">
-                <a:solidFill>
-                  <a:srgbClr val="14161C"/>
-                </a:solidFill>
-                <a:latin typeface="Be Vietnam Pro SemiBold" pitchFamily="34" charset="0"/>
-                <a:ea typeface="Be Vietnam Pro SemiBold" pitchFamily="34" charset="-122"/>
-                <a:cs typeface="Be Vietnam Pro SemiBold" pitchFamily="34" charset="-120"/>
-              </a:rPr>
-              <a:t> căng</a:t>
-            </a:r>
-            <a:r>
-              <a:rPr lang="en-US" sz="3000" dirty="0" spc="-2" kern="0">
-                <a:solidFill>
-                  <a:srgbClr val="14161C"/>
-                </a:solidFill>
-                <a:latin typeface="Be Vietnam Pro SemiBold" pitchFamily="34" charset="0"/>
-                <a:ea typeface="Be Vietnam Pro SemiBold" pitchFamily="34" charset="-122"/>
-                <a:cs typeface="Be Vietnam Pro SemiBold" pitchFamily="34" charset="-120"/>
-              </a:rPr>
-              <a:t> thẳng</a:t>
-            </a:r>
-            <a:endParaRPr lang="en-US" sz="3000" dirty="0"/>
-          </a:p>
-        </p:txBody>
-      </p:sp>
-      <p:sp>
-        <p:nvSpPr>
-          <p:cNvPr id="12" name="Text 10"/>
-          <p:cNvSpPr/>
-          <p:nvPr/>
-        </p:nvSpPr>
-        <p:spPr>
-          <a:xfrm>
-            <a:off x="914400" y="8991600"/>
-            <a:ext cx="16459200" cy="342900"/>
-          </a:xfrm>
-          <a:prstGeom prst="rect">
-            <a:avLst/>
-          </a:prstGeom>
-          <a:noFill/>
-          <a:ln/>
-        </p:spPr>
-        <p:txBody>
-          <a:bodyPr wrap="square" lIns="0" tIns="0" rIns="0" bIns="0" rtlCol="0" anchor="ctr"/>
-          <a:lstStyle/>
-          <a:p>
-            <a:pPr algn="l" indent="0" marL="0">
-              <a:buNone/>
-            </a:pPr>
-            <a:r>
-              <a:rPr lang="en-US" sz="1800" dirty="0" spc="-2" kern="0">
+              <a:rPr lang="en-US" sz="1800" dirty="0" spc="-6" kern="0">
                 <a:solidFill>
                   <a:srgbClr val="6B6A66"/>
                 </a:solidFill>
@@ -19796,10 +22249,10 @@
                 <a:ea typeface="Be Vietnam Pro" pitchFamily="34" charset="-122"/>
                 <a:cs typeface="Be Vietnam Pro" pitchFamily="34" charset="-120"/>
               </a:rPr>
-              <a:t>Nguồn:</a:t>
-            </a:r>
-            <a:r>
-              <a:rPr lang="en-US" sz="1800" dirty="0" spc="3" kern="0">
+              <a:t>Multiple-report</a:t>
+            </a:r>
+            <a:r>
+              <a:rPr lang="en-US" sz="1800" dirty="0" spc="-1" kern="0">
                 <a:solidFill>
                   <a:srgbClr val="6B6A66"/>
                 </a:solidFill>
@@ -19807,10 +22260,10 @@
                 <a:ea typeface="Be Vietnam Pro" pitchFamily="34" charset="-122"/>
                 <a:cs typeface="Be Vietnam Pro" pitchFamily="34" charset="-120"/>
               </a:rPr>
-              <a:t> [S1]</a:t>
-            </a:r>
-            <a:r>
-              <a:rPr lang="en-US" sz="1800" dirty="0" spc="1" kern="0">
+              <a:t> ·</a:t>
+            </a:r>
+            <a:r>
+              <a:rPr lang="en-US" sz="1800" dirty="0" spc="-31" kern="0">
                 <a:solidFill>
                   <a:srgbClr val="6B6A66"/>
                 </a:solidFill>
@@ -19818,7 +22271,29 @@
                 <a:ea typeface="Be Vietnam Pro" pitchFamily="34" charset="-122"/>
                 <a:cs typeface="Be Vietnam Pro" pitchFamily="34" charset="-120"/>
               </a:rPr>
-              <a:t> [S2]</a:t>
+              <a:t> L03</a:t>
+            </a:r>
+            <a:r>
+              <a:rPr lang="en-US" sz="1800" dirty="0" spc="0" kern="0">
+                <a:solidFill>
+                  <a:srgbClr val="6B6A66"/>
+                </a:solidFill>
+                <a:latin typeface="Be Vietnam Pro" pitchFamily="34" charset="0"/>
+                <a:ea typeface="Be Vietnam Pro" pitchFamily="34" charset="-122"/>
+                <a:cs typeface="Be Vietnam Pro" pitchFamily="34" charset="-120"/>
+              </a:rPr>
+              <a:t> ·</a:t>
+            </a:r>
+            <a:r>
+              <a:rPr lang="en-US" sz="1800" dirty="0" spc="4" kern="0">
+                <a:solidFill>
+                  <a:srgbClr val="6B6A66"/>
+                </a:solidFill>
+                <a:latin typeface="Be Vietnam Pro" pitchFamily="34" charset="0"/>
+                <a:ea typeface="Be Vietnam Pro" pitchFamily="34" charset="-122"/>
+                <a:cs typeface="Be Vietnam Pro" pitchFamily="34" charset="-120"/>
+              </a:rPr>
+              <a:t> 08/18</a:t>
             </a:r>
             <a:endParaRPr lang="en-US" sz="1800" dirty="0"/>
           </a:p>
@@ -19826,462 +22301,7 @@
       </p:sp>
       <p:sp>
         <p:nvSpPr>
-          <p:cNvPr id="13" name="Shape 11"/>
-          <p:cNvSpPr/>
-          <p:nvPr/>
-        </p:nvSpPr>
-        <p:spPr>
-          <a:xfrm>
-            <a:off x="942975" y="9563100"/>
-            <a:ext cx="114300" cy="114300"/>
-          </a:xfrm>
-          <a:prstGeom prst="ellipse">
-            <a:avLst/>
-          </a:prstGeom>
-          <a:solidFill>
-            <a:srgbClr val="14161C">
-              <a:alpha val="28000"/>
-            </a:srgbClr>
-          </a:solidFill>
-          <a:ln/>
-        </p:spPr>
-      </p:sp>
-      <p:sp>
-        <p:nvSpPr>
-          <p:cNvPr id="14" name="Shape 12"/>
-          <p:cNvSpPr/>
-          <p:nvPr/>
-        </p:nvSpPr>
-        <p:spPr>
-          <a:xfrm>
-            <a:off x="1171575" y="9563100"/>
-            <a:ext cx="114300" cy="114300"/>
-          </a:xfrm>
-          <a:prstGeom prst="ellipse">
-            <a:avLst/>
-          </a:prstGeom>
-          <a:solidFill>
-            <a:srgbClr val="14161C">
-              <a:alpha val="28000"/>
-            </a:srgbClr>
-          </a:solidFill>
-          <a:ln/>
-        </p:spPr>
-      </p:sp>
-      <p:sp>
-        <p:nvSpPr>
-          <p:cNvPr id="15" name="Shape 13"/>
-          <p:cNvSpPr/>
-          <p:nvPr/>
-        </p:nvSpPr>
-        <p:spPr>
-          <a:xfrm>
-            <a:off x="1400175" y="9563100"/>
-            <a:ext cx="114300" cy="114300"/>
-          </a:xfrm>
-          <a:prstGeom prst="ellipse">
-            <a:avLst/>
-          </a:prstGeom>
-          <a:solidFill>
-            <a:srgbClr val="14161C">
-              <a:alpha val="28000"/>
-            </a:srgbClr>
-          </a:solidFill>
-          <a:ln/>
-        </p:spPr>
-      </p:sp>
-      <p:sp>
-        <p:nvSpPr>
-          <p:cNvPr id="16" name="Shape 14"/>
-          <p:cNvSpPr/>
-          <p:nvPr/>
-        </p:nvSpPr>
-        <p:spPr>
-          <a:xfrm>
-            <a:off x="1628775" y="9563100"/>
-            <a:ext cx="114300" cy="114300"/>
-          </a:xfrm>
-          <a:prstGeom prst="ellipse">
-            <a:avLst/>
-          </a:prstGeom>
-          <a:solidFill>
-            <a:srgbClr val="14161C">
-              <a:alpha val="28000"/>
-            </a:srgbClr>
-          </a:solidFill>
-          <a:ln/>
-        </p:spPr>
-      </p:sp>
-      <p:sp>
-        <p:nvSpPr>
-          <p:cNvPr id="17" name="Shape 15"/>
-          <p:cNvSpPr/>
-          <p:nvPr/>
-        </p:nvSpPr>
-        <p:spPr>
-          <a:xfrm>
-            <a:off x="1857375" y="9563100"/>
-            <a:ext cx="114300" cy="114300"/>
-          </a:xfrm>
-          <a:prstGeom prst="ellipse">
-            <a:avLst/>
-          </a:prstGeom>
-          <a:solidFill>
-            <a:srgbClr val="14161C">
-              <a:alpha val="28000"/>
-            </a:srgbClr>
-          </a:solidFill>
-          <a:ln/>
-        </p:spPr>
-      </p:sp>
-      <p:sp>
-        <p:nvSpPr>
-          <p:cNvPr id="18" name="Shape 16"/>
-          <p:cNvSpPr/>
-          <p:nvPr/>
-        </p:nvSpPr>
-        <p:spPr>
-          <a:xfrm>
-            <a:off x="2085975" y="9563100"/>
-            <a:ext cx="114300" cy="114300"/>
-          </a:xfrm>
-          <a:prstGeom prst="ellipse">
-            <a:avLst/>
-          </a:prstGeom>
-          <a:solidFill>
-            <a:srgbClr val="14161C">
-              <a:alpha val="28000"/>
-            </a:srgbClr>
-          </a:solidFill>
-          <a:ln/>
-        </p:spPr>
-      </p:sp>
-      <p:sp>
-        <p:nvSpPr>
-          <p:cNvPr id="19" name="Shape 17"/>
-          <p:cNvSpPr/>
-          <p:nvPr/>
-        </p:nvSpPr>
-        <p:spPr>
-          <a:xfrm>
-            <a:off x="2314575" y="9563100"/>
-            <a:ext cx="114300" cy="114300"/>
-          </a:xfrm>
-          <a:prstGeom prst="ellipse">
-            <a:avLst/>
-          </a:prstGeom>
-          <a:solidFill>
-            <a:srgbClr val="14161C">
-              <a:alpha val="28000"/>
-            </a:srgbClr>
-          </a:solidFill>
-          <a:ln/>
-        </p:spPr>
-      </p:sp>
-      <p:sp>
-        <p:nvSpPr>
-          <p:cNvPr id="20" name="Shape 18"/>
-          <p:cNvSpPr/>
-          <p:nvPr/>
-        </p:nvSpPr>
-        <p:spPr>
-          <a:xfrm>
-            <a:off x="2524125" y="9544050"/>
-            <a:ext cx="152400" cy="152400"/>
-          </a:xfrm>
-          <a:prstGeom prst="ellipse">
-            <a:avLst/>
-          </a:prstGeom>
-          <a:solidFill>
-            <a:srgbClr val="E8472B"/>
-          </a:solidFill>
-          <a:ln/>
-        </p:spPr>
-      </p:sp>
-      <p:sp>
-        <p:nvSpPr>
-          <p:cNvPr id="21" name="Shape 19"/>
-          <p:cNvSpPr/>
-          <p:nvPr/>
-        </p:nvSpPr>
-        <p:spPr>
-          <a:xfrm>
-            <a:off x="2771775" y="9563100"/>
-            <a:ext cx="114300" cy="114300"/>
-          </a:xfrm>
-          <a:prstGeom prst="ellipse">
-            <a:avLst/>
-          </a:prstGeom>
-          <a:solidFill>
-            <a:srgbClr val="14161C">
-              <a:alpha val="28000"/>
-            </a:srgbClr>
-          </a:solidFill>
-          <a:ln/>
-        </p:spPr>
-      </p:sp>
-      <p:sp>
-        <p:nvSpPr>
-          <p:cNvPr id="22" name="Shape 20"/>
-          <p:cNvSpPr/>
-          <p:nvPr/>
-        </p:nvSpPr>
-        <p:spPr>
-          <a:xfrm>
-            <a:off x="3000375" y="9563100"/>
-            <a:ext cx="114300" cy="114300"/>
-          </a:xfrm>
-          <a:prstGeom prst="ellipse">
-            <a:avLst/>
-          </a:prstGeom>
-          <a:solidFill>
-            <a:srgbClr val="14161C">
-              <a:alpha val="28000"/>
-            </a:srgbClr>
-          </a:solidFill>
-          <a:ln/>
-        </p:spPr>
-      </p:sp>
-      <p:sp>
-        <p:nvSpPr>
-          <p:cNvPr id="23" name="Shape 21"/>
-          <p:cNvSpPr/>
-          <p:nvPr/>
-        </p:nvSpPr>
-        <p:spPr>
-          <a:xfrm>
-            <a:off x="3228975" y="9563100"/>
-            <a:ext cx="114300" cy="114300"/>
-          </a:xfrm>
-          <a:prstGeom prst="ellipse">
-            <a:avLst/>
-          </a:prstGeom>
-          <a:solidFill>
-            <a:srgbClr val="14161C">
-              <a:alpha val="28000"/>
-            </a:srgbClr>
-          </a:solidFill>
-          <a:ln/>
-        </p:spPr>
-      </p:sp>
-      <p:sp>
-        <p:nvSpPr>
-          <p:cNvPr id="24" name="Shape 22"/>
-          <p:cNvSpPr/>
-          <p:nvPr/>
-        </p:nvSpPr>
-        <p:spPr>
-          <a:xfrm>
-            <a:off x="3457575" y="9563100"/>
-            <a:ext cx="114300" cy="114300"/>
-          </a:xfrm>
-          <a:prstGeom prst="ellipse">
-            <a:avLst/>
-          </a:prstGeom>
-          <a:solidFill>
-            <a:srgbClr val="14161C">
-              <a:alpha val="28000"/>
-            </a:srgbClr>
-          </a:solidFill>
-          <a:ln/>
-        </p:spPr>
-      </p:sp>
-      <p:sp>
-        <p:nvSpPr>
-          <p:cNvPr id="25" name="Shape 23"/>
-          <p:cNvSpPr/>
-          <p:nvPr/>
-        </p:nvSpPr>
-        <p:spPr>
-          <a:xfrm>
-            <a:off x="3686175" y="9563100"/>
-            <a:ext cx="114300" cy="114300"/>
-          </a:xfrm>
-          <a:prstGeom prst="ellipse">
-            <a:avLst/>
-          </a:prstGeom>
-          <a:solidFill>
-            <a:srgbClr val="14161C">
-              <a:alpha val="28000"/>
-            </a:srgbClr>
-          </a:solidFill>
-          <a:ln/>
-        </p:spPr>
-      </p:sp>
-      <p:sp>
-        <p:nvSpPr>
-          <p:cNvPr id="26" name="Shape 24"/>
-          <p:cNvSpPr/>
-          <p:nvPr/>
-        </p:nvSpPr>
-        <p:spPr>
-          <a:xfrm>
-            <a:off x="3914775" y="9563100"/>
-            <a:ext cx="114300" cy="114300"/>
-          </a:xfrm>
-          <a:prstGeom prst="ellipse">
-            <a:avLst/>
-          </a:prstGeom>
-          <a:solidFill>
-            <a:srgbClr val="14161C">
-              <a:alpha val="28000"/>
-            </a:srgbClr>
-          </a:solidFill>
-          <a:ln/>
-        </p:spPr>
-      </p:sp>
-      <p:sp>
-        <p:nvSpPr>
-          <p:cNvPr id="27" name="Shape 25"/>
-          <p:cNvSpPr/>
-          <p:nvPr/>
-        </p:nvSpPr>
-        <p:spPr>
-          <a:xfrm>
-            <a:off x="4143375" y="9563100"/>
-            <a:ext cx="114300" cy="114300"/>
-          </a:xfrm>
-          <a:prstGeom prst="ellipse">
-            <a:avLst/>
-          </a:prstGeom>
-          <a:solidFill>
-            <a:srgbClr val="14161C">
-              <a:alpha val="28000"/>
-            </a:srgbClr>
-          </a:solidFill>
-          <a:ln/>
-        </p:spPr>
-      </p:sp>
-      <p:sp>
-        <p:nvSpPr>
-          <p:cNvPr id="28" name="Shape 26"/>
-          <p:cNvSpPr/>
-          <p:nvPr/>
-        </p:nvSpPr>
-        <p:spPr>
-          <a:xfrm>
-            <a:off x="4371975" y="9563100"/>
-            <a:ext cx="114300" cy="114300"/>
-          </a:xfrm>
-          <a:prstGeom prst="ellipse">
-            <a:avLst/>
-          </a:prstGeom>
-          <a:solidFill>
-            <a:srgbClr val="14161C">
-              <a:alpha val="28000"/>
-            </a:srgbClr>
-          </a:solidFill>
-          <a:ln/>
-        </p:spPr>
-      </p:sp>
-      <p:sp>
-        <p:nvSpPr>
-          <p:cNvPr id="29" name="Shape 27"/>
-          <p:cNvSpPr/>
-          <p:nvPr/>
-        </p:nvSpPr>
-        <p:spPr>
-          <a:xfrm>
-            <a:off x="4600575" y="9563100"/>
-            <a:ext cx="114300" cy="114300"/>
-          </a:xfrm>
-          <a:prstGeom prst="ellipse">
-            <a:avLst/>
-          </a:prstGeom>
-          <a:solidFill>
-            <a:srgbClr val="14161C">
-              <a:alpha val="28000"/>
-            </a:srgbClr>
-          </a:solidFill>
-          <a:ln/>
-        </p:spPr>
-      </p:sp>
-      <p:sp>
-        <p:nvSpPr>
-          <p:cNvPr id="30" name="Text 28"/>
-          <p:cNvSpPr/>
-          <p:nvPr/>
-        </p:nvSpPr>
-        <p:spPr>
-          <a:xfrm>
-            <a:off x="5029200" y="9467850"/>
-            <a:ext cx="6667500" cy="304800"/>
-          </a:xfrm>
-          <a:prstGeom prst="rect">
-            <a:avLst/>
-          </a:prstGeom>
-          <a:noFill/>
-          <a:ln/>
-        </p:spPr>
-        <p:txBody>
-          <a:bodyPr wrap="square" lIns="0" tIns="0" rIns="0" bIns="0" rtlCol="0" anchor="ctr"/>
-          <a:lstStyle/>
-          <a:p>
-            <a:pPr algn="l" indent="0" marL="0">
-              <a:buNone/>
-            </a:pPr>
-            <a:r>
-              <a:rPr lang="en-US" sz="1800" dirty="0" spc="-6" kern="0">
-                <a:solidFill>
-                  <a:srgbClr val="6B6A66"/>
-                </a:solidFill>
-                <a:latin typeface="Be Vietnam Pro" pitchFamily="34" charset="0"/>
-                <a:ea typeface="Be Vietnam Pro" pitchFamily="34" charset="-122"/>
-                <a:cs typeface="Be Vietnam Pro" pitchFamily="34" charset="-120"/>
-              </a:rPr>
-              <a:t>Multiple-report</a:t>
-            </a:r>
-            <a:r>
-              <a:rPr lang="en-US" sz="1800" dirty="0" spc="-1" kern="0">
-                <a:solidFill>
-                  <a:srgbClr val="6B6A66"/>
-                </a:solidFill>
-                <a:latin typeface="Be Vietnam Pro" pitchFamily="34" charset="0"/>
-                <a:ea typeface="Be Vietnam Pro" pitchFamily="34" charset="-122"/>
-                <a:cs typeface="Be Vietnam Pro" pitchFamily="34" charset="-120"/>
-              </a:rPr>
-              <a:t> ·</a:t>
-            </a:r>
-            <a:r>
-              <a:rPr lang="en-US" sz="1800" dirty="0" spc="-31" kern="0">
-                <a:solidFill>
-                  <a:srgbClr val="6B6A66"/>
-                </a:solidFill>
-                <a:latin typeface="Be Vietnam Pro" pitchFamily="34" charset="0"/>
-                <a:ea typeface="Be Vietnam Pro" pitchFamily="34" charset="-122"/>
-                <a:cs typeface="Be Vietnam Pro" pitchFamily="34" charset="-120"/>
-              </a:rPr>
-              <a:t> L03</a:t>
-            </a:r>
-            <a:r>
-              <a:rPr lang="en-US" sz="1800" dirty="0" spc="0" kern="0">
-                <a:solidFill>
-                  <a:srgbClr val="6B6A66"/>
-                </a:solidFill>
-                <a:latin typeface="Be Vietnam Pro" pitchFamily="34" charset="0"/>
-                <a:ea typeface="Be Vietnam Pro" pitchFamily="34" charset="-122"/>
-                <a:cs typeface="Be Vietnam Pro" pitchFamily="34" charset="-120"/>
-              </a:rPr>
-              <a:t> ·</a:t>
-            </a:r>
-            <a:r>
-              <a:rPr lang="en-US" sz="1800" dirty="0" spc="2" kern="0">
-                <a:solidFill>
-                  <a:srgbClr val="6B6A66"/>
-                </a:solidFill>
-                <a:latin typeface="Be Vietnam Pro" pitchFamily="34" charset="0"/>
-                <a:ea typeface="Be Vietnam Pro" pitchFamily="34" charset="-122"/>
-                <a:cs typeface="Be Vietnam Pro" pitchFamily="34" charset="-120"/>
-              </a:rPr>
-              <a:t> 08/17</a:t>
-            </a:r>
-            <a:endParaRPr lang="en-US" sz="1800" dirty="0"/>
-          </a:p>
-        </p:txBody>
-      </p:sp>
-      <p:sp>
-        <p:nvSpPr>
-          <p:cNvPr id="31" name="Shape 29"/>
+          <p:cNvPr id="38" name="Shape 35"/>
           <p:cNvSpPr/>
           <p:nvPr/>
         </p:nvSpPr>
@@ -20305,14 +22325,14 @@
       </p:sp>
       <p:pic>
         <p:nvPicPr>
-          <p:cNvPr id="32" name="Moda image moda-export-watermark-281e388e-2a8f-4833-a5d1-6343fa4d4102" descr="">    </p:cNvPr>
+          <p:cNvPr id="39" name="Moda image moda-export-watermark-e3df5b62-5a5b-42d9-ad1f-eac5ef337435" descr="">    </p:cNvPr>
           <p:cNvPicPr>
             <a:picLocks noChangeAspect="1"/>
           </p:cNvPicPr>
           <p:nvPr/>
         </p:nvPicPr>
         <p:blipFill>
-          <a:blip r:embed="rId1"/>
+          <a:blip r:embed="rId2"/>
           <a:srcRect l="0" r="0" t="0" b="0"/>
           <a:stretch/>
         </p:blipFill>
@@ -20340,7 +22360,7 @@
     <p:bg>
       <p:bgPr>
         <a:solidFill>
-          <a:srgbClr val="14161C"/>
+          <a:srgbClr val="F3EEE3"/>
         </a:solidFill>
       </p:bgPr>
     </p:bg>
@@ -20386,37 +22406,15 @@
               <a:buNone/>
             </a:pPr>
             <a:r>
-              <a:rPr lang="en-US" sz="5700" dirty="0" spc="-16" kern="0">
-                <a:solidFill>
-                  <a:srgbClr val="F3EEE3"/>
+              <a:rPr lang="en-US" sz="5700" dirty="0" spc="-11" kern="0">
+                <a:solidFill>
+                  <a:srgbClr val="14161C"/>
                 </a:solidFill>
                 <a:latin typeface="Bricolage Grotesque ExtraBold" pitchFamily="34" charset="0"/>
                 <a:ea typeface="Bricolage Grotesque ExtraBold" pitchFamily="34" charset="-122"/>
                 <a:cs typeface="Bricolage Grotesque ExtraBold" pitchFamily="34" charset="-120"/>
               </a:rPr>
-              <a:t>Acetylcholine</a:t>
-            </a:r>
-            <a:r>
-              <a:rPr lang="en-US" sz="5700" dirty="0" spc="-65" kern="0">
-                <a:solidFill>
-                  <a:srgbClr val="F3EEE3"/>
-                </a:solidFill>
-                <a:latin typeface="Bricolage Grotesque ExtraBold" pitchFamily="34" charset="0"/>
-                <a:ea typeface="Bricolage Grotesque ExtraBold" pitchFamily="34" charset="-122"/>
-                <a:cs typeface="Bricolage Grotesque ExtraBold" pitchFamily="34" charset="-120"/>
-              </a:rPr>
-              <a:t> và</a:t>
-            </a:r>
-            <a:r>
-              <a:rPr lang="en-US" sz="5700" dirty="0" spc="4" kern="0">
-                <a:solidFill>
-                  <a:srgbClr val="F3EEE3"/>
-                </a:solidFill>
-                <a:latin typeface="Bricolage Grotesque ExtraBold" pitchFamily="34" charset="0"/>
-                <a:ea typeface="Bricolage Grotesque ExtraBold" pitchFamily="34" charset="-122"/>
-                <a:cs typeface="Bricolage Grotesque ExtraBold" pitchFamily="34" charset="-120"/>
-              </a:rPr>
-              <a:t> endorphin</a:t>
+              <a:t>Noradrenaline</a:t>
             </a:r>
             <a:endParaRPr lang="en-US" sz="5700" dirty="0"/>
           </a:p>
@@ -20424,363 +22422,14 @@
       </p:sp>
       <p:sp>
         <p:nvSpPr>
-          <p:cNvPr id="3" name="Shape 1"/>
-          <p:cNvSpPr/>
-          <p:nvPr/>
-        </p:nvSpPr>
-        <p:spPr>
-          <a:xfrm>
-            <a:off x="914400" y="2857500"/>
-            <a:ext cx="8058150" cy="5334000"/>
-          </a:xfrm>
-          <a:prstGeom prst="roundRect">
-            <a:avLst>
-              <a:gd name="adj" fmla="val 5000"/>
-            </a:avLst>
-          </a:prstGeom>
-          <a:solidFill>
-            <a:srgbClr val="4A2A24"/>
-          </a:solidFill>
-          <a:ln/>
-        </p:spPr>
-      </p:sp>
-      <p:sp>
-        <p:nvSpPr>
-          <p:cNvPr id="4" name="Shape 2"/>
-          <p:cNvSpPr/>
-          <p:nvPr/>
-        </p:nvSpPr>
-        <p:spPr>
-          <a:xfrm>
-            <a:off x="914400" y="2857500"/>
-            <a:ext cx="133350" cy="5334000"/>
-          </a:xfrm>
-          <a:prstGeom prst="roundRect">
-            <a:avLst>
-              <a:gd name="adj" fmla="val 50000"/>
-            </a:avLst>
-          </a:prstGeom>
-          <a:solidFill>
-            <a:srgbClr val="FF6A4D"/>
-          </a:solidFill>
-          <a:ln/>
-        </p:spPr>
-      </p:sp>
-      <p:sp>
-        <p:nvSpPr>
-          <p:cNvPr id="5" name="Text 3"/>
-          <p:cNvSpPr/>
-          <p:nvPr/>
-        </p:nvSpPr>
-        <p:spPr>
-          <a:xfrm>
-            <a:off x="1371600" y="3200400"/>
-            <a:ext cx="7143750" cy="952500"/>
-          </a:xfrm>
-          <a:prstGeom prst="rect">
-            <a:avLst/>
-          </a:prstGeom>
-          <a:noFill/>
-          <a:ln/>
-        </p:spPr>
-        <p:txBody>
-          <a:bodyPr wrap="square" lIns="0" tIns="0" rIns="0" bIns="0" rtlCol="0" anchor="t"/>
-          <a:lstStyle/>
-          <a:p>
-            <a:pPr algn="l" indent="0" marL="0">
-              <a:buNone/>
-            </a:pPr>
-            <a:r>
-              <a:rPr lang="en-US" sz="4200" dirty="0" spc="-11" kern="0">
-                <a:solidFill>
-                  <a:srgbClr val="FF6A4D"/>
-                </a:solidFill>
-                <a:latin typeface="Bricolage Grotesque ExtraBold" pitchFamily="34" charset="0"/>
-                <a:ea typeface="Bricolage Grotesque ExtraBold" pitchFamily="34" charset="-122"/>
-                <a:cs typeface="Bricolage Grotesque ExtraBold" pitchFamily="34" charset="-120"/>
-              </a:rPr>
-              <a:t>Acetylcholine</a:t>
-            </a:r>
-            <a:endParaRPr lang="en-US" sz="4200" dirty="0"/>
-          </a:p>
-        </p:txBody>
-      </p:sp>
-      <p:sp>
-        <p:nvSpPr>
-          <p:cNvPr id="6" name="Text 4"/>
-          <p:cNvSpPr/>
-          <p:nvPr/>
-        </p:nvSpPr>
-        <p:spPr>
-          <a:xfrm>
-            <a:off x="1371600" y="4286250"/>
-            <a:ext cx="7143750" cy="3143250"/>
-          </a:xfrm>
-          <a:prstGeom prst="rect">
-            <a:avLst/>
-          </a:prstGeom>
-          <a:noFill/>
-          <a:ln/>
-        </p:spPr>
-        <p:txBody>
-          <a:bodyPr wrap="square" lIns="0" tIns="17002" rIns="0" bIns="-17002" rtlCol="0" anchor="t"/>
-          <a:lstStyle/>
-          <a:p>
-            <a:pPr algn="l" indent="0" marL="0">
-              <a:lnSpc>
-                <a:spcPts val="4095"/>
-              </a:lnSpc>
-              <a:buNone/>
-            </a:pPr>
-            <a:r>
-              <a:rPr lang="en-US" sz="3150" dirty="0" spc="3" kern="0">
-                <a:solidFill>
-                  <a:srgbClr val="F3EEE3"/>
-                </a:solidFill>
-                <a:latin typeface="Be Vietnam Pro" pitchFamily="34" charset="0"/>
-                <a:ea typeface="Be Vietnam Pro" pitchFamily="34" charset="-122"/>
-                <a:cs typeface="Be Vietnam Pro" pitchFamily="34" charset="-120"/>
-              </a:rPr>
-              <a:t>lệnh</a:t>
-            </a:r>
-            <a:r>
-              <a:rPr lang="en-US" sz="3150" dirty="0" spc="2" kern="0">
-                <a:solidFill>
-                  <a:srgbClr val="F3EEE3"/>
-                </a:solidFill>
-                <a:latin typeface="Be Vietnam Pro" pitchFamily="34" charset="0"/>
-                <a:ea typeface="Be Vietnam Pro" pitchFamily="34" charset="-122"/>
-                <a:cs typeface="Be Vietnam Pro" pitchFamily="34" charset="-120"/>
-              </a:rPr>
-              <a:t> cử</a:t>
-            </a:r>
-            <a:r>
-              <a:rPr lang="en-US" sz="3150" dirty="0" spc="12" kern="0">
-                <a:solidFill>
-                  <a:srgbClr val="F3EEE3"/>
-                </a:solidFill>
-                <a:latin typeface="Be Vietnam Pro" pitchFamily="34" charset="0"/>
-                <a:ea typeface="Be Vietnam Pro" pitchFamily="34" charset="-122"/>
-                <a:cs typeface="Be Vietnam Pro" pitchFamily="34" charset="-120"/>
-              </a:rPr>
-              <a:t> động,</a:t>
-            </a:r>
-            <a:r>
-              <a:rPr lang="en-US" sz="3150" dirty="0" spc="1" kern="0">
-                <a:solidFill>
-                  <a:srgbClr val="F3EEE3"/>
-                </a:solidFill>
-                <a:latin typeface="Be Vietnam Pro" pitchFamily="34" charset="0"/>
-                <a:ea typeface="Be Vietnam Pro" pitchFamily="34" charset="-122"/>
-                <a:cs typeface="Be Vietnam Pro" pitchFamily="34" charset="-120"/>
-              </a:rPr>
-              <a:t> chú ý,</a:t>
-            </a:r>
-            <a:r>
-              <a:rPr lang="en-US" sz="3150" dirty="0" spc="13" kern="0">
-                <a:solidFill>
-                  <a:srgbClr val="F3EEE3"/>
-                </a:solidFill>
-                <a:latin typeface="Be Vietnam Pro" pitchFamily="34" charset="0"/>
-                <a:ea typeface="Be Vietnam Pro" pitchFamily="34" charset="-122"/>
-                <a:cs typeface="Be Vietnam Pro" pitchFamily="34" charset="-120"/>
-              </a:rPr>
-              <a:t> trí</a:t>
-            </a:r>
-            <a:r>
-              <a:rPr lang="en-US" sz="3150" dirty="0" spc="2" kern="0">
-                <a:solidFill>
-                  <a:srgbClr val="F3EEE3"/>
-                </a:solidFill>
-                <a:latin typeface="Be Vietnam Pro" pitchFamily="34" charset="0"/>
-                <a:ea typeface="Be Vietnam Pro" pitchFamily="34" charset="-122"/>
-                <a:cs typeface="Be Vietnam Pro" pitchFamily="34" charset="-120"/>
-              </a:rPr>
-              <a:t> nhớ</a:t>
-            </a:r>
-            <a:endParaRPr lang="en-US" sz="3150" dirty="0"/>
-          </a:p>
-        </p:txBody>
-      </p:sp>
-      <p:sp>
-        <p:nvSpPr>
-          <p:cNvPr id="7" name="Shape 5"/>
-          <p:cNvSpPr/>
-          <p:nvPr/>
-        </p:nvSpPr>
-        <p:spPr>
-          <a:xfrm>
-            <a:off x="9315450" y="2857500"/>
-            <a:ext cx="8058150" cy="5334000"/>
-          </a:xfrm>
-          <a:prstGeom prst="roundRect">
-            <a:avLst>
-              <a:gd name="adj" fmla="val 5000"/>
-            </a:avLst>
-          </a:prstGeom>
-          <a:solidFill>
-            <a:srgbClr val="262C4A"/>
-          </a:solidFill>
-          <a:ln/>
-        </p:spPr>
-      </p:sp>
-      <p:sp>
-        <p:nvSpPr>
-          <p:cNvPr id="8" name="Shape 6"/>
-          <p:cNvSpPr/>
-          <p:nvPr/>
-        </p:nvSpPr>
-        <p:spPr>
-          <a:xfrm>
-            <a:off x="9315450" y="2857500"/>
-            <a:ext cx="133350" cy="5334000"/>
-          </a:xfrm>
-          <a:prstGeom prst="roundRect">
-            <a:avLst>
-              <a:gd name="adj" fmla="val 50000"/>
-            </a:avLst>
-          </a:prstGeom>
-          <a:solidFill>
-            <a:srgbClr val="7C93FF"/>
-          </a:solidFill>
-          <a:ln/>
-        </p:spPr>
-      </p:sp>
-      <p:sp>
-        <p:nvSpPr>
-          <p:cNvPr id="9" name="Text 7"/>
-          <p:cNvSpPr/>
-          <p:nvPr/>
-        </p:nvSpPr>
-        <p:spPr>
-          <a:xfrm>
-            <a:off x="9772650" y="3200400"/>
-            <a:ext cx="7143750" cy="952500"/>
-          </a:xfrm>
-          <a:prstGeom prst="rect">
-            <a:avLst/>
-          </a:prstGeom>
-          <a:noFill/>
-          <a:ln/>
-        </p:spPr>
-        <p:txBody>
-          <a:bodyPr wrap="square" lIns="0" tIns="0" rIns="0" bIns="0" rtlCol="0" anchor="t"/>
-          <a:lstStyle/>
-          <a:p>
-            <a:pPr algn="l" indent="0" marL="0">
-              <a:buNone/>
-            </a:pPr>
-            <a:r>
-              <a:rPr lang="en-US" sz="4200" dirty="0" spc="-2" kern="0">
-                <a:solidFill>
-                  <a:srgbClr val="7C93FF"/>
-                </a:solidFill>
-                <a:latin typeface="Bricolage Grotesque ExtraBold" pitchFamily="34" charset="0"/>
-                <a:ea typeface="Bricolage Grotesque ExtraBold" pitchFamily="34" charset="-122"/>
-                <a:cs typeface="Bricolage Grotesque ExtraBold" pitchFamily="34" charset="-120"/>
-              </a:rPr>
-              <a:t>Endorphin</a:t>
-            </a:r>
-            <a:endParaRPr lang="en-US" sz="4200" dirty="0"/>
-          </a:p>
-        </p:txBody>
-      </p:sp>
-      <p:sp>
-        <p:nvSpPr>
-          <p:cNvPr id="10" name="Text 8"/>
-          <p:cNvSpPr/>
-          <p:nvPr/>
-        </p:nvSpPr>
-        <p:spPr>
-          <a:xfrm>
-            <a:off x="9772650" y="4286250"/>
-            <a:ext cx="7143750" cy="3143250"/>
-          </a:xfrm>
-          <a:prstGeom prst="rect">
-            <a:avLst/>
-          </a:prstGeom>
-          <a:noFill/>
-          <a:ln/>
-        </p:spPr>
-        <p:txBody>
-          <a:bodyPr wrap="square" lIns="0" tIns="17002" rIns="0" bIns="-17002" rtlCol="0" anchor="t"/>
-          <a:lstStyle/>
-          <a:p>
-            <a:pPr algn="l" indent="0" marL="0">
-              <a:lnSpc>
-                <a:spcPts val="4095"/>
-              </a:lnSpc>
-              <a:buNone/>
-            </a:pPr>
-            <a:r>
-              <a:rPr lang="en-US" sz="3150" dirty="0" spc="2" kern="0">
-                <a:solidFill>
-                  <a:srgbClr val="F3EEE3"/>
-                </a:solidFill>
-                <a:latin typeface="Be Vietnam Pro" pitchFamily="34" charset="0"/>
-                <a:ea typeface="Be Vietnam Pro" pitchFamily="34" charset="-122"/>
-                <a:cs typeface="Be Vietnam Pro" pitchFamily="34" charset="-120"/>
-              </a:rPr>
-              <a:t>liên</a:t>
-            </a:r>
-            <a:r>
-              <a:rPr lang="en-US" sz="3150" dirty="0" spc="0" kern="0">
-                <a:solidFill>
-                  <a:srgbClr val="F3EEE3"/>
-                </a:solidFill>
-                <a:latin typeface="Be Vietnam Pro" pitchFamily="34" charset="0"/>
-                <a:ea typeface="Be Vietnam Pro" pitchFamily="34" charset="-122"/>
-                <a:cs typeface="Be Vietnam Pro" pitchFamily="34" charset="-120"/>
-              </a:rPr>
-              <a:t> quan</a:t>
-            </a:r>
-            <a:r>
-              <a:rPr lang="en-US" sz="3150" dirty="0" spc="18" kern="0">
-                <a:solidFill>
-                  <a:srgbClr val="F3EEE3"/>
-                </a:solidFill>
-                <a:latin typeface="Be Vietnam Pro" pitchFamily="34" charset="0"/>
-                <a:ea typeface="Be Vietnam Pro" pitchFamily="34" charset="-122"/>
-                <a:cs typeface="Be Vietnam Pro" pitchFamily="34" charset="-120"/>
-              </a:rPr>
-              <a:t> đến</a:t>
-            </a:r>
-            <a:r>
-              <a:rPr lang="en-US" sz="3150" dirty="0" spc="-2" kern="0">
-                <a:solidFill>
-                  <a:srgbClr val="F3EEE3"/>
-                </a:solidFill>
-                <a:latin typeface="Be Vietnam Pro" pitchFamily="34" charset="0"/>
-                <a:ea typeface="Be Vietnam Pro" pitchFamily="34" charset="-122"/>
-                <a:cs typeface="Be Vietnam Pro" pitchFamily="34" charset="-120"/>
-              </a:rPr>
-              <a:t> giảm</a:t>
-            </a:r>
-            <a:r>
-              <a:rPr lang="en-US" sz="3150" dirty="0" spc="13" kern="0">
-                <a:solidFill>
-                  <a:srgbClr val="F3EEE3"/>
-                </a:solidFill>
-                <a:latin typeface="Be Vietnam Pro" pitchFamily="34" charset="0"/>
-                <a:ea typeface="Be Vietnam Pro" pitchFamily="34" charset="-122"/>
-                <a:cs typeface="Be Vietnam Pro" pitchFamily="34" charset="-120"/>
-              </a:rPr>
-              <a:t> đau</a:t>
-            </a:r>
-            <a:endParaRPr lang="en-US" sz="3150" dirty="0"/>
-          </a:p>
-        </p:txBody>
-      </p:sp>
-      <p:sp>
-        <p:nvSpPr>
-          <p:cNvPr id="11" name="Text 9"/>
-          <p:cNvSpPr/>
-          <p:nvPr/>
-        </p:nvSpPr>
-        <p:spPr>
-          <a:xfrm>
-            <a:off x="914400" y="8991600"/>
-            <a:ext cx="16459200" cy="342900"/>
+          <p:cNvPr id="3" name="Text 1"/>
+          <p:cNvSpPr/>
+          <p:nvPr/>
+        </p:nvSpPr>
+        <p:spPr>
+          <a:xfrm>
+            <a:off x="914400" y="2667000"/>
+            <a:ext cx="1619250" cy="1428750"/>
           </a:xfrm>
           <a:prstGeom prst="rect">
             <a:avLst/>
@@ -20796,424 +22445,52 @@
               <a:buNone/>
             </a:pPr>
             <a:r>
-              <a:rPr lang="en-US" sz="1800" dirty="0" spc="-2" kern="0">
-                <a:solidFill>
-                  <a:srgbClr val="9AA0B5"/>
-                </a:solidFill>
-                <a:latin typeface="Be Vietnam Pro" pitchFamily="34" charset="0"/>
-                <a:ea typeface="Be Vietnam Pro" pitchFamily="34" charset="-122"/>
-                <a:cs typeface="Be Vietnam Pro" pitchFamily="34" charset="-120"/>
-              </a:rPr>
-              <a:t>Nguồn:</a:t>
-            </a:r>
-            <a:r>
-              <a:rPr lang="en-US" sz="1800" dirty="0" spc="3" kern="0">
-                <a:solidFill>
-                  <a:srgbClr val="9AA0B5"/>
-                </a:solidFill>
-                <a:latin typeface="Be Vietnam Pro" pitchFamily="34" charset="0"/>
-                <a:ea typeface="Be Vietnam Pro" pitchFamily="34" charset="-122"/>
-                <a:cs typeface="Be Vietnam Pro" pitchFamily="34" charset="-120"/>
-              </a:rPr>
-              <a:t> [S1]</a:t>
-            </a:r>
-            <a:r>
-              <a:rPr lang="en-US" sz="1800" dirty="0" spc="1" kern="0">
-                <a:solidFill>
-                  <a:srgbClr val="9AA0B5"/>
-                </a:solidFill>
-                <a:latin typeface="Be Vietnam Pro" pitchFamily="34" charset="0"/>
-                <a:ea typeface="Be Vietnam Pro" pitchFamily="34" charset="-122"/>
-                <a:cs typeface="Be Vietnam Pro" pitchFamily="34" charset="-120"/>
-              </a:rPr>
-              <a:t> [S2]</a:t>
-            </a:r>
-            <a:endParaRPr lang="en-US" sz="1800" dirty="0"/>
+              <a:rPr lang="en-US" sz="8700" dirty="0" spc="-3" kern="0">
+                <a:solidFill>
+                  <a:srgbClr val="E8472B"/>
+                </a:solidFill>
+                <a:latin typeface="Bricolage Grotesque ExtraBold" pitchFamily="34" charset="0"/>
+                <a:ea typeface="Bricolage Grotesque ExtraBold" pitchFamily="34" charset="-122"/>
+                <a:cs typeface="Bricolage Grotesque ExtraBold" pitchFamily="34" charset="-120"/>
+              </a:rPr>
+              <a:t>1</a:t>
+            </a:r>
+            <a:endParaRPr lang="en-US" sz="8700" dirty="0"/>
           </a:p>
         </p:txBody>
       </p:sp>
       <p:sp>
         <p:nvSpPr>
-          <p:cNvPr id="12" name="Shape 10"/>
-          <p:cNvSpPr/>
-          <p:nvPr/>
-        </p:nvSpPr>
-        <p:spPr>
-          <a:xfrm>
-            <a:off x="942975" y="9563100"/>
-            <a:ext cx="114300" cy="114300"/>
-          </a:xfrm>
-          <a:prstGeom prst="ellipse">
-            <a:avLst/>
-          </a:prstGeom>
-          <a:solidFill>
-            <a:srgbClr val="F3EEE3">
-              <a:alpha val="28000"/>
-            </a:srgbClr>
-          </a:solidFill>
-          <a:ln/>
-        </p:spPr>
-      </p:sp>
-      <p:sp>
-        <p:nvSpPr>
-          <p:cNvPr id="13" name="Shape 11"/>
-          <p:cNvSpPr/>
-          <p:nvPr/>
-        </p:nvSpPr>
-        <p:spPr>
-          <a:xfrm>
-            <a:off x="1171575" y="9563100"/>
-            <a:ext cx="114300" cy="114300"/>
-          </a:xfrm>
-          <a:prstGeom prst="ellipse">
-            <a:avLst/>
-          </a:prstGeom>
-          <a:solidFill>
-            <a:srgbClr val="F3EEE3">
-              <a:alpha val="28000"/>
-            </a:srgbClr>
-          </a:solidFill>
-          <a:ln/>
-        </p:spPr>
-      </p:sp>
-      <p:sp>
-        <p:nvSpPr>
-          <p:cNvPr id="14" name="Shape 12"/>
-          <p:cNvSpPr/>
-          <p:nvPr/>
-        </p:nvSpPr>
-        <p:spPr>
-          <a:xfrm>
-            <a:off x="1400175" y="9563100"/>
-            <a:ext cx="114300" cy="114300"/>
-          </a:xfrm>
-          <a:prstGeom prst="ellipse">
-            <a:avLst/>
-          </a:prstGeom>
-          <a:solidFill>
-            <a:srgbClr val="F3EEE3">
-              <a:alpha val="28000"/>
-            </a:srgbClr>
-          </a:solidFill>
-          <a:ln/>
-        </p:spPr>
-      </p:sp>
-      <p:sp>
-        <p:nvSpPr>
-          <p:cNvPr id="15" name="Shape 13"/>
-          <p:cNvSpPr/>
-          <p:nvPr/>
-        </p:nvSpPr>
-        <p:spPr>
-          <a:xfrm>
-            <a:off x="1628775" y="9563100"/>
-            <a:ext cx="114300" cy="114300"/>
-          </a:xfrm>
-          <a:prstGeom prst="ellipse">
-            <a:avLst/>
-          </a:prstGeom>
-          <a:solidFill>
-            <a:srgbClr val="F3EEE3">
-              <a:alpha val="28000"/>
-            </a:srgbClr>
-          </a:solidFill>
-          <a:ln/>
-        </p:spPr>
-      </p:sp>
-      <p:sp>
-        <p:nvSpPr>
-          <p:cNvPr id="16" name="Shape 14"/>
-          <p:cNvSpPr/>
-          <p:nvPr/>
-        </p:nvSpPr>
-        <p:spPr>
-          <a:xfrm>
-            <a:off x="1857375" y="9563100"/>
-            <a:ext cx="114300" cy="114300"/>
-          </a:xfrm>
-          <a:prstGeom prst="ellipse">
-            <a:avLst/>
-          </a:prstGeom>
-          <a:solidFill>
-            <a:srgbClr val="F3EEE3">
-              <a:alpha val="28000"/>
-            </a:srgbClr>
-          </a:solidFill>
-          <a:ln/>
-        </p:spPr>
-      </p:sp>
-      <p:sp>
-        <p:nvSpPr>
-          <p:cNvPr id="17" name="Shape 15"/>
-          <p:cNvSpPr/>
-          <p:nvPr/>
-        </p:nvSpPr>
-        <p:spPr>
-          <a:xfrm>
-            <a:off x="2085975" y="9563100"/>
-            <a:ext cx="114300" cy="114300"/>
-          </a:xfrm>
-          <a:prstGeom prst="ellipse">
-            <a:avLst/>
-          </a:prstGeom>
-          <a:solidFill>
-            <a:srgbClr val="F3EEE3">
-              <a:alpha val="28000"/>
-            </a:srgbClr>
-          </a:solidFill>
-          <a:ln/>
-        </p:spPr>
-      </p:sp>
-      <p:sp>
-        <p:nvSpPr>
-          <p:cNvPr id="18" name="Shape 16"/>
-          <p:cNvSpPr/>
-          <p:nvPr/>
-        </p:nvSpPr>
-        <p:spPr>
-          <a:xfrm>
-            <a:off x="2314575" y="9563100"/>
-            <a:ext cx="114300" cy="114300"/>
-          </a:xfrm>
-          <a:prstGeom prst="ellipse">
-            <a:avLst/>
-          </a:prstGeom>
-          <a:solidFill>
-            <a:srgbClr val="F3EEE3">
-              <a:alpha val="28000"/>
-            </a:srgbClr>
-          </a:solidFill>
-          <a:ln/>
-        </p:spPr>
-      </p:sp>
-      <p:sp>
-        <p:nvSpPr>
-          <p:cNvPr id="19" name="Shape 17"/>
-          <p:cNvSpPr/>
-          <p:nvPr/>
-        </p:nvSpPr>
-        <p:spPr>
-          <a:xfrm>
-            <a:off x="2543175" y="9563100"/>
-            <a:ext cx="114300" cy="114300"/>
-          </a:xfrm>
-          <a:prstGeom prst="ellipse">
-            <a:avLst/>
-          </a:prstGeom>
-          <a:solidFill>
-            <a:srgbClr val="F3EEE3">
-              <a:alpha val="28000"/>
-            </a:srgbClr>
-          </a:solidFill>
-          <a:ln/>
-        </p:spPr>
-      </p:sp>
-      <p:sp>
-        <p:nvSpPr>
-          <p:cNvPr id="20" name="Shape 18"/>
-          <p:cNvSpPr/>
-          <p:nvPr/>
-        </p:nvSpPr>
-        <p:spPr>
-          <a:xfrm>
-            <a:off x="2752725" y="9544050"/>
-            <a:ext cx="152400" cy="152400"/>
-          </a:xfrm>
-          <a:prstGeom prst="ellipse">
-            <a:avLst/>
-          </a:prstGeom>
-          <a:solidFill>
-            <a:srgbClr val="FF6A4D"/>
-          </a:solidFill>
-          <a:ln/>
-        </p:spPr>
-      </p:sp>
-      <p:sp>
-        <p:nvSpPr>
-          <p:cNvPr id="21" name="Shape 19"/>
-          <p:cNvSpPr/>
-          <p:nvPr/>
-        </p:nvSpPr>
-        <p:spPr>
-          <a:xfrm>
-            <a:off x="3000375" y="9563100"/>
-            <a:ext cx="114300" cy="114300"/>
-          </a:xfrm>
-          <a:prstGeom prst="ellipse">
-            <a:avLst/>
-          </a:prstGeom>
-          <a:solidFill>
-            <a:srgbClr val="F3EEE3">
-              <a:alpha val="28000"/>
-            </a:srgbClr>
-          </a:solidFill>
-          <a:ln/>
-        </p:spPr>
-      </p:sp>
-      <p:sp>
-        <p:nvSpPr>
-          <p:cNvPr id="22" name="Shape 20"/>
-          <p:cNvSpPr/>
-          <p:nvPr/>
-        </p:nvSpPr>
-        <p:spPr>
-          <a:xfrm>
-            <a:off x="3228975" y="9563100"/>
-            <a:ext cx="114300" cy="114300"/>
-          </a:xfrm>
-          <a:prstGeom prst="ellipse">
-            <a:avLst/>
-          </a:prstGeom>
-          <a:solidFill>
-            <a:srgbClr val="F3EEE3">
-              <a:alpha val="28000"/>
-            </a:srgbClr>
-          </a:solidFill>
-          <a:ln/>
-        </p:spPr>
-      </p:sp>
-      <p:sp>
-        <p:nvSpPr>
-          <p:cNvPr id="23" name="Shape 21"/>
-          <p:cNvSpPr/>
-          <p:nvPr/>
-        </p:nvSpPr>
-        <p:spPr>
-          <a:xfrm>
-            <a:off x="3457575" y="9563100"/>
-            <a:ext cx="114300" cy="114300"/>
-          </a:xfrm>
-          <a:prstGeom prst="ellipse">
-            <a:avLst/>
-          </a:prstGeom>
-          <a:solidFill>
-            <a:srgbClr val="F3EEE3">
-              <a:alpha val="28000"/>
-            </a:srgbClr>
-          </a:solidFill>
-          <a:ln/>
-        </p:spPr>
-      </p:sp>
-      <p:sp>
-        <p:nvSpPr>
-          <p:cNvPr id="24" name="Shape 22"/>
-          <p:cNvSpPr/>
-          <p:nvPr/>
-        </p:nvSpPr>
-        <p:spPr>
-          <a:xfrm>
-            <a:off x="3686175" y="9563100"/>
-            <a:ext cx="114300" cy="114300"/>
-          </a:xfrm>
-          <a:prstGeom prst="ellipse">
-            <a:avLst/>
-          </a:prstGeom>
-          <a:solidFill>
-            <a:srgbClr val="F3EEE3">
-              <a:alpha val="28000"/>
-            </a:srgbClr>
-          </a:solidFill>
-          <a:ln/>
-        </p:spPr>
-      </p:sp>
-      <p:sp>
-        <p:nvSpPr>
-          <p:cNvPr id="25" name="Shape 23"/>
-          <p:cNvSpPr/>
-          <p:nvPr/>
-        </p:nvSpPr>
-        <p:spPr>
-          <a:xfrm>
-            <a:off x="3914775" y="9563100"/>
-            <a:ext cx="114300" cy="114300"/>
-          </a:xfrm>
-          <a:prstGeom prst="ellipse">
-            <a:avLst/>
-          </a:prstGeom>
-          <a:solidFill>
-            <a:srgbClr val="F3EEE3">
-              <a:alpha val="28000"/>
-            </a:srgbClr>
-          </a:solidFill>
-          <a:ln/>
-        </p:spPr>
-      </p:sp>
-      <p:sp>
-        <p:nvSpPr>
-          <p:cNvPr id="26" name="Shape 24"/>
-          <p:cNvSpPr/>
-          <p:nvPr/>
-        </p:nvSpPr>
-        <p:spPr>
-          <a:xfrm>
-            <a:off x="4143375" y="9563100"/>
-            <a:ext cx="114300" cy="114300"/>
-          </a:xfrm>
-          <a:prstGeom prst="ellipse">
-            <a:avLst/>
-          </a:prstGeom>
-          <a:solidFill>
-            <a:srgbClr val="F3EEE3">
-              <a:alpha val="28000"/>
-            </a:srgbClr>
-          </a:solidFill>
-          <a:ln/>
-        </p:spPr>
-      </p:sp>
-      <p:sp>
-        <p:nvSpPr>
-          <p:cNvPr id="27" name="Shape 25"/>
-          <p:cNvSpPr/>
-          <p:nvPr/>
-        </p:nvSpPr>
-        <p:spPr>
-          <a:xfrm>
-            <a:off x="4371975" y="9563100"/>
-            <a:ext cx="114300" cy="114300"/>
-          </a:xfrm>
-          <a:prstGeom prst="ellipse">
-            <a:avLst/>
-          </a:prstGeom>
-          <a:solidFill>
-            <a:srgbClr val="F3EEE3">
-              <a:alpha val="28000"/>
-            </a:srgbClr>
-          </a:solidFill>
-          <a:ln/>
-        </p:spPr>
-      </p:sp>
-      <p:sp>
-        <p:nvSpPr>
-          <p:cNvPr id="28" name="Shape 26"/>
-          <p:cNvSpPr/>
-          <p:nvPr/>
-        </p:nvSpPr>
-        <p:spPr>
-          <a:xfrm>
-            <a:off x="4600575" y="9563100"/>
-            <a:ext cx="114300" cy="114300"/>
-          </a:xfrm>
-          <a:prstGeom prst="ellipse">
-            <a:avLst/>
-          </a:prstGeom>
-          <a:solidFill>
-            <a:srgbClr val="F3EEE3">
-              <a:alpha val="28000"/>
-            </a:srgbClr>
-          </a:solidFill>
-          <a:ln/>
-        </p:spPr>
-      </p:sp>
-      <p:sp>
-        <p:nvSpPr>
-          <p:cNvPr id="29" name="Text 27"/>
-          <p:cNvSpPr/>
-          <p:nvPr/>
-        </p:nvSpPr>
-        <p:spPr>
-          <a:xfrm>
-            <a:off x="5029200" y="9467850"/>
-            <a:ext cx="6667500" cy="304800"/>
+          <p:cNvPr id="4" name="Shape 2"/>
+          <p:cNvSpPr/>
+          <p:nvPr/>
+        </p:nvSpPr>
+        <p:spPr>
+          <a:xfrm>
+            <a:off x="2724150" y="2762250"/>
+            <a:ext cx="14649450" cy="1238250"/>
+          </a:xfrm>
+          <a:prstGeom prst="roundRect">
+            <a:avLst>
+              <a:gd name="adj" fmla="val 15385"/>
+            </a:avLst>
+          </a:prstGeom>
+          <a:solidFill>
+            <a:srgbClr val="E8E0CF"/>
+          </a:solidFill>
+          <a:ln/>
+        </p:spPr>
+      </p:sp>
+      <p:sp>
+        <p:nvSpPr>
+          <p:cNvPr id="5" name="Text 3"/>
+          <p:cNvSpPr/>
+          <p:nvPr/>
+        </p:nvSpPr>
+        <p:spPr>
+          <a:xfrm>
+            <a:off x="3105150" y="2762250"/>
+            <a:ext cx="14001750" cy="1238250"/>
           </a:xfrm>
           <a:prstGeom prst="rect">
             <a:avLst/>
@@ -21229,59 +22506,331 @@
               <a:buNone/>
             </a:pPr>
             <a:r>
-              <a:rPr lang="en-US" sz="1800" dirty="0" spc="-6" kern="0">
-                <a:solidFill>
-                  <a:srgbClr val="9AA0B5"/>
-                </a:solidFill>
-                <a:latin typeface="Be Vietnam Pro" pitchFamily="34" charset="0"/>
-                <a:ea typeface="Be Vietnam Pro" pitchFamily="34" charset="-122"/>
-                <a:cs typeface="Be Vietnam Pro" pitchFamily="34" charset="-120"/>
-              </a:rPr>
-              <a:t>Multiple-report</a:t>
-            </a:r>
-            <a:r>
-              <a:rPr lang="en-US" sz="1800" dirty="0" spc="-1" kern="0">
-                <a:solidFill>
-                  <a:srgbClr val="9AA0B5"/>
-                </a:solidFill>
-                <a:latin typeface="Be Vietnam Pro" pitchFamily="34" charset="0"/>
-                <a:ea typeface="Be Vietnam Pro" pitchFamily="34" charset="-122"/>
-                <a:cs typeface="Be Vietnam Pro" pitchFamily="34" charset="-120"/>
-              </a:rPr>
-              <a:t> ·</a:t>
-            </a:r>
-            <a:r>
-              <a:rPr lang="en-US" sz="1800" dirty="0" spc="-31" kern="0">
-                <a:solidFill>
-                  <a:srgbClr val="9AA0B5"/>
-                </a:solidFill>
-                <a:latin typeface="Be Vietnam Pro" pitchFamily="34" charset="0"/>
-                <a:ea typeface="Be Vietnam Pro" pitchFamily="34" charset="-122"/>
-                <a:cs typeface="Be Vietnam Pro" pitchFamily="34" charset="-120"/>
-              </a:rPr>
-              <a:t> L03</a:t>
-            </a:r>
-            <a:r>
-              <a:rPr lang="en-US" sz="1800" dirty="0" spc="0" kern="0">
-                <a:solidFill>
-                  <a:srgbClr val="9AA0B5"/>
-                </a:solidFill>
-                <a:latin typeface="Be Vietnam Pro" pitchFamily="34" charset="0"/>
-                <a:ea typeface="Be Vietnam Pro" pitchFamily="34" charset="-122"/>
-                <a:cs typeface="Be Vietnam Pro" pitchFamily="34" charset="-120"/>
-              </a:rPr>
-              <a:t> ·</a:t>
-            </a:r>
-            <a:r>
-              <a:rPr lang="en-US" sz="1800" dirty="0" spc="2" kern="0">
-                <a:solidFill>
-                  <a:srgbClr val="9AA0B5"/>
-                </a:solidFill>
-                <a:latin typeface="Be Vietnam Pro" pitchFamily="34" charset="0"/>
-                <a:ea typeface="Be Vietnam Pro" pitchFamily="34" charset="-122"/>
-                <a:cs typeface="Be Vietnam Pro" pitchFamily="34" charset="-120"/>
-              </a:rPr>
-              <a:t> 09/17</a:t>
+              <a:rPr lang="en-US" sz="3000" dirty="0" spc="-3" kern="0">
+                <a:solidFill>
+                  <a:srgbClr val="14161C"/>
+                </a:solidFill>
+                <a:latin typeface="Be Vietnam Pro SemiBold" pitchFamily="34" charset="0"/>
+                <a:ea typeface="Be Vietnam Pro SemiBold" pitchFamily="34" charset="-122"/>
+                <a:cs typeface="Be Vietnam Pro SemiBold" pitchFamily="34" charset="-120"/>
+              </a:rPr>
+              <a:t>Tỉnh táo</a:t>
+            </a:r>
+            <a:endParaRPr lang="en-US" sz="3000" dirty="0"/>
+          </a:p>
+        </p:txBody>
+      </p:sp>
+      <p:sp>
+        <p:nvSpPr>
+          <p:cNvPr id="6" name="Text 4"/>
+          <p:cNvSpPr/>
+          <p:nvPr/>
+        </p:nvSpPr>
+        <p:spPr>
+          <a:xfrm>
+            <a:off x="914400" y="4210050"/>
+            <a:ext cx="1619250" cy="1428750"/>
+          </a:xfrm>
+          <a:prstGeom prst="rect">
+            <a:avLst/>
+          </a:prstGeom>
+          <a:noFill/>
+          <a:ln/>
+        </p:spPr>
+        <p:txBody>
+          <a:bodyPr wrap="square" lIns="0" tIns="0" rIns="0" bIns="0" rtlCol="0" anchor="ctr"/>
+          <a:lstStyle/>
+          <a:p>
+            <a:pPr algn="l" indent="0" marL="0">
+              <a:buNone/>
+            </a:pPr>
+            <a:r>
+              <a:rPr lang="en-US" sz="8700" dirty="0" spc="6" kern="0">
+                <a:solidFill>
+                  <a:srgbClr val="1F3FD1"/>
+                </a:solidFill>
+                <a:latin typeface="Bricolage Grotesque ExtraBold" pitchFamily="34" charset="0"/>
+                <a:ea typeface="Bricolage Grotesque ExtraBold" pitchFamily="34" charset="-122"/>
+                <a:cs typeface="Bricolage Grotesque ExtraBold" pitchFamily="34" charset="-120"/>
+              </a:rPr>
+              <a:t>2</a:t>
+            </a:r>
+            <a:endParaRPr lang="en-US" sz="8700" dirty="0"/>
+          </a:p>
+        </p:txBody>
+      </p:sp>
+      <p:sp>
+        <p:nvSpPr>
+          <p:cNvPr id="7" name="Shape 5"/>
+          <p:cNvSpPr/>
+          <p:nvPr/>
+        </p:nvSpPr>
+        <p:spPr>
+          <a:xfrm>
+            <a:off x="2724150" y="4305300"/>
+            <a:ext cx="14649450" cy="1238250"/>
+          </a:xfrm>
+          <a:prstGeom prst="roundRect">
+            <a:avLst>
+              <a:gd name="adj" fmla="val 15385"/>
+            </a:avLst>
+          </a:prstGeom>
+          <a:solidFill>
+            <a:srgbClr val="E8E0CF"/>
+          </a:solidFill>
+          <a:ln/>
+        </p:spPr>
+      </p:sp>
+      <p:sp>
+        <p:nvSpPr>
+          <p:cNvPr id="8" name="Text 6"/>
+          <p:cNvSpPr/>
+          <p:nvPr/>
+        </p:nvSpPr>
+        <p:spPr>
+          <a:xfrm>
+            <a:off x="3105150" y="4305300"/>
+            <a:ext cx="14001750" cy="1238250"/>
+          </a:xfrm>
+          <a:prstGeom prst="rect">
+            <a:avLst/>
+          </a:prstGeom>
+          <a:noFill/>
+          <a:ln/>
+        </p:spPr>
+        <p:txBody>
+          <a:bodyPr wrap="square" lIns="0" tIns="0" rIns="0" bIns="0" rtlCol="0" anchor="ctr"/>
+          <a:lstStyle/>
+          <a:p>
+            <a:pPr algn="l" indent="0" marL="0">
+              <a:buNone/>
+            </a:pPr>
+            <a:r>
+              <a:rPr lang="en-US" sz="3000" dirty="0" spc="-3" kern="0">
+                <a:solidFill>
+                  <a:srgbClr val="14161C"/>
+                </a:solidFill>
+                <a:latin typeface="Be Vietnam Pro SemiBold" pitchFamily="34" charset="0"/>
+                <a:ea typeface="Be Vietnam Pro SemiBold" pitchFamily="34" charset="-122"/>
+                <a:cs typeface="Be Vietnam Pro SemiBold" pitchFamily="34" charset="-120"/>
+              </a:rPr>
+              <a:t>Chú</a:t>
+            </a:r>
+            <a:r>
+              <a:rPr lang="en-US" sz="3000" dirty="0" spc="1" kern="0">
+                <a:solidFill>
+                  <a:srgbClr val="14161C"/>
+                </a:solidFill>
+                <a:latin typeface="Be Vietnam Pro SemiBold" pitchFamily="34" charset="0"/>
+                <a:ea typeface="Be Vietnam Pro SemiBold" pitchFamily="34" charset="-122"/>
+                <a:cs typeface="Be Vietnam Pro SemiBold" pitchFamily="34" charset="-120"/>
+              </a:rPr>
+              <a:t> ý</a:t>
+            </a:r>
+            <a:endParaRPr lang="en-US" sz="3000" dirty="0"/>
+          </a:p>
+        </p:txBody>
+      </p:sp>
+      <p:sp>
+        <p:nvSpPr>
+          <p:cNvPr id="9" name="Text 7"/>
+          <p:cNvSpPr/>
+          <p:nvPr/>
+        </p:nvSpPr>
+        <p:spPr>
+          <a:xfrm>
+            <a:off x="914400" y="5753100"/>
+            <a:ext cx="1619250" cy="1428750"/>
+          </a:xfrm>
+          <a:prstGeom prst="rect">
+            <a:avLst/>
+          </a:prstGeom>
+          <a:noFill/>
+          <a:ln/>
+        </p:spPr>
+        <p:txBody>
+          <a:bodyPr wrap="square" lIns="0" tIns="0" rIns="0" bIns="0" rtlCol="0" anchor="ctr"/>
+          <a:lstStyle/>
+          <a:p>
+            <a:pPr algn="l" indent="0" marL="0">
+              <a:buNone/>
+            </a:pPr>
+            <a:r>
+              <a:rPr lang="en-US" sz="8700" dirty="0" spc="3" kern="0">
+                <a:solidFill>
+                  <a:srgbClr val="B45309"/>
+                </a:solidFill>
+                <a:latin typeface="Bricolage Grotesque ExtraBold" pitchFamily="34" charset="0"/>
+                <a:ea typeface="Bricolage Grotesque ExtraBold" pitchFamily="34" charset="-122"/>
+                <a:cs typeface="Bricolage Grotesque ExtraBold" pitchFamily="34" charset="-120"/>
+              </a:rPr>
+              <a:t>3</a:t>
+            </a:r>
+            <a:endParaRPr lang="en-US" sz="8700" dirty="0"/>
+          </a:p>
+        </p:txBody>
+      </p:sp>
+      <p:sp>
+        <p:nvSpPr>
+          <p:cNvPr id="10" name="Shape 8"/>
+          <p:cNvSpPr/>
+          <p:nvPr/>
+        </p:nvSpPr>
+        <p:spPr>
+          <a:xfrm>
+            <a:off x="2724150" y="5848350"/>
+            <a:ext cx="14649450" cy="1238250"/>
+          </a:xfrm>
+          <a:prstGeom prst="roundRect">
+            <a:avLst>
+              <a:gd name="adj" fmla="val 15385"/>
+            </a:avLst>
+          </a:prstGeom>
+          <a:solidFill>
+            <a:srgbClr val="E8E0CF"/>
+          </a:solidFill>
+          <a:ln/>
+        </p:spPr>
+      </p:sp>
+      <p:sp>
+        <p:nvSpPr>
+          <p:cNvPr id="11" name="Text 9"/>
+          <p:cNvSpPr/>
+          <p:nvPr/>
+        </p:nvSpPr>
+        <p:spPr>
+          <a:xfrm>
+            <a:off x="3105150" y="5848350"/>
+            <a:ext cx="14001750" cy="1238250"/>
+          </a:xfrm>
+          <a:prstGeom prst="rect">
+            <a:avLst/>
+          </a:prstGeom>
+          <a:noFill/>
+          <a:ln/>
+        </p:spPr>
+        <p:txBody>
+          <a:bodyPr wrap="square" lIns="0" tIns="0" rIns="0" bIns="0" rtlCol="0" anchor="ctr"/>
+          <a:lstStyle/>
+          <a:p>
+            <a:pPr algn="l" indent="0" marL="0">
+              <a:buNone/>
+            </a:pPr>
+            <a:r>
+              <a:rPr lang="en-US" sz="3000" dirty="0" spc="-1" kern="0">
+                <a:solidFill>
+                  <a:srgbClr val="14161C"/>
+                </a:solidFill>
+                <a:latin typeface="Be Vietnam Pro SemiBold" pitchFamily="34" charset="0"/>
+                <a:ea typeface="Be Vietnam Pro SemiBold" pitchFamily="34" charset="-122"/>
+                <a:cs typeface="Be Vietnam Pro SemiBold" pitchFamily="34" charset="-120"/>
+              </a:rPr>
+              <a:t>Phản</a:t>
+            </a:r>
+            <a:r>
+              <a:rPr lang="en-US" sz="3000" dirty="0" spc="31" kern="0">
+                <a:solidFill>
+                  <a:srgbClr val="14161C"/>
+                </a:solidFill>
+                <a:latin typeface="Be Vietnam Pro SemiBold" pitchFamily="34" charset="0"/>
+                <a:ea typeface="Be Vietnam Pro SemiBold" pitchFamily="34" charset="-122"/>
+                <a:cs typeface="Be Vietnam Pro SemiBold" pitchFamily="34" charset="-120"/>
+              </a:rPr>
+              <a:t> ứng</a:t>
+            </a:r>
+            <a:r>
+              <a:rPr lang="en-US" sz="3000" dirty="0" spc="-10" kern="0">
+                <a:solidFill>
+                  <a:srgbClr val="14161C"/>
+                </a:solidFill>
+                <a:latin typeface="Be Vietnam Pro SemiBold" pitchFamily="34" charset="0"/>
+                <a:ea typeface="Be Vietnam Pro SemiBold" pitchFamily="34" charset="-122"/>
+                <a:cs typeface="Be Vietnam Pro SemiBold" pitchFamily="34" charset="-120"/>
+              </a:rPr>
+              <a:t> với</a:t>
+            </a:r>
+            <a:r>
+              <a:rPr lang="en-US" sz="3000" dirty="0" spc="-4" kern="0">
+                <a:solidFill>
+                  <a:srgbClr val="14161C"/>
+                </a:solidFill>
+                <a:latin typeface="Be Vietnam Pro SemiBold" pitchFamily="34" charset="0"/>
+                <a:ea typeface="Be Vietnam Pro SemiBold" pitchFamily="34" charset="-122"/>
+                <a:cs typeface="Be Vietnam Pro SemiBold" pitchFamily="34" charset="-120"/>
+              </a:rPr>
+              <a:t> căng</a:t>
+            </a:r>
+            <a:r>
+              <a:rPr lang="en-US" sz="3000" dirty="0" spc="-2" kern="0">
+                <a:solidFill>
+                  <a:srgbClr val="14161C"/>
+                </a:solidFill>
+                <a:latin typeface="Be Vietnam Pro SemiBold" pitchFamily="34" charset="0"/>
+                <a:ea typeface="Be Vietnam Pro SemiBold" pitchFamily="34" charset="-122"/>
+                <a:cs typeface="Be Vietnam Pro SemiBold" pitchFamily="34" charset="-120"/>
+              </a:rPr>
+              <a:t> thẳng</a:t>
+            </a:r>
+            <a:endParaRPr lang="en-US" sz="3000" dirty="0"/>
+          </a:p>
+        </p:txBody>
+      </p:sp>
+      <p:sp>
+        <p:nvSpPr>
+          <p:cNvPr id="12" name="Text 10"/>
+          <p:cNvSpPr/>
+          <p:nvPr/>
+        </p:nvSpPr>
+        <p:spPr>
+          <a:xfrm>
+            <a:off x="914400" y="8991600"/>
+            <a:ext cx="16459200" cy="342900"/>
+          </a:xfrm>
+          <a:prstGeom prst="rect">
+            <a:avLst/>
+          </a:prstGeom>
+          <a:noFill/>
+          <a:ln/>
+        </p:spPr>
+        <p:txBody>
+          <a:bodyPr wrap="square" lIns="0" tIns="0" rIns="0" bIns="0" rtlCol="0" anchor="ctr"/>
+          <a:lstStyle/>
+          <a:p>
+            <a:pPr algn="l" indent="0" marL="0">
+              <a:buNone/>
+            </a:pPr>
+            <a:r>
+              <a:rPr lang="en-US" sz="1800" dirty="0" spc="-2" kern="0">
+                <a:solidFill>
+                  <a:srgbClr val="6B6A66"/>
+                </a:solidFill>
+                <a:latin typeface="Be Vietnam Pro" pitchFamily="34" charset="0"/>
+                <a:ea typeface="Be Vietnam Pro" pitchFamily="34" charset="-122"/>
+                <a:cs typeface="Be Vietnam Pro" pitchFamily="34" charset="-120"/>
+              </a:rPr>
+              <a:t>Nguồn:</a:t>
+            </a:r>
+            <a:r>
+              <a:rPr lang="en-US" sz="1800" dirty="0" spc="3" kern="0">
+                <a:solidFill>
+                  <a:srgbClr val="6B6A66"/>
+                </a:solidFill>
+                <a:latin typeface="Be Vietnam Pro" pitchFamily="34" charset="0"/>
+                <a:ea typeface="Be Vietnam Pro" pitchFamily="34" charset="-122"/>
+                <a:cs typeface="Be Vietnam Pro" pitchFamily="34" charset="-120"/>
+              </a:rPr>
+              <a:t> [S1]</a:t>
+            </a:r>
+            <a:r>
+              <a:rPr lang="en-US" sz="1800" dirty="0" spc="1" kern="0">
+                <a:solidFill>
+                  <a:srgbClr val="6B6A66"/>
+                </a:solidFill>
+                <a:latin typeface="Be Vietnam Pro" pitchFamily="34" charset="0"/>
+                <a:ea typeface="Be Vietnam Pro" pitchFamily="34" charset="-122"/>
+                <a:cs typeface="Be Vietnam Pro" pitchFamily="34" charset="-120"/>
+              </a:rPr>
+              <a:t> [S2]</a:t>
             </a:r>
             <a:endParaRPr lang="en-US" sz="1800" dirty="0"/>
           </a:p>
@@ -21289,7 +22838,484 @@
       </p:sp>
       <p:sp>
         <p:nvSpPr>
+          <p:cNvPr id="13" name="Shape 11"/>
+          <p:cNvSpPr/>
+          <p:nvPr/>
+        </p:nvSpPr>
+        <p:spPr>
+          <a:xfrm>
+            <a:off x="942975" y="9563100"/>
+            <a:ext cx="114300" cy="114300"/>
+          </a:xfrm>
+          <a:prstGeom prst="ellipse">
+            <a:avLst/>
+          </a:prstGeom>
+          <a:solidFill>
+            <a:srgbClr val="14161C">
+              <a:alpha val="28000"/>
+            </a:srgbClr>
+          </a:solidFill>
+          <a:ln/>
+        </p:spPr>
+      </p:sp>
+      <p:sp>
+        <p:nvSpPr>
+          <p:cNvPr id="14" name="Shape 12"/>
+          <p:cNvSpPr/>
+          <p:nvPr/>
+        </p:nvSpPr>
+        <p:spPr>
+          <a:xfrm>
+            <a:off x="1171575" y="9563100"/>
+            <a:ext cx="114300" cy="114300"/>
+          </a:xfrm>
+          <a:prstGeom prst="ellipse">
+            <a:avLst/>
+          </a:prstGeom>
+          <a:solidFill>
+            <a:srgbClr val="14161C">
+              <a:alpha val="28000"/>
+            </a:srgbClr>
+          </a:solidFill>
+          <a:ln/>
+        </p:spPr>
+      </p:sp>
+      <p:sp>
+        <p:nvSpPr>
+          <p:cNvPr id="15" name="Shape 13"/>
+          <p:cNvSpPr/>
+          <p:nvPr/>
+        </p:nvSpPr>
+        <p:spPr>
+          <a:xfrm>
+            <a:off x="1400175" y="9563100"/>
+            <a:ext cx="114300" cy="114300"/>
+          </a:xfrm>
+          <a:prstGeom prst="ellipse">
+            <a:avLst/>
+          </a:prstGeom>
+          <a:solidFill>
+            <a:srgbClr val="14161C">
+              <a:alpha val="28000"/>
+            </a:srgbClr>
+          </a:solidFill>
+          <a:ln/>
+        </p:spPr>
+      </p:sp>
+      <p:sp>
+        <p:nvSpPr>
+          <p:cNvPr id="16" name="Shape 14"/>
+          <p:cNvSpPr/>
+          <p:nvPr/>
+        </p:nvSpPr>
+        <p:spPr>
+          <a:xfrm>
+            <a:off x="1628775" y="9563100"/>
+            <a:ext cx="114300" cy="114300"/>
+          </a:xfrm>
+          <a:prstGeom prst="ellipse">
+            <a:avLst/>
+          </a:prstGeom>
+          <a:solidFill>
+            <a:srgbClr val="14161C">
+              <a:alpha val="28000"/>
+            </a:srgbClr>
+          </a:solidFill>
+          <a:ln/>
+        </p:spPr>
+      </p:sp>
+      <p:sp>
+        <p:nvSpPr>
+          <p:cNvPr id="17" name="Shape 15"/>
+          <p:cNvSpPr/>
+          <p:nvPr/>
+        </p:nvSpPr>
+        <p:spPr>
+          <a:xfrm>
+            <a:off x="1857375" y="9563100"/>
+            <a:ext cx="114300" cy="114300"/>
+          </a:xfrm>
+          <a:prstGeom prst="ellipse">
+            <a:avLst/>
+          </a:prstGeom>
+          <a:solidFill>
+            <a:srgbClr val="14161C">
+              <a:alpha val="28000"/>
+            </a:srgbClr>
+          </a:solidFill>
+          <a:ln/>
+        </p:spPr>
+      </p:sp>
+      <p:sp>
+        <p:nvSpPr>
+          <p:cNvPr id="18" name="Shape 16"/>
+          <p:cNvSpPr/>
+          <p:nvPr/>
+        </p:nvSpPr>
+        <p:spPr>
+          <a:xfrm>
+            <a:off x="2085975" y="9563100"/>
+            <a:ext cx="114300" cy="114300"/>
+          </a:xfrm>
+          <a:prstGeom prst="ellipse">
+            <a:avLst/>
+          </a:prstGeom>
+          <a:solidFill>
+            <a:srgbClr val="14161C">
+              <a:alpha val="28000"/>
+            </a:srgbClr>
+          </a:solidFill>
+          <a:ln/>
+        </p:spPr>
+      </p:sp>
+      <p:sp>
+        <p:nvSpPr>
+          <p:cNvPr id="19" name="Shape 17"/>
+          <p:cNvSpPr/>
+          <p:nvPr/>
+        </p:nvSpPr>
+        <p:spPr>
+          <a:xfrm>
+            <a:off x="2314575" y="9563100"/>
+            <a:ext cx="114300" cy="114300"/>
+          </a:xfrm>
+          <a:prstGeom prst="ellipse">
+            <a:avLst/>
+          </a:prstGeom>
+          <a:solidFill>
+            <a:srgbClr val="14161C">
+              <a:alpha val="28000"/>
+            </a:srgbClr>
+          </a:solidFill>
+          <a:ln/>
+        </p:spPr>
+      </p:sp>
+      <p:sp>
+        <p:nvSpPr>
+          <p:cNvPr id="20" name="Shape 18"/>
+          <p:cNvSpPr/>
+          <p:nvPr/>
+        </p:nvSpPr>
+        <p:spPr>
+          <a:xfrm>
+            <a:off x="2543175" y="9563100"/>
+            <a:ext cx="114300" cy="114300"/>
+          </a:xfrm>
+          <a:prstGeom prst="ellipse">
+            <a:avLst/>
+          </a:prstGeom>
+          <a:solidFill>
+            <a:srgbClr val="14161C">
+              <a:alpha val="28000"/>
+            </a:srgbClr>
+          </a:solidFill>
+          <a:ln/>
+        </p:spPr>
+      </p:sp>
+      <p:sp>
+        <p:nvSpPr>
+          <p:cNvPr id="21" name="Shape 19"/>
+          <p:cNvSpPr/>
+          <p:nvPr/>
+        </p:nvSpPr>
+        <p:spPr>
+          <a:xfrm>
+            <a:off x="2752725" y="9544050"/>
+            <a:ext cx="152400" cy="152400"/>
+          </a:xfrm>
+          <a:prstGeom prst="ellipse">
+            <a:avLst/>
+          </a:prstGeom>
+          <a:solidFill>
+            <a:srgbClr val="E8472B"/>
+          </a:solidFill>
+          <a:ln/>
+        </p:spPr>
+      </p:sp>
+      <p:sp>
+        <p:nvSpPr>
+          <p:cNvPr id="22" name="Shape 20"/>
+          <p:cNvSpPr/>
+          <p:nvPr/>
+        </p:nvSpPr>
+        <p:spPr>
+          <a:xfrm>
+            <a:off x="3000375" y="9563100"/>
+            <a:ext cx="114300" cy="114300"/>
+          </a:xfrm>
+          <a:prstGeom prst="ellipse">
+            <a:avLst/>
+          </a:prstGeom>
+          <a:solidFill>
+            <a:srgbClr val="14161C">
+              <a:alpha val="28000"/>
+            </a:srgbClr>
+          </a:solidFill>
+          <a:ln/>
+        </p:spPr>
+      </p:sp>
+      <p:sp>
+        <p:nvSpPr>
+          <p:cNvPr id="23" name="Shape 21"/>
+          <p:cNvSpPr/>
+          <p:nvPr/>
+        </p:nvSpPr>
+        <p:spPr>
+          <a:xfrm>
+            <a:off x="3228975" y="9563100"/>
+            <a:ext cx="114300" cy="114300"/>
+          </a:xfrm>
+          <a:prstGeom prst="ellipse">
+            <a:avLst/>
+          </a:prstGeom>
+          <a:solidFill>
+            <a:srgbClr val="14161C">
+              <a:alpha val="28000"/>
+            </a:srgbClr>
+          </a:solidFill>
+          <a:ln/>
+        </p:spPr>
+      </p:sp>
+      <p:sp>
+        <p:nvSpPr>
+          <p:cNvPr id="24" name="Shape 22"/>
+          <p:cNvSpPr/>
+          <p:nvPr/>
+        </p:nvSpPr>
+        <p:spPr>
+          <a:xfrm>
+            <a:off x="3457575" y="9563100"/>
+            <a:ext cx="114300" cy="114300"/>
+          </a:xfrm>
+          <a:prstGeom prst="ellipse">
+            <a:avLst/>
+          </a:prstGeom>
+          <a:solidFill>
+            <a:srgbClr val="14161C">
+              <a:alpha val="28000"/>
+            </a:srgbClr>
+          </a:solidFill>
+          <a:ln/>
+        </p:spPr>
+      </p:sp>
+      <p:sp>
+        <p:nvSpPr>
+          <p:cNvPr id="25" name="Shape 23"/>
+          <p:cNvSpPr/>
+          <p:nvPr/>
+        </p:nvSpPr>
+        <p:spPr>
+          <a:xfrm>
+            <a:off x="3686175" y="9563100"/>
+            <a:ext cx="114300" cy="114300"/>
+          </a:xfrm>
+          <a:prstGeom prst="ellipse">
+            <a:avLst/>
+          </a:prstGeom>
+          <a:solidFill>
+            <a:srgbClr val="14161C">
+              <a:alpha val="28000"/>
+            </a:srgbClr>
+          </a:solidFill>
+          <a:ln/>
+        </p:spPr>
+      </p:sp>
+      <p:sp>
+        <p:nvSpPr>
+          <p:cNvPr id="26" name="Shape 24"/>
+          <p:cNvSpPr/>
+          <p:nvPr/>
+        </p:nvSpPr>
+        <p:spPr>
+          <a:xfrm>
+            <a:off x="3914775" y="9563100"/>
+            <a:ext cx="114300" cy="114300"/>
+          </a:xfrm>
+          <a:prstGeom prst="ellipse">
+            <a:avLst/>
+          </a:prstGeom>
+          <a:solidFill>
+            <a:srgbClr val="14161C">
+              <a:alpha val="28000"/>
+            </a:srgbClr>
+          </a:solidFill>
+          <a:ln/>
+        </p:spPr>
+      </p:sp>
+      <p:sp>
+        <p:nvSpPr>
+          <p:cNvPr id="27" name="Shape 25"/>
+          <p:cNvSpPr/>
+          <p:nvPr/>
+        </p:nvSpPr>
+        <p:spPr>
+          <a:xfrm>
+            <a:off x="4143375" y="9563100"/>
+            <a:ext cx="114300" cy="114300"/>
+          </a:xfrm>
+          <a:prstGeom prst="ellipse">
+            <a:avLst/>
+          </a:prstGeom>
+          <a:solidFill>
+            <a:srgbClr val="14161C">
+              <a:alpha val="28000"/>
+            </a:srgbClr>
+          </a:solidFill>
+          <a:ln/>
+        </p:spPr>
+      </p:sp>
+      <p:sp>
+        <p:nvSpPr>
+          <p:cNvPr id="28" name="Shape 26"/>
+          <p:cNvSpPr/>
+          <p:nvPr/>
+        </p:nvSpPr>
+        <p:spPr>
+          <a:xfrm>
+            <a:off x="4371975" y="9563100"/>
+            <a:ext cx="114300" cy="114300"/>
+          </a:xfrm>
+          <a:prstGeom prst="ellipse">
+            <a:avLst/>
+          </a:prstGeom>
+          <a:solidFill>
+            <a:srgbClr val="14161C">
+              <a:alpha val="28000"/>
+            </a:srgbClr>
+          </a:solidFill>
+          <a:ln/>
+        </p:spPr>
+      </p:sp>
+      <p:sp>
+        <p:nvSpPr>
+          <p:cNvPr id="29" name="Shape 27"/>
+          <p:cNvSpPr/>
+          <p:nvPr/>
+        </p:nvSpPr>
+        <p:spPr>
+          <a:xfrm>
+            <a:off x="4600575" y="9563100"/>
+            <a:ext cx="114300" cy="114300"/>
+          </a:xfrm>
+          <a:prstGeom prst="ellipse">
+            <a:avLst/>
+          </a:prstGeom>
+          <a:solidFill>
+            <a:srgbClr val="14161C">
+              <a:alpha val="28000"/>
+            </a:srgbClr>
+          </a:solidFill>
+          <a:ln/>
+        </p:spPr>
+      </p:sp>
+      <p:sp>
+        <p:nvSpPr>
           <p:cNvPr id="30" name="Shape 28"/>
+          <p:cNvSpPr/>
+          <p:nvPr/>
+        </p:nvSpPr>
+        <p:spPr>
+          <a:xfrm>
+            <a:off x="4829175" y="9563100"/>
+            <a:ext cx="114300" cy="114300"/>
+          </a:xfrm>
+          <a:prstGeom prst="ellipse">
+            <a:avLst/>
+          </a:prstGeom>
+          <a:solidFill>
+            <a:srgbClr val="14161C">
+              <a:alpha val="28000"/>
+            </a:srgbClr>
+          </a:solidFill>
+          <a:ln/>
+        </p:spPr>
+      </p:sp>
+      <p:sp>
+        <p:nvSpPr>
+          <p:cNvPr id="31" name="Text 29"/>
+          <p:cNvSpPr/>
+          <p:nvPr/>
+        </p:nvSpPr>
+        <p:spPr>
+          <a:xfrm>
+            <a:off x="5257800" y="9467850"/>
+            <a:ext cx="6667500" cy="304800"/>
+          </a:xfrm>
+          <a:prstGeom prst="rect">
+            <a:avLst/>
+          </a:prstGeom>
+          <a:noFill/>
+          <a:ln/>
+        </p:spPr>
+        <p:txBody>
+          <a:bodyPr wrap="square" lIns="0" tIns="0" rIns="0" bIns="0" rtlCol="0" anchor="ctr"/>
+          <a:lstStyle/>
+          <a:p>
+            <a:pPr algn="l" indent="0" marL="0">
+              <a:buNone/>
+            </a:pPr>
+            <a:r>
+              <a:rPr lang="en-US" sz="1800" dirty="0" spc="-6" kern="0">
+                <a:solidFill>
+                  <a:srgbClr val="6B6A66"/>
+                </a:solidFill>
+                <a:latin typeface="Be Vietnam Pro" pitchFamily="34" charset="0"/>
+                <a:ea typeface="Be Vietnam Pro" pitchFamily="34" charset="-122"/>
+                <a:cs typeface="Be Vietnam Pro" pitchFamily="34" charset="-120"/>
+              </a:rPr>
+              <a:t>Multiple-report</a:t>
+            </a:r>
+            <a:r>
+              <a:rPr lang="en-US" sz="1800" dirty="0" spc="-1" kern="0">
+                <a:solidFill>
+                  <a:srgbClr val="6B6A66"/>
+                </a:solidFill>
+                <a:latin typeface="Be Vietnam Pro" pitchFamily="34" charset="0"/>
+                <a:ea typeface="Be Vietnam Pro" pitchFamily="34" charset="-122"/>
+                <a:cs typeface="Be Vietnam Pro" pitchFamily="34" charset="-120"/>
+              </a:rPr>
+              <a:t> ·</a:t>
+            </a:r>
+            <a:r>
+              <a:rPr lang="en-US" sz="1800" dirty="0" spc="-31" kern="0">
+                <a:solidFill>
+                  <a:srgbClr val="6B6A66"/>
+                </a:solidFill>
+                <a:latin typeface="Be Vietnam Pro" pitchFamily="34" charset="0"/>
+                <a:ea typeface="Be Vietnam Pro" pitchFamily="34" charset="-122"/>
+                <a:cs typeface="Be Vietnam Pro" pitchFamily="34" charset="-120"/>
+              </a:rPr>
+              <a:t> L03</a:t>
+            </a:r>
+            <a:r>
+              <a:rPr lang="en-US" sz="1800" dirty="0" spc="0" kern="0">
+                <a:solidFill>
+                  <a:srgbClr val="6B6A66"/>
+                </a:solidFill>
+                <a:latin typeface="Be Vietnam Pro" pitchFamily="34" charset="0"/>
+                <a:ea typeface="Be Vietnam Pro" pitchFamily="34" charset="-122"/>
+                <a:cs typeface="Be Vietnam Pro" pitchFamily="34" charset="-120"/>
+              </a:rPr>
+              <a:t> ·</a:t>
+            </a:r>
+            <a:r>
+              <a:rPr lang="en-US" sz="1800" dirty="0" spc="3" kern="0">
+                <a:solidFill>
+                  <a:srgbClr val="6B6A66"/>
+                </a:solidFill>
+                <a:latin typeface="Be Vietnam Pro" pitchFamily="34" charset="0"/>
+                <a:ea typeface="Be Vietnam Pro" pitchFamily="34" charset="-122"/>
+                <a:cs typeface="Be Vietnam Pro" pitchFamily="34" charset="-120"/>
+              </a:rPr>
+              <a:t> 09/18</a:t>
+            </a:r>
+            <a:endParaRPr lang="en-US" sz="1800" dirty="0"/>
+          </a:p>
+        </p:txBody>
+      </p:sp>
+      <p:sp>
+        <p:nvSpPr>
+          <p:cNvPr id="32" name="Shape 30"/>
           <p:cNvSpPr/>
           <p:nvPr/>
         </p:nvSpPr>
@@ -21313,7 +23339,7 @@
       </p:sp>
       <p:pic>
         <p:nvPicPr>
-          <p:cNvPr id="31" name="Moda image moda-export-watermark-7dc2b1be-3bd1-47f9-8aeb-d853ece133a2" descr="">    </p:cNvPr>
+          <p:cNvPr id="33" name="Moda image moda-export-watermark-575cca08-8870-4f87-83c9-75c6fc5adde9" descr="">    </p:cNvPr>
           <p:cNvPicPr>
             <a:picLocks noChangeAspect="1"/>
           </p:cNvPicPr>
